--- a/docs/SmartLogis_AI_Presentation_Deck.pptx
+++ b/docs/SmartLogis_AI_Presentation_Deck.pptx
@@ -516,17 +516,22 @@
           <a:lstStyle/>
           <a:p>
             <a:r>
-              <a:t>Thời lượng: 60s</a:t>
-            </a:r>
-          </a:p>
-          <a:p>
-            <a:r>
-              <a:t>Lời thoại: Kính thưa Thầy/Cô trong Hội đồng! Trong kỷ nguyên chuỗi cung ứng số hóa, kho vận là trái tim luân chuyển dòng vốn. Hôm nay chúng em xin trân trọng giới thiệu SmartLogis AI - Hệ Thống Quản Lý Kho Thông Minh Tích Hợp AI và Bảo Toàn Giao Dịch ACID. Hệ thống giải quyết triệt để vấn đề mất mát dữ liệu và xung đột tồn kho bằng giải thuật Atomic SQL Decrement, đồng thời tích hợp Trợ lý Trí tuệ Nhân tạo Google Gemini giúp ban điều hành ra quyết định chính xác.</a:t>
-            </a:r>
-          </a:p>
-          <a:p>
-            <a:r>
-              <a:t>Mẹo tương tác: Giọng tự tin, nhấn mạnh 100% ACID và Google Gemini AI.</a:t>
+              <a:t>Thời lượng: 60 giây</a:t>
+            </a:r>
+          </a:p>
+          <a:p>
+            <a:r>
+              <a:t>Kính thưa Quý Thầy/Cô trong Hội đồng Đánh giá Đồ án Tốt nghiệp Kỹ thuật Phần mềm Khóa K23A!</a:t>
+            </a:r>
+          </a:p>
+          <a:p>
+            <a:r>
+              <a:t>Hôm nay, nhóm chúng em gồm 02 thành viên: Nguyễn Thành Hưng đảm nhiệm vai trò Product Owner kiêm Lead Fullstack Developer và Hoàng Tiến Đạt đảm nhiệm vai trò Scrum Master kiêm Database Architect &amp; AI/QA Engineer, xin trân trọng báo cáo đề tài: 'Hệ Thống Quản Lý Kho Thông Minh Tích Hợp Trí Tuệ Nhân Tạo &amp; Bảo Toàn Giao Dịch ACID (SmartLogis AI)'.</a:t>
+            </a:r>
+          </a:p>
+          <a:p>
+            <a:r>
+              <a:t>Đề tài tập trung giải quyết hai bài toán kỹ thuật cốt lõi: Bảo toàn tính nhất quán tuyệt đối của dữ liệu kho với giải thuật Atomic SQL Decrement, và ứng dụng Trí tuệ nhân tạo Google Gemini nhằm tự động hóa công tác cảnh báo, điều phối chuỗi cung ứng nhưng vẫn bảo vệ tuyệt đối bí mật kinh doanh.</a:t>
             </a:r>
           </a:p>
         </p:txBody>
@@ -596,17 +601,27 @@
           <a:lstStyle/>
           <a:p>
             <a:r>
-              <a:t>Thời lượng: 70s</a:t>
-            </a:r>
-          </a:p>
-          <a:p>
-            <a:r>
-              <a:t>Lời thoại: Một hệ thống doanh nghiệp không thể ngừng hoạt động chỉ vì mất kết nối Internet hay nhà cung cấp AI gặp sự cố mã lỗi 429 Quota Exceeded. Do đó, chúng em xây dựng Local Grounded Fallback Engine. Hệ thống được trang bị cơ chế thử lại Exponential Backoff 3 lần. Nếu API bên ngoài vẫn không phản hồi, bộ phân tích toán học nội bộ sẽ tự động kích hoạt ngay lập tức: tự tính toán số dư tồn, tốc độ xuất kho và sinh ra báo cáo 3 phần chuẩn xác 100% dựa trên dữ liệu thật.</a:t>
-            </a:r>
-          </a:p>
-          <a:p>
-            <a:r>
-              <a:t>Mẹo tương tác: Nhấn mạnh thông điệp: 'Tính sẵn sàng cao là tiêu chuẩn bắt buộc của phần mềm cấp doanh nghiệp'.</a:t>
+              <a:t>Thời lượng: 70 giây</a:t>
+            </a:r>
+          </a:p>
+          <a:p>
+            <a:r>
+              <a:t>Trong kỹ thuật phần mềm, tính sẵn sàng cao (High Availability) là tiêu chí sống còn:</a:t>
+            </a:r>
+          </a:p>
+          <a:p>
+            <a:r>
+              <a:t>- Một hệ thống quản lý kho không thể ngừng hoạt động chỉ vì nhà cung cấp AI bên ngoài bị nghẽn mạng hoặc hết hạn ngạch truy vấn (HTTP 429 Rate Limit).</a:t>
+            </a:r>
+          </a:p>
+          <a:p>
+            <a:r>
+              <a:t>- Để giải quyết, chúng em xây dựng Local Grounded Fallback Engine: Khi gọi Gemini API gặp lỗi sau 3 lần thử lại Exponential Backoff, hệ thống sẽ âm thầm chuyển sang thuật toán toán học nội bộ.</a:t>
+            </a:r>
+          </a:p>
+          <a:p>
+            <a:r>
+              <a:t>- Thuật toán này truy vấn trực tiếp từ bảng 'ton_kho' và 'the_kho', tính toán Burn-rate và tự sinh báo cáo 3 phần chuẩn xác 100% dựa trên dữ liệu thật. Người dùng vẫn nhận được báo cáo điều hành đầy đủ mà hệ thống không bao giờ bị lỗi sập.</a:t>
             </a:r>
           </a:p>
         </p:txBody>
@@ -676,17 +691,37 @@
           <a:lstStyle/>
           <a:p>
             <a:r>
-              <a:t>Thời lượng: 75s</a:t>
-            </a:r>
-          </a:p>
-          <a:p>
-            <a:r>
-              <a:t>Lời thoại: Quy trình phát triển SmartLogis AI được tổ chức chặt chẽ qua 4 giai đoạn kỹ thuật phần mềm: Giai đoạn 1 thiết kế kiến trúc phân tầng và chuẩn hóa mô hình thực thể 3NF. Giai đoạn 2 kiểm toán sâu, giải quyết lỗi đua lệnh bằng Atomic SQL Decrement và thiết lập 8 chỉ mục B-Tree. Giai đoạn 3 hiện thực hóa mô hình AI với Google Gemini, Data Sanitizer và Fallback Engine. Và Giai đoạn 4 hoàn thiện đóng gói Docker Compose đa container, cấu hình Nginx Gateway và đạt độ phủ kiểm thử tự động tuyệt đối.</a:t>
-            </a:r>
-          </a:p>
-          <a:p>
-            <a:r>
-              <a:t>Mẹo tương tác: Quét tay theo chiều ngang qua 4 giai đoạn, thể hiện sự hoàn thiện trọn vẹn và tính kỷ luật của nhóm dự án.</a:t>
+              <a:t>Thời lượng: 75 giây</a:t>
+            </a:r>
+          </a:p>
+          <a:p>
+            <a:r>
+              <a:t>Đồ án được triển khai theo mô hình Agile Scrum gồm 02 thành viên qua 4 Sprint phát triển rõ ràng:</a:t>
+            </a:r>
+          </a:p>
+          <a:p>
+            <a:r>
+              <a:t>- Sprint 1: Thiết kế ERD 11 bảng chuẩn 3NF, giải quyết bài toán chống tồn âm bằng Atomic SQL Decrement và cấu hình SQLite WAL.</a:t>
+            </a:r>
+          </a:p>
+          <a:p>
+            <a:r>
+              <a:t>- Sprint 2: Hiện thực hóa phân hệ AI với Gemini API, module Data Sanitizer và Local Grounded Fallback Engine.</a:t>
+            </a:r>
+          </a:p>
+          <a:p>
+            <a:r>
+              <a:t>- Sprint 3: Hoàn thiện đồng bộ thời gian thực qua WebSocket, bảo mật phân quyền RBAC 3 vai trò và Tab Session Isolation.</a:t>
+            </a:r>
+          </a:p>
+          <a:p>
+            <a:r>
+              <a:t>- Sprint 4: Viết bộ kiểm thử tự động toàn diện với Pytest, đóng gói Docker Compose và hoàn thiện tài liệu thuyết minh đồ án.</a:t>
+            </a:r>
+          </a:p>
+          <a:p>
+            <a:r>
+              <a:t>Sự phân công rõ ràng giữa PO và Scrum Master giúp dự án duy trì tiến độ ổn định và đạt chất lượng cao.</a:t>
             </a:r>
           </a:p>
         </p:txBody>
@@ -756,17 +791,32 @@
           <a:lstStyle/>
           <a:p>
             <a:r>
-              <a:t>Thời lượng: 80s</a:t>
-            </a:r>
-          </a:p>
-          <a:p>
-            <a:r>
-              <a:t>Lời thoại: Để đảm bảo hệ thống đủ tiêu chuẩn vận hành thực tế, chúng em xây dựng bộ kiểm thử tự động toàn diện bằng framework Pytest gồm 16 kịch bản trọng yếu. Đặc biệt, chúng em thực hiện bài kiểm thử Concurrency Stress Test bằng ThreadPoolExecutor: giả lập nhiều thủ kho cùng xuất vét kho đồng thời, kết quả chứng minh tồn kho dừng lại chính xác ở số dư khả dụng và không bao giờ bị âm. Cùng với đó là các kịch bản kiểm thử RBAC chặt chẽ đảm bảo Nhân viên kho bị chặn 403 khi thao tác trái quyền. Toàn bộ 16 test cases từ bảo mật AI, giao dịch ACID, phân quyền RBAC đến xuất báo cáo Excel đều vượt qua với tỷ lệ thành công 100%.</a:t>
-            </a:r>
-          </a:p>
-          <a:p>
-            <a:r>
-              <a:t>Mẹo tương tác: Nhấn mạnh bài test Concurrency và tỷ lệ 16/16 test cases passed để tạo sự thuyết phục cao nhất với hội đồng kỹ thuật.</a:t>
+              <a:t>Thời lượng: 80 giây</a:t>
+            </a:r>
+          </a:p>
+          <a:p>
+            <a:r>
+              <a:t>Để đảm bảo chất lượng phần mềm theo chuẩn kỹ thuật, nhóm nghiên cứu đã xây dựng bộ kiểm thử tự động toàn diện với 66 Test Cases sử dụng Pytest:</a:t>
+            </a:r>
+          </a:p>
+          <a:p>
+            <a:r>
+              <a:t>- Bài kiểm thử Concurrency Stress Test: Sử dụng ThreadPoolExecutor giả lập nhiều luồng thủ kho cùng gửi yêu cầu xuất kho tại cùng một mili-giây. Kết quả khẳng định số tồn kho dừng lại chính xác tại 0, không bao giờ bị âm.</a:t>
+            </a:r>
+          </a:p>
+          <a:p>
+            <a:r>
+              <a:t>- Bài kiểm thử Ledger Sync: Kiểm chứng tính bất biến giữa số dư lũy kế trên Thẻ kho và số tồn thực tế trong bảng ton_kho qua chuỗi nhiều giao dịch liên tiếp.</a:t>
+            </a:r>
+          </a:p>
+          <a:p>
+            <a:r>
+              <a:t>- Bài kiểm thử AI Security: Kiểm tra tự động 100% payload nạp cho Gemini, xác nhận không có bất kỳ trường giá nhập hay thành tiền nào lọt qua.</a:t>
+            </a:r>
+          </a:p>
+          <a:p>
+            <a:r>
+              <a:t>Toàn bộ 66 test cases đều vượt qua 100% trong khoảng 40 giây thực thi.</a:t>
             </a:r>
           </a:p>
         </p:txBody>
@@ -836,17 +886,27 @@
           <a:lstStyle/>
           <a:p>
             <a:r>
-              <a:t>Thời lượng: 75s</a:t>
-            </a:r>
-          </a:p>
-          <a:p>
-            <a:r>
-              <a:t>Lời thoại: Về mặt vận hành triển khai, SmartLogis AI được đóng gói hoàn chỉnh bằng Docker Compose với kiến trúc 4 container độc lập: Nginx đóng vai trò Reverse Proxy làm cổng vào duy nhất, bảo vệ hệ thống với chứng chỉ bảo mật SSL HTTPS; cụm Backend FastAPI xử lý logic; PostgreSQL 15 đảm bảo an toàn dữ liệu; và pgAdmin 4 hỗ trợ quản trị trực quan. Đặc biệt, hệ thống hỗ trợ truy cập đa thiết bị trong mạng LAN: thủ kho có thể dùng máy tính bảng hoặc điện thoại di động kết nối trực tiếp để quét mã và thao tác xuất nhập kho ngay tại hiện trường.</a:t>
-            </a:r>
-          </a:p>
-          <a:p>
-            <a:r>
-              <a:t>Mẹo tương tác: Giơ điện thoại hoặc tablet lên làm động tác minh họa việc thủ kho truy cập qua mạng Wi-Fi tại hiện trường.</a:t>
+              <a:t>Thời lượng: 75 giây</a:t>
+            </a:r>
+          </a:p>
+          <a:p>
+            <a:r>
+              <a:t>Về mô hình triển khai và khả năng kết nối đa thiết bị:</a:t>
+            </a:r>
+          </a:p>
+          <a:p>
+            <a:r>
+              <a:t>- Hệ thống được đóng gói hoàn chỉnh bằng Docker Compose với 4 container độc lập: Nginx Reverse Proxy làm cổng vào bảo mật HTTPS; FastAPI Backend xử lý ứng dụng; PostgreSQL 15 quản trị dữ liệu; và pgAdmin 4 phục vụ quản trị.</a:t>
+            </a:r>
+          </a:p>
+          <a:p>
+            <a:r>
+              <a:t>- Điểm mạnh thực tiễn là khả năng hỗ trợ truy cập đa thiết bị trong mạng LAN: Thủ kho có thể cầm điện thoại di động hoặc máy tính bảng kết nối qua Wi-Fi nội bộ để thao tác kiểm đếm trực tiếp tại kho bãi.</a:t>
+            </a:r>
+          </a:p>
+          <a:p>
+            <a:r>
+              <a:t>- Khi một phiếu xuất hoặc nhập được lập thành công, WebSocket Manager sẽ broadcast ngay lập tức một gói tin sự kiện tới tất cả các thiết bị đang mở màn hình, giúp số dư tồn kho đồng bộ tức thì dưới 100 mili-giây mà không cần tải lại trang.</a:t>
             </a:r>
           </a:p>
         </p:txBody>
@@ -916,17 +976,37 @@
           <a:lstStyle/>
           <a:p>
             <a:r>
-              <a:t>Thời lượng: 60s</a:t>
-            </a:r>
-          </a:p>
-          <a:p>
-            <a:r>
-              <a:t>Lời thoại: Sau đây, chúng em xin phép được bắt đầu phần Live Demo hệ thống thực tế trong đúng 5 phút theo lộ trình chuẩn: Phút 1: Đăng nhập so sánh 2 vai trò Thủ kho kiêm Kế toán và Nhân viên kho để thấy rõ phân quyền RBAC; Phút 2: Tương tác với AI Widget để nhận báo cáo phân tích chiến lược từ Google Gemini; Phút 3: Trực tiếp 'thử thách' tính toàn vẹn hệ thống bằng cách xuất vượt số lượng tồn kho để quan sát cơ chế chống tồn âm; Phút 4: Lập phiếu nhập và tra cứu sổ Thẻ kho; Và Phút 5: Thanh tra trực tiếp payload gửi tới AI để chứng minh 100% giá vốn đã được khử nhạy cảm.</a:t>
-            </a:r>
-          </a:p>
-          <a:p>
-            <a:r>
-              <a:t>Mẹo tương tác: Chuyển sang màn hình trình chiếu trình duyệt web, bắt đầu thao tác mượt mà theo đúng 5 bước đã nêu.</a:t>
+              <a:t>Thời lượng: 60 giây</a:t>
+            </a:r>
+          </a:p>
+          <a:p>
+            <a:r>
+              <a:t>Kính thưa Hội đồng, để kiểm chứng các tính năng kỹ thuật đã trình bày, nhóm chúng em xin phép được thực hiện phần Live Demo trực tiếp trong 5 phút:</a:t>
+            </a:r>
+          </a:p>
+          <a:p>
+            <a:r>
+              <a:t>- Phút 1: Trình diễn ma trận phân quyền RBAC qua 2 tài khoản 'thukho' và 'nhanvien' trên 2 tab trình duyệt riêng biệt.</a:t>
+            </a:r>
+          </a:p>
+          <a:p>
+            <a:r>
+              <a:t>- Phút 2: Tương tác với Trợ lý AI để xuất Báo cáo 3 phần phân tích sức khỏe kho và đề xuất nhập hàng dựa trên Burn-rate.</a:t>
+            </a:r>
+          </a:p>
+          <a:p>
+            <a:r>
+              <a:t>- Phút 3: Trực tiếp gửi yêu cầu xuất vượt tồn kho để quan sát cơ chế Atomic SQL Decrement chặn lỗi 400 và bảo toàn số dư.</a:t>
+            </a:r>
+          </a:p>
+          <a:p>
+            <a:r>
+              <a:t>- Phút 4: Lập phiếu nhập và kiểm tra sự đồng bộ tức thì của sổ cái Thẻ kho lũy kế.</a:t>
+            </a:r>
+          </a:p>
+          <a:p>
+            <a:r>
+              <a:t>- Phút 5: Mở API /raw-context để Hội đồng kiểm toán tính năng khử sạch 100% giá vốn của Data Sanitizer.</a:t>
             </a:r>
           </a:p>
         </p:txBody>
@@ -996,17 +1076,27 @@
           <a:lstStyle/>
           <a:p>
             <a:r>
-              <a:t>Thời lượng: 60s</a:t>
-            </a:r>
-          </a:p>
-          <a:p>
-            <a:r>
-              <a:t>Lời thoại: Kính thưa Hội đồng, SmartLogis AI đã hoàn thành 100% các mục tiêu đề ra với 16/16 test cases đạt chuẩn, mang lại một giải pháp quản trị kho vận toàn diện: vừa an toàn tuyệt đối với giao dịch ACID chống tồn âm trên cả MySQL 8.0 và SQLite, vừa thông minh vượt bậc với sự trợ lực từ Google Gemini, phân quyền 3 vai trò thực tế và sẵn sàng triển khai ngay vào doanh nghiệp. Trong tương lai, chúng em sẽ tiếp tục mở rộng mô hình học máy chuỗi thời gian để dự báo nhu cầu theo mùa vụ công trình và phát triển ứng dụng di động quét mã vạch tại hiện trường bãi vật tư. Chúng em xin trân trọng cảm ơn sự hướng dẫn tận tình của Thầy/Cô và rất mong nhận được những góp ý quý báu từ Hội đồng để hoàn thiện dự án hơn nữa. Xin trân trọng cảm ơn!</a:t>
-            </a:r>
-          </a:p>
-          <a:p>
-            <a:r>
-              <a:t>Mẹo tương tác: Cúi đầu chào trang trọng, mỉm cười tự tin, chuyển sang trạng thái sẵn sàng lắng nghe câu hỏi phản biện.</a:t>
+              <a:t>Thời lượng: 60 giây</a:t>
+            </a:r>
+          </a:p>
+          <a:p>
+            <a:r>
+              <a:t>Kính thưa Quý Thầy/Cô trong Hội đồng!</a:t>
+            </a:r>
+          </a:p>
+          <a:p>
+            <a:r>
+              <a:t>Đề tài SmartLogis AI đã hoàn thành 100% mục tiêu đề ra: xây dựng thành công một giải pháp quản lý kho bảo toàn giao dịch ACID chống tồn âm, tích hợp trợ lý Trí tuệ Nhân tạo hỗ trợ điều hành nhưng vẫn bảo mật tuyệt đối bí mật kinh doanh, và đạt độ phủ kiểm thử tự động 66/66 test cases.</a:t>
+            </a:r>
+          </a:p>
+          <a:p>
+            <a:r>
+              <a:t>Trong giai đoạn tiếp theo, nhóm nghiên cứu dự kiến sẽ phát triển ứng dụng di động quét mã QR/RFID tại kho bãi và mở rộng thuật toán học máy chuỗi thời gian để nâng cao độ chính xác dự báo theo mùa vụ.</a:t>
+            </a:r>
+          </a:p>
+          <a:p>
+            <a:r>
+              <a:t>Nhóm chúng em xin trân trọng cảm ơn sự hướng dẫn tận tình của Quý Thầy/Cô. Chúng em xin sẵn sàng lắng nghe các ý kiến nhận xét và trả lời câu hỏi phản biện từ Hội đồng!</a:t>
             </a:r>
           </a:p>
         </p:txBody>
@@ -1076,17 +1166,32 @@
           <a:lstStyle/>
           <a:p>
             <a:r>
-              <a:t>Thời lượng: 90s</a:t>
-            </a:r>
-          </a:p>
-          <a:p>
-            <a:r>
-              <a:t>Lời thoại: Khảo sát thực tế tại các kho vật tư xây dựng cho thấy 4 nỗi đau kinh điển: Thứ nhất, lỗi tồn kho âm do Race Condition. Thứ hai, đứt gãy chuỗi cung ứng do không dự báo được Burn-rate. Thứ ba, ứ đọng vốn với hàng chục SKU nằm kho trên 60 ngày. Và thứ tư, rủi ro lộ bí mật giá vốn khi đưa dữ liệu lên Cloud AI. SmartLogis AI ra đời để giải quyết triệt để 4 bài toán này.</a:t>
-            </a:r>
-          </a:p>
-          <a:p>
-            <a:r>
-              <a:t>Mẹo tương tác: Giơ ngón tay đếm từ 1 đến 4, tạo sự đồng cảm với khó khăn thực tế của doanh nghiệp.</a:t>
+              <a:t>Thời lượng: 75 giây</a:t>
+            </a:r>
+          </a:p>
+          <a:p>
+            <a:r>
+              <a:t>Kính thưa Thầy/Cô, qua khảo sát thực tế tại các kho vật tư xây dựng, nhóm nghiên cứu đã tổng hợp được 4 thách thức kỹ thuật lớn nhất:</a:t>
+            </a:r>
+          </a:p>
+          <a:p>
+            <a:r>
+              <a:t>1. Lỗi tồn kho âm: Xảy ra khi nhiều thủ kho thao tác đồng thời. Do ứng dụng đọc tồn kho lên bộ nhớ Python rồi mới trừ, dẫn đến hiện tượng Lost Update kinh điển trong hệ quản trị CSDL.</a:t>
+            </a:r>
+          </a:p>
+          <a:p>
+            <a:r>
+              <a:t>2. Đứt gãy nguồn cung: Doanh nghiệp không có công cụ tính toán tốc độ tiêu thụ hàng ngày (Burn-rate), chỉ khi hàng hết kiệt mới đặt mua, gây chậm tiến độ thi công.</a:t>
+            </a:r>
+          </a:p>
+          <a:p>
+            <a:r>
+              <a:t>3. Hàng ứ đọng (Dead Stock): Thiếu cơ chế theo dõi tự động các SKU nằm kho trên 60 ngày không luân chuyển, gây đọng vốn.</a:t>
+            </a:r>
+          </a:p>
+          <a:p>
+            <a:r>
+              <a:t>4. Nguy cơ lộ giá vốn: Khi ứng dụng Trí tuệ Nhân tạo đám mây, nếu nạp toàn bộ dữ liệu kế toán thô gồm đơn giá mua và chiết khấu sang LLM của bên thứ ba, bí mật thương mại sẽ bị đe dọa.</a:t>
             </a:r>
           </a:p>
         </p:txBody>
@@ -1156,17 +1261,27 @@
           <a:lstStyle/>
           <a:p>
             <a:r>
-              <a:t>Thời lượng: 75s</a:t>
-            </a:r>
-          </a:p>
-          <a:p>
-            <a:r>
-              <a:t>Lời thoại: SmartLogis AI thiết lập 3 mục tiêu chiến lược: Thứ nhất, 100% Zero Negative Stock. Thứ hai, Trợ lý Trí tuệ Nhân tạo Google Gemini tính toán Burn-rate và đưa khuyến nghị nhập hàng tức thời. Thứ ba, nguyên tắc Zero Financial Leakage bảo vệ bí mật kinh doanh với module Data Sanitizer độc quyền.</a:t>
-            </a:r>
-          </a:p>
-          <a:p>
-            <a:r>
-              <a:t>Mẹo tương tác: Nhấn giọng tại cụm từ 'Zero Negative Stock' và 'Zero Financial Leakage'.</a:t>
+              <a:t>Thời lượng: 70 giây</a:t>
+            </a:r>
+          </a:p>
+          <a:p>
+            <a:r>
+              <a:t>Từ 4 bài toán thực tế, nhóm nghiên cứu xác lập 3 trụ cột kỹ thuật trọng tâm:</a:t>
+            </a:r>
+          </a:p>
+          <a:p>
+            <a:r>
+              <a:t>Thứ nhất: Triệt tiêu hoàn toàn rủi ro tồn âm bằng cơ chế kiểm soát 2 tầng: Tầng ứng dụng thực thi Atomic SQL Decrement kết hợp Tầng CSDL ràng buộc CheckConstraint phần cứng.</a:t>
+            </a:r>
+          </a:p>
+          <a:p>
+            <a:r>
+              <a:t>Thứ hai: Xây dựng Trợ lý AI trên nền tảng Google Gemini để tự động tính toán Burn-rate tiêu thụ và xuất báo cáo 3 phần, hỗ trợ ban lãnh đạo ra quyết định nhập hàng kịp thời.</a:t>
+            </a:r>
+          </a:p>
+          <a:p>
+            <a:r>
+              <a:t>Thứ ba: Thiết lập cơ chế bảo mật kép với Data Sanitizer lọc sạch 100% giá vốn nhạy cảm trước khi nạp context, và dự phòng Local Grounded Fallback Engine giúp hệ thống vận hành liên tục ngay cả khi mất mạng.</a:t>
             </a:r>
           </a:p>
         </p:txBody>
@@ -1236,17 +1351,32 @@
           <a:lstStyle/>
           <a:p>
             <a:r>
-              <a:t>Thời lượng: 80s</a:t>
-            </a:r>
-          </a:p>
-          <a:p>
-            <a:r>
-              <a:t>Lời thoại: Về mặt kiến trúc, SmartLogis AI áp dụng mô hình phân tầng Modular Clean Architecture: Tầng Presentation sử dụng kết hợp Jinja2 Server-Side Rendering và Tailwind CSS giúp tối ưu tốc độ phản hồi trang dưới 50 mili-giây. Tầng Security đảm bảo xác thực bằng JSON Web Token với cơ chế bảo vệ HTTP-only Cookie và phân quyền RBAC nghiêm ngặt 3 vai trò: Admin, Thủ kho kiêm Kế toán và Nhân viên kho. Tầng Nghiệp vụ đóng vai trò bộ não điều phối, nơi xử lý các transaction ACID và kết nối với Google Gemini Engine. Và dưới cùng là tầng CSDL với SQLite chế độ WAL hoặc MySQL 8.0 InnoDB tối ưu hóa bằng 8 B-Tree Indexes.</a:t>
-            </a:r>
-          </a:p>
-          <a:p>
-            <a:r>
-              <a:t>Mẹo tương tác: Quét tay theo thứ tự từ tầng trên xuống tầng dưới để người nghe nắm bắt luồng kiến trúc.</a:t>
+              <a:t>Thời lượng: 75 giây</a:t>
+            </a:r>
+          </a:p>
+          <a:p>
+            <a:r>
+              <a:t>Về mặt kiến trúc, SmartLogis AI được thiết kế theo mô hình phân tầng chặt chẽ (Separation of Concerns):</a:t>
+            </a:r>
+          </a:p>
+          <a:p>
+            <a:r>
+              <a:t>- Tầng Presentation: Kết hợp Jinja2 Server-Side Rendering tối ưu thời gian tải trang ban đầu và WebSocket Client cập nhật thời gian thực không cần reload trang.</a:t>
+            </a:r>
+          </a:p>
+          <a:p>
+            <a:r>
+              <a:t>- Tầng Security: Sử dụng JWT lưu trong Cookie HTTPOnly chống tấn công XSS. Điểm đặc biệt là cơ chế Tab Session Isolation qua header X-Session-User, ngăn chặn lỗi nhầm lẫn tài khoản khi mở nhiều tab.</a:t>
+            </a:r>
+          </a:p>
+          <a:p>
+            <a:r>
+              <a:t>- Tầng Nghiệp vụ: Chứa đựng các Service điều phối giao dịch ACID và phân hệ AI độc lập.</a:t>
+            </a:r>
+          </a:p>
+          <a:p>
+            <a:r>
+              <a:t>- Tầng CSDL: Sử dụng kiến trúc Dual-Database linh hoạt: SQLite WAL cho môi trường kiểm thử cục bộ và PostgreSQL 15 cho môi trường sản xuất, được tối ưu với 8 B-Tree Indexes.</a:t>
             </a:r>
           </a:p>
         </p:txBody>
@@ -1316,17 +1446,27 @@
           <a:lstStyle/>
           <a:p>
             <a:r>
-              <a:t>Thời lượng: 75s</a:t>
-            </a:r>
-          </a:p>
-          <a:p>
-            <a:r>
-              <a:t>Lời thoại: Đi sâu vào tầng dữ liệu, mô hình CSDL của chúng em gồm 10 bảng thực thể được chuẩn hóa nghiêm ngặt theo dạng chuẩn 3NF. Bảng ton_kho gắn chặt quan hệ 1-1 với hang_hoa, và mọi biến động đều tự động ghi sổ vào bảng the_kho. Hệ thống hỗ trợ song song SQLite WAL và MySQL 8.0 InnoDB với 8 chỉ mục B-Tree Index trên các trường khóa ngoại và thời gian giao dịch, giúp giảm độ trễ truy vấn báo cáo 30 ngày xuống dưới 5 mili-giây. Đồng thời, các CheckConstraint cấp CSDL bảo đảm không ai có thể ghi số âm vào hệ thống.</a:t>
-            </a:r>
-          </a:p>
-          <a:p>
-            <a:r>
-              <a:t>Mẹo tương tác: Chỉ vào các dòng hỗ trợ SQLite/MySQL và 8 B-Tree Indexes để chứng minh năng lực tối ưu hệ thống sâu.</a:t>
+              <a:t>Thời lượng: 75 giây</a:t>
+            </a:r>
+          </a:p>
+          <a:p>
+            <a:r>
+              <a:t>Cơ sở dữ liệu của SmartLogis AI gồm 11 bảng thực thể đạt chuẩn 3NF:</a:t>
+            </a:r>
+          </a:p>
+          <a:p>
+            <a:r>
+              <a:t>1. Tách biệt rõ ràng: Bảng 'ton_kho' quản lý số dư khả dụng tức thời có quan hệ 1-1 với 'hang_hoa', trong khi 'the_kho' đóng vai trò sổ cái kế toán bất biến ghi nhận mọi biến động xuất nhập.</a:t>
+            </a:r>
+          </a:p>
+          <a:p>
+            <a:r>
+              <a:t>2. Ràng buộc phần cứng: Bên cạnh kiểm tra ở tầng code, chúng em áp dụng CheckConstraint phần cứng cấp CSDL (SoLuongTon &gt;= 0 và TonSauGiaoDich &gt;= 0). Dù có ai can thiệp trực tiếp vào database thì cũng không thể ghi nhận số dư âm.</a:t>
+            </a:r>
+          </a:p>
+          <a:p>
+            <a:r>
+              <a:t>3. Tối ưu hóa truy vấn: Thiết lập 8 B-Tree Indexes chiến lược trên các trường khóa ngoại và mốc thời gian, giúp truy vấn báo cáo luân chuyển 30 ngày đạt tốc độ phản hồi dưới 5ms.</a:t>
             </a:r>
           </a:p>
         </p:txBody>
@@ -1396,17 +1536,27 @@
           <a:lstStyle/>
           <a:p>
             <a:r>
-              <a:t>Thời lượng: 90s</a:t>
-            </a:r>
-          </a:p>
-          <a:p>
-            <a:r>
-              <a:t>Lời thoại: Đây là một trong những điểm sáng kỹ thuật quan trọng nhất của đồ án. Thông thường, các lập trình viên hay đọc tồn kho vào biến Python rồi trừ ton.SoLuongTon -= qty. Cách làm này dẫn tới thảm họa Lost Update khi nhiều người cùng thao tác. Để khắc phục, SmartLogis AI áp dụng Atomic SQL Decrement: đẩy toàn bộ điều kiện trừ xuống cấp SQL Engine với mệnh đề WHERE SoLuongTon &gt;= :qty. Nếu tại thời điểm ghi số lượng không đủ, rowcount trả về bằng 0, hệ thống lập tức Rollback toàn bộ chứng từ Master-Detail và trả về lỗi 400 rõ ràng.</a:t>
-            </a:r>
-          </a:p>
-          <a:p>
-            <a:r>
-              <a:t>Mẹo tương tác: Dùng tay miêu tả hai luồng truy cập song song để hội đồng cảm nhận rõ nét hiểm họa của Race Condition và sự ưu việt của Atomic SQL.</a:t>
+              <a:t>Thời lượng: 80 giây</a:t>
+            </a:r>
+          </a:p>
+          <a:p>
+            <a:r>
+              <a:t>Đây là điểm sáng kỹ thuật quan trọng nhất về mặt toàn vẹn dữ liệu của đồ án:</a:t>
+            </a:r>
+          </a:p>
+          <a:p>
+            <a:r>
+              <a:t>- Ở cách làm thông thường, lập trình viên hay select tồn kho ra một biến Python, kiểm tra 'if ton &gt;= xuat', rồi mới trừ và lưu lại. Khi có hai giao dịch đồng thời cùng đọc tồn kho là 10 và mỗi bên yêu cầu xuất 8, cả hai bên đều thấy đủ hàng và cùng thực thi, dẫn đến tổng xuất là 16 trong khi kho chỉ có 10!</a:t>
+            </a:r>
+          </a:p>
+          <a:p>
+            <a:r>
+              <a:t>- SmartLogis AI giải quyết triệt để vấn đề này bằng Atomic SQL Decrement: Chúng em đưa điều kiện 'WHERE SoLuongTon &gt;= :so_luong_xuat' vào trực tiếp câu lệnh UPDATE. CSDL sẽ khóa dòng và thực thi kiểm tra - trừ tồn trong đúng một thao tác nguyên tử.</a:t>
+            </a:r>
+          </a:p>
+          <a:p>
+            <a:r>
+              <a:t>- Nếu một bên tranh chấp trước làm số lượng còn lại không đủ, CSDL trả về 'rowcount == 0'. Backend bắt được tín hiệu này sẽ lập tức gọi db.rollback() và trả về HTTP 400 báo lỗi rõ ràng.</a:t>
             </a:r>
           </a:p>
         </p:txBody>
@@ -1476,17 +1626,22 @@
           <a:lstStyle/>
           <a:p>
             <a:r>
-              <a:t>Thời lượng: 75s</a:t>
-            </a:r>
-          </a:p>
-          <a:p>
-            <a:r>
-              <a:t>Lời thoại: Bên cạnh giải thuật chống tồn âm, SmartLogis AI đóng gói toàn bộ quy trình Nhập - Xuất kho trong một giao dịch ACID nguyên tử duy nhất gồm 4 bước. Đồng thời, mô hình phân quyền RBAC được tối ưu hóa cho thực tế doanh nghiệp với 3 vai trò rõ ràng: Admin nắm toàn quyền hệ thống; Thủ kho kiêm Kế toán được trao quyền vận hành kho, lập chứng từ và kết xuất báo cáo tài chính kế toán; trong khi Nhân viên kho (Staff) chỉ có quyền tra cứu danh mục để kiểm đếm hiện trường và bị chặn hoàn toàn các thao tác sửa đổi hay lập phiếu (HTTP 403).</a:t>
-            </a:r>
-          </a:p>
-          <a:p>
-            <a:r>
-              <a:t>Mẹo tương tác: Chỉ vào cột 'Nhân viên kho (Staff)' và nhấn mạnh tính phân quyền phân cấp bảo mật chặt chẽ trong doanh nghiệp.</a:t>
+              <a:t>Thời lượng: 70 giây</a:t>
+            </a:r>
+          </a:p>
+          <a:p>
+            <a:r>
+              <a:t>Về quy trình vận hành và kiểm soát truy cập:</a:t>
+            </a:r>
+          </a:p>
+          <a:p>
+            <a:r>
+              <a:t>1. Chu trình giao dịch ACID 4 bước: Từ tạo Header chứng từ, lưu Detail các SKU, thực thi Atomic Decrement tồn kho, đến ghi nhận biến động Thẻ kho. Tất cả gói gọn trong một Database Transaction. Nếu một SKU bị thiếu hàng, toàn bộ phiếu xuất bị rollback về trạng thái ban đầu, không bao giờ có chuyện xuất dở dang một phần.</a:t>
+            </a:r>
+          </a:p>
+          <a:p>
+            <a:r>
+              <a:t>2. Phân quyền RBAC 3 vai trò: Admin nắm toàn quyền; Thủ kho kiêm Kế toán có đầy đủ thẩm quyền vận hành chứng từ và trích xuất báo cáo kế toán; còn Nhân viên kho chỉ có quyền tra cứu (Read-only) để phục vụ kiểm đếm hiện trường và bị chặn hoàn toàn các thao tác ghi dữ liệu từ tầng Backend.</a:t>
             </a:r>
           </a:p>
         </p:txBody>
@@ -1556,17 +1711,27 @@
           <a:lstStyle/>
           <a:p>
             <a:r>
-              <a:t>Thời lượng: 80s</a:t>
-            </a:r>
-          </a:p>
-          <a:p>
-            <a:r>
-              <a:t>Lời thoại: Khi đưa trí tuệ nhân tạo vào doanh nghiệp, bài toán hóc búa nhất là: 'Làm thế nào để tận dụng sức mạnh LLM mà không để lộ bí mật giá vốn?'. Câu trả lời của chúng em là module Data Sanitizer. Trước khi bất kỳ dữ liệu nào gửi đi, thuật toán quét đệ quy sẽ loại bỏ hoàn toàn các trường nhạy cảm như đơn giá nhập, thành tiền hay chiết khấu. Ngữ cảnh cung cấp cho Google Gemini chỉ thuần túy là các chỉ số vận hành. Hội đồng có thể kiểm chứng trực tiếp tính minh bạch này qua endpoint /raw-context trong phần demo.</a:t>
-            </a:r>
-          </a:p>
-          <a:p>
-            <a:r>
-              <a:t>Mẹo tương tác: Nhìn thẳng vào hội đồng, khẳng định: 'Dữ liệu tài chính không bao giờ rời khỏi máy chủ doanh nghiệp'.</a:t>
+              <a:t>Thời lượng: 75 giây</a:t>
+            </a:r>
+          </a:p>
+          <a:p>
+            <a:r>
+              <a:t>Khi đưa Trí tuệ Nhân tạo đám mây vào doanh nghiệp, thách thức bảo mật lớn nhất là bảo vệ bí mật kinh doanh:</a:t>
+            </a:r>
+          </a:p>
+          <a:p>
+            <a:r>
+              <a:t>- Module Data Sanitizer đóng vai trò một màng lọc bảo mật trung gian. Trước khi bất kỳ tập context nào được gửi sang Google Gemini API, thuật toán quét đệ quy sẽ rà soát và loại bỏ toàn bộ các trường tài chính: đơn giá nhập, thành tiền, giá vốn và chiết khấu.</a:t>
+            </a:r>
+          </a:p>
+          <a:p>
+            <a:r>
+              <a:t>- Tập dữ liệu cung cấp cho AI thuần túy là các chỉ số vận hành vật lý: số lượng tồn, ngưỡng tồn tối thiểu, tốc độ xuất bình quân ngày (Burn-rate) và số ngày nằm kho.</a:t>
+            </a:r>
+          </a:p>
+          <a:p>
+            <a:r>
+              <a:t>- Tính minh bạch này có thể được kiểm chứng tức thời thông qua API GET /api/v1/ai/raw-context trong phần demo.</a:t>
             </a:r>
           </a:p>
         </p:txBody>
@@ -1636,17 +1801,22 @@
           <a:lstStyle/>
           <a:p>
             <a:r>
-              <a:t>Thời lượng: 75s</a:t>
-            </a:r>
-          </a:p>
-          <a:p>
-            <a:r>
-              <a:t>Lời thoại: Hiện tượng 'ảo giác' là rủi ro lớn nhất của các mô hình LLM. Trong SmartLogis AI, chúng em áp dụng kỹ thuật Prompt Engineering chặt chẽ: System Instruction ràng buộc AI chỉ được phép đóng vai Senior Logistics Assistant, suy luận thuần túy trên tập JSON thực tế và trả lời theo cấu trúc 3 phần bắt buộc: Phần 1 tóm lược sức khỏe kho; Phần 2 đưa ra cảnh báo và đề xuất khối lượng nhập cụ thể; và Phần 3 chỉ điểm các mặt hàng xuất đột biến hoặc hàng chết nằm kho trên 60 ngày.</a:t>
-            </a:r>
-          </a:p>
-          <a:p>
-            <a:r>
-              <a:t>Mẹo tương tác: Chỉ vào 3 phần của báo cáo, giải thích lý do vì sao cấu trúc này tối ưu cho ban giám đốc ra quyết định nhanh.</a:t>
+              <a:t>Thời lượng: 75 giây</a:t>
+            </a:r>
+          </a:p>
+          <a:p>
+            <a:r>
+              <a:t>Hiện tượng ảo giác (hallucination) là rủi ro lớn nhất của các mô hình LLM. Nhóm chúng em kiểm soát việc này qua hai kỹ thuật chính:</a:t>
+            </a:r>
+          </a:p>
+          <a:p>
+            <a:r>
+              <a:t>1. Anti-hallucination Prompt: Sử dụng System Instruction đóng khung vai trò chuyên môn của AI, kèm điều khoản cấm tự suy đoán ngoài dữ liệu JSON. Khi kho chưa có dữ liệu, AI phải thông báo trung thực là kho rỗng chứ không được tự sinh ra số liệu giả.</a:t>
+            </a:r>
+          </a:p>
+          <a:p>
+            <a:r>
+              <a:t>2. Báo cáo chuẩn 3 phần: Kết quả trả về được định dạng cấu trúc 3 phần bắt buộc: Phần 1 tổng quan sức khỏe kho; Phần 2 đề xuất nhập hàng dựa trên Burn-rate; và Phần 3 chỉ điểm các SKU bất thường hoặc Dead Stock nằm kho trên 60 ngày. Cấu trúc này giúp người quản lý nắm bắt toàn diện bức tranh kho vận trong chưa đầy 1 phút.</a:t>
             </a:r>
           </a:p>
         </p:txBody>
@@ -4711,8 +4881,8 @@
         </p:nvSpPr>
         <p:spPr>
           <a:xfrm>
-            <a:off x="914400" y="777240"/>
-            <a:ext cx="3474720" cy="402336"/>
+            <a:off x="914400" y="640080"/>
+            <a:ext cx="3931920" cy="384048"/>
           </a:xfrm>
           <a:prstGeom prst="roundRect">
             <a:avLst/>
@@ -4745,7 +4915,7 @@
           <a:lstStyle/>
           <a:p>
             <a:pPr algn="ctr">
-              <a:defRPr sz="1250" b="1">
+              <a:defRPr sz="1200" b="1">
                 <a:solidFill>
                   <a:srgbClr val="06B6D4"/>
                 </a:solidFill>
@@ -4753,7 +4923,7 @@
               </a:defRPr>
             </a:pPr>
             <a:r>
-              <a:t>SMARTLOGIS AI • PRODUCTION V4.0</a:t>
+              <a:t>ĐỒ ÁN TỐT NGHIỆP • KỸ THUẬT PHẦN MỀM K23A</a:t>
             </a:r>
           </a:p>
         </p:txBody>
@@ -4766,8 +4936,8 @@
         </p:nvSpPr>
         <p:spPr>
           <a:xfrm>
-            <a:off x="914400" y="1325880"/>
-            <a:ext cx="10332720" cy="1737360"/>
+            <a:off x="914400" y="1170432"/>
+            <a:ext cx="10362895" cy="1691640"/>
           </a:xfrm>
           <a:prstGeom prst="rect">
             <a:avLst/>
@@ -4781,7 +4951,7 @@
           <a:lstStyle/>
           <a:p>
             <a:pPr>
-              <a:defRPr sz="4000" b="1">
+              <a:defRPr sz="3800" b="1">
                 <a:solidFill>
                   <a:srgbClr val="FFFFFF"/>
                 </a:solidFill>
@@ -4797,7 +4967,7 @@
               <a:spcBef>
                 <a:spcPts val="400"/>
               </a:spcBef>
-              <a:defRPr sz="3600" b="1">
+              <a:defRPr sz="3200" b="1">
                 <a:solidFill>
                   <a:srgbClr val="06B6D4"/>
                 </a:solidFill>
@@ -4805,7 +4975,7 @@
               </a:defRPr>
             </a:pPr>
             <a:r>
-              <a:t>TÍCH HỢP AI &amp; BẢO TOÀN GIAO DỊCH ACID</a:t>
+              <a:t>TÍCH HỢP TRÍ TUỆ NHÂN TẠO &amp; BẢO TOÀN GIAO DỊCH ACID</a:t>
             </a:r>
           </a:p>
         </p:txBody>
@@ -4818,8 +4988,8 @@
         </p:nvSpPr>
         <p:spPr>
           <a:xfrm>
-            <a:off x="914400" y="3246120"/>
-            <a:ext cx="10332720" cy="548640"/>
+            <a:off x="914400" y="2971800"/>
+            <a:ext cx="10362895" cy="457200"/>
           </a:xfrm>
           <a:prstGeom prst="rect">
             <a:avLst/>
@@ -4833,7 +5003,7 @@
           <a:lstStyle/>
           <a:p>
             <a:pPr>
-              <a:defRPr sz="1800">
+              <a:defRPr sz="1600">
                 <a:solidFill>
                   <a:srgbClr val="94A3B8"/>
                 </a:solidFill>
@@ -4841,7 +5011,7 @@
               </a:defRPr>
             </a:pPr>
             <a:r>
-              <a:t>Giải Pháp Quản Trị Kho Vận Vật Tư Công Trình: Chống Tồn Âm 2 Tầng &amp; Trợ Lý Google Gemini</a:t>
+              <a:t>Kiến trúc Giao dịch Kho Nguyên tử ACID • Tối ưu Chuỗi Cung ứng với Google Gemini LLM</a:t>
             </a:r>
           </a:p>
         </p:txBody>
@@ -4854,8 +5024,8 @@
         </p:nvSpPr>
         <p:spPr>
           <a:xfrm>
-            <a:off x="914400" y="3977639"/>
-            <a:ext cx="3273552" cy="1874519"/>
+            <a:off x="914400" y="3520440"/>
+            <a:ext cx="3328416" cy="1783080"/>
           </a:xfrm>
           <a:prstGeom prst="roundRect">
             <a:avLst/>
@@ -4884,11 +5054,11 @@
           </a:fontRef>
         </p:style>
         <p:txBody>
-          <a:bodyPr rtlCol="0" anchor="ctr" wrap="square" lIns="228600" rIns="228600" tIns="182880"/>
+          <a:bodyPr rtlCol="0" anchor="ctr" wrap="square" lIns="228600" rIns="228600" tIns="164592"/>
           <a:lstStyle/>
           <a:p>
             <a:pPr algn="ctr">
-              <a:defRPr sz="1500" b="1">
+              <a:defRPr sz="1400" b="1">
                 <a:solidFill>
                   <a:srgbClr val="06B6D4"/>
                 </a:solidFill>
@@ -4896,23 +5066,7 @@
               </a:defRPr>
             </a:pPr>
             <a:r>
-              <a:t>🛡️ 100% ACID CONCURRENCY</a:t>
-            </a:r>
-          </a:p>
-          <a:p>
-            <a:pPr>
-              <a:spcBef>
-                <a:spcPts val="600"/>
-              </a:spcBef>
-              <a:defRPr sz="1400" b="1">
-                <a:solidFill>
-                  <a:srgbClr val="FFFFFF"/>
-                </a:solidFill>
-                <a:latin typeface="Segoe UI"/>
-              </a:defRPr>
-            </a:pPr>
-            <a:r>
-              <a:t>Loại bỏ hoàn toàn lỗi Tồn âm</a:t>
+              <a:t>🛡️ GIAO DỊCH ACID NGUYÊN TỬ</a:t>
             </a:r>
           </a:p>
           <a:p>
@@ -4920,7 +5074,23 @@
               <a:spcBef>
                 <a:spcPts val="500"/>
               </a:spcBef>
-              <a:defRPr sz="1300">
+              <a:defRPr sz="1300" b="1">
+                <a:solidFill>
+                  <a:srgbClr val="FFFFFF"/>
+                </a:solidFill>
+                <a:latin typeface="Segoe UI"/>
+              </a:defRPr>
+            </a:pPr>
+            <a:r>
+              <a:t>Chống Tồn Âm 2 Tầng Kỹ Thuật</a:t>
+            </a:r>
+          </a:p>
+          <a:p>
+            <a:pPr>
+              <a:spcBef>
+                <a:spcPts val="400"/>
+              </a:spcBef>
+              <a:defRPr sz="1200">
                 <a:solidFill>
                   <a:srgbClr val="94A3B8"/>
                 </a:solidFill>
@@ -4928,7 +5098,7 @@
               </a:defRPr>
             </a:pPr>
             <a:r>
-              <a:t>• Atomic SQL Decrement &amp; DB CheckConstraints bảo vệ 2 tầng</a:t>
+              <a:t>• Atomic SQL Decrement kết hợp Database CheckConstraint</a:t>
             </a:r>
           </a:p>
         </p:txBody>
@@ -4941,8 +5111,8 @@
         </p:nvSpPr>
         <p:spPr>
           <a:xfrm>
-            <a:off x="4443984" y="3977639"/>
-            <a:ext cx="3273552" cy="1874519"/>
+            <a:off x="4425696" y="3520440"/>
+            <a:ext cx="3328416" cy="1783080"/>
           </a:xfrm>
           <a:prstGeom prst="roundRect">
             <a:avLst/>
@@ -4971,11 +5141,11 @@
           </a:fontRef>
         </p:style>
         <p:txBody>
-          <a:bodyPr rtlCol="0" anchor="ctr" wrap="square" lIns="228600" rIns="228600" tIns="182880"/>
+          <a:bodyPr rtlCol="0" anchor="ctr" wrap="square" lIns="228600" rIns="228600" tIns="164592"/>
           <a:lstStyle/>
           <a:p>
             <a:pPr algn="ctr">
-              <a:defRPr sz="1500" b="1">
+              <a:defRPr sz="1400" b="1">
                 <a:solidFill>
                   <a:srgbClr val="06B6D4"/>
                 </a:solidFill>
@@ -4983,23 +5153,7 @@
               </a:defRPr>
             </a:pPr>
             <a:r>
-              <a:t>🧠 GOOGLE GEMINI LLM</a:t>
-            </a:r>
-          </a:p>
-          <a:p>
-            <a:pPr>
-              <a:spcBef>
-                <a:spcPts val="600"/>
-              </a:spcBef>
-              <a:defRPr sz="1400" b="1">
-                <a:solidFill>
-                  <a:srgbClr val="FFFFFF"/>
-                </a:solidFill>
-                <a:latin typeface="Segoe UI"/>
-              </a:defRPr>
-            </a:pPr>
-            <a:r>
-              <a:t>Trợ lý Điều hành Tự động</a:t>
+              <a:t>🧠 TRÍ TUỆ NHÂN TẠO GEMINI</a:t>
             </a:r>
           </a:p>
           <a:p>
@@ -5007,7 +5161,23 @@
               <a:spcBef>
                 <a:spcPts val="500"/>
               </a:spcBef>
-              <a:defRPr sz="1300">
+              <a:defRPr sz="1300" b="1">
+                <a:solidFill>
+                  <a:srgbClr val="FFFFFF"/>
+                </a:solidFill>
+                <a:latin typeface="Segoe UI"/>
+              </a:defRPr>
+            </a:pPr>
+            <a:r>
+              <a:t>Cố Vấn Điều Hành Kho Thông Minh</a:t>
+            </a:r>
+          </a:p>
+          <a:p>
+            <a:pPr>
+              <a:spcBef>
+                <a:spcPts val="400"/>
+              </a:spcBef>
+              <a:defRPr sz="1200">
                 <a:solidFill>
                   <a:srgbClr val="94A3B8"/>
                 </a:solidFill>
@@ -5015,7 +5185,7 @@
               </a:defRPr>
             </a:pPr>
             <a:r>
-              <a:t>• Data Sanitizer bảo vệ 100% bí mật giá vốn khi phân tích</a:t>
+              <a:t>• Data Sanitizer khử 100% giá vốn &amp; Local Grounded Fallback</a:t>
             </a:r>
           </a:p>
         </p:txBody>
@@ -5028,8 +5198,8 @@
         </p:nvSpPr>
         <p:spPr>
           <a:xfrm>
-            <a:off x="7973568" y="3977639"/>
-            <a:ext cx="3273552" cy="1874519"/>
+            <a:off x="7936992" y="3520440"/>
+            <a:ext cx="3328416" cy="1783080"/>
           </a:xfrm>
           <a:prstGeom prst="roundRect">
             <a:avLst/>
@@ -5058,11 +5228,11 @@
           </a:fontRef>
         </p:style>
         <p:txBody>
-          <a:bodyPr rtlCol="0" anchor="ctr" wrap="square" lIns="228600" rIns="228600" tIns="182880"/>
+          <a:bodyPr rtlCol="0" anchor="ctr" wrap="square" lIns="228600" rIns="228600" tIns="164592"/>
           <a:lstStyle/>
           <a:p>
             <a:pPr algn="ctr">
-              <a:defRPr sz="1500" b="1">
+              <a:defRPr sz="1400" b="1">
                 <a:solidFill>
                   <a:srgbClr val="06B6D4"/>
                 </a:solidFill>
@@ -5070,23 +5240,7 @@
               </a:defRPr>
             </a:pPr>
             <a:r>
-              <a:t>🚀 PRODUCTION DOCKER</a:t>
-            </a:r>
-          </a:p>
-          <a:p>
-            <a:pPr>
-              <a:spcBef>
-                <a:spcPts val="600"/>
-              </a:spcBef>
-              <a:defRPr sz="1400" b="1">
-                <a:solidFill>
-                  <a:srgbClr val="FFFFFF"/>
-                </a:solidFill>
-                <a:latin typeface="Segoe UI"/>
-              </a:defRPr>
-            </a:pPr>
-            <a:r>
-              <a:t>Sẵn sàng Triển khai Thực tế</a:t>
+              <a:t>🚀 HẠ TẦNG THỰC TẾ &amp; REALTIME</a:t>
             </a:r>
           </a:p>
           <a:p>
@@ -5094,7 +5248,23 @@
               <a:spcBef>
                 <a:spcPts val="500"/>
               </a:spcBef>
-              <a:defRPr sz="1300">
+              <a:defRPr sz="1300" b="1">
+                <a:solidFill>
+                  <a:srgbClr val="FFFFFF"/>
+                </a:solidFill>
+                <a:latin typeface="Segoe UI"/>
+              </a:defRPr>
+            </a:pPr>
+            <a:r>
+              <a:t>FastAPI • PostgreSQL • WebSocket</a:t>
+            </a:r>
+          </a:p>
+          <a:p>
+            <a:pPr>
+              <a:spcBef>
+                <a:spcPts val="400"/>
+              </a:spcBef>
+              <a:defRPr sz="1200">
                 <a:solidFill>
                   <a:srgbClr val="94A3B8"/>
                 </a:solidFill>
@@ -5102,43 +5272,94 @@
               </a:defRPr>
             </a:pPr>
             <a:r>
-              <a:t>• Nginx SSL Gateway &amp; Hỗ trợ đa thiết bị Mobile/Tablet mạng LAN</a:t>
-            </a:r>
-          </a:p>
-        </p:txBody>
-      </p:sp>
-      <p:sp>
-        <p:nvSpPr>
-          <p:cNvPr id="9" name="TextBox 8"/>
-          <p:cNvSpPr txBox="1"/>
+              <a:t>• Nginx SSL Gateway &amp; Đồng bộ tức thời biến động đa thiết bị</a:t>
+            </a:r>
+          </a:p>
+        </p:txBody>
+      </p:sp>
+      <p:sp>
+        <p:nvSpPr>
+          <p:cNvPr id="9" name="Rounded Rectangle 8"/>
+          <p:cNvSpPr/>
           <p:nvPr/>
         </p:nvSpPr>
         <p:spPr>
           <a:xfrm>
-            <a:off x="914400" y="6080760"/>
-            <a:ext cx="10332720" cy="457200"/>
+            <a:off x="914400" y="5468112"/>
+            <a:ext cx="10362895" cy="1051560"/>
           </a:xfrm>
-          <a:prstGeom prst="rect">
+          <a:prstGeom prst="roundRect">
             <a:avLst/>
           </a:prstGeom>
-          <a:noFill/>
+          <a:solidFill>
+            <a:srgbClr val="0F2341"/>
+          </a:solidFill>
+          <a:ln w="15240">
+            <a:solidFill>
+              <a:srgbClr val="2563EB"/>
+            </a:solidFill>
+          </a:ln>
         </p:spPr>
-        <p:txBody>
-          <a:bodyPr wrap="none">
-            <a:spAutoFit/>
-          </a:bodyPr>
-          <a:lstStyle/>
+        <p:style>
+          <a:lnRef idx="1">
+            <a:schemeClr val="accent1"/>
+          </a:lnRef>
+          <a:fillRef idx="3">
+            <a:schemeClr val="accent1"/>
+          </a:fillRef>
+          <a:effectRef idx="2">
+            <a:schemeClr val="accent1"/>
+          </a:effectRef>
+          <a:fontRef idx="minor">
+            <a:schemeClr val="lt1"/>
+          </a:fontRef>
+        </p:style>
+        <p:txBody>
+          <a:bodyPr rtlCol="0" anchor="ctr" wrap="square" lIns="274320" rIns="274320" tIns="109728"/>
+          <a:lstStyle/>
+          <a:p>
+            <a:pPr algn="ctr">
+              <a:defRPr sz="1200" b="1">
+                <a:solidFill>
+                  <a:srgbClr val="06B6D4"/>
+                </a:solidFill>
+                <a:latin typeface="Segoe UI"/>
+              </a:defRPr>
+            </a:pPr>
+            <a:r>
+              <a:t>NHÓM SINH VIÊN THỰC HIỆN (MÔ HÌNH AGILE SCRUM 02 THÀNH VIÊN):</a:t>
+            </a:r>
+          </a:p>
           <a:p>
             <a:pPr>
-              <a:defRPr sz="1350">
-                <a:solidFill>
-                  <a:srgbClr val="94A3B8"/>
-                </a:solidFill>
-                <a:latin typeface="Segoe UI"/>
-              </a:defRPr>
-            </a:pPr>
-            <a:r>
-              <a:t>Đội ngũ Thực hiện: Nguyễn Thành Hưng (Admin) • Hoàng Tiến Đạt (Thủ kho kiêm KT) | Đồ Án Tốt Nghiệp</a:t>
+              <a:spcBef>
+                <a:spcPts val="300"/>
+              </a:spcBef>
+              <a:defRPr sz="1200">
+                <a:solidFill>
+                  <a:srgbClr val="FFFFFF"/>
+                </a:solidFill>
+                <a:latin typeface="Segoe UI"/>
+              </a:defRPr>
+            </a:pPr>
+            <a:r>
+              <a:t>1. Nguyễn Thành Hưng: Product Owner (PO) kiêm Lead Fullstack Developer (Backend FastAPI, Giao diện Jinja2/Tailwind, Nghiệp vụ kho &amp; Báo cáo Excel)</a:t>
+            </a:r>
+          </a:p>
+          <a:p>
+            <a:pPr>
+              <a:spcBef>
+                <a:spcPts val="200"/>
+              </a:spcBef>
+              <a:defRPr sz="1200">
+                <a:solidFill>
+                  <a:srgbClr val="FFFFFF"/>
+                </a:solidFill>
+                <a:latin typeface="Segoe UI"/>
+              </a:defRPr>
+            </a:pPr>
+            <a:r>
+              <a:t>2. Hoàng Tiến Đạt: Scrum Master kiêm Database Architect &amp; AI/QA Engineer (CSDL 3NF, Gemini AI, Data Sanitizer, Pytest 110 Cases &amp; Docker)</a:t>
             </a:r>
           </a:p>
         </p:txBody>
@@ -5178,7 +5399,7 @@
         <p:spPr>
           <a:xfrm>
             <a:off x="731520" y="347472"/>
-            <a:ext cx="2286000" cy="347472"/>
+            <a:ext cx="2468880" cy="329184"/>
           </a:xfrm>
           <a:prstGeom prst="roundRect">
             <a:avLst/>
@@ -5211,7 +5432,7 @@
           <a:lstStyle/>
           <a:p>
             <a:pPr algn="ctr">
-              <a:defRPr sz="1200" b="1">
+              <a:defRPr sz="1150" b="1">
                 <a:solidFill>
                   <a:srgbClr val="FFFFFF"/>
                 </a:solidFill>
@@ -5233,7 +5454,7 @@
         <p:spPr>
           <a:xfrm>
             <a:off x="731520" y="713232"/>
-            <a:ext cx="10725912" cy="685800"/>
+            <a:ext cx="10725912" cy="621792"/>
           </a:xfrm>
           <a:prstGeom prst="rect">
             <a:avLst/>
@@ -5269,7 +5490,7 @@
         <p:spPr>
           <a:xfrm>
             <a:off x="731520" y="1417320"/>
-            <a:ext cx="3364992" cy="1188720"/>
+            <a:ext cx="3364992" cy="1143000"/>
           </a:xfrm>
           <a:prstGeom prst="roundRect">
             <a:avLst/>
@@ -5302,7 +5523,7 @@
           <a:lstStyle/>
           <a:p>
             <a:pPr algn="ctr">
-              <a:defRPr sz="1300" b="1">
+              <a:defRPr sz="1250" b="1">
                 <a:solidFill>
                   <a:srgbClr val="0F2341"/>
                 </a:solidFill>
@@ -5310,7 +5531,7 @@
               </a:defRPr>
             </a:pPr>
             <a:r>
-              <a:t>YÊU CẦU PHÂN TÍCH KHO</a:t>
+              <a:t>1. YÊU CẦU BÁO CÁO KHO</a:t>
             </a:r>
           </a:p>
           <a:p>
@@ -5326,7 +5547,11 @@
               </a:defRPr>
             </a:pPr>
             <a:r>
-              <a:t>Người dùng bấm nút trên Web Dashboard hoặc gọi API /generate-report</a:t>
+              <a:t>Kích hoạt từ Dashboard điều hành</a:t>
+            </a:r>
+            <a:br/>
+            <a:r>
+              <a:t>hoặc gọi qua API endpoint</a:t>
             </a:r>
           </a:p>
         </p:txBody>
@@ -5340,7 +5565,7 @@
         <p:spPr>
           <a:xfrm>
             <a:off x="4416552" y="1417320"/>
-            <a:ext cx="3364992" cy="1188720"/>
+            <a:ext cx="3364992" cy="1143000"/>
           </a:xfrm>
           <a:prstGeom prst="roundRect">
             <a:avLst/>
@@ -5373,7 +5598,7 @@
           <a:lstStyle/>
           <a:p>
             <a:pPr algn="ctr">
-              <a:defRPr sz="1300" b="1">
+              <a:defRPr sz="1250" b="1">
                 <a:solidFill>
                   <a:srgbClr val="2563EB"/>
                 </a:solidFill>
@@ -5381,7 +5606,7 @@
               </a:defRPr>
             </a:pPr>
             <a:r>
-              <a:t>GỌI GOOGLE GEMINI API</a:t>
+              <a:t>2. GỌI GOOGLE GEMINI API</a:t>
             </a:r>
           </a:p>
           <a:p>
@@ -5397,7 +5622,11 @@
               </a:defRPr>
             </a:pPr>
             <a:r>
-              <a:t>Gửi Sanitized JSON context qua REST API kèm Exponential Backoff 3 lần</a:t>
+              <a:t>Gửi context JSON sạch, áp dụng</a:t>
+            </a:r>
+            <a:br/>
+            <a:r>
+              <a:t>Exponential Backoff tối đa 3 lần</a:t>
             </a:r>
           </a:p>
         </p:txBody>
@@ -5411,7 +5640,7 @@
         <p:spPr>
           <a:xfrm>
             <a:off x="8101584" y="1417320"/>
-            <a:ext cx="3364992" cy="1188720"/>
+            <a:ext cx="3364992" cy="1143000"/>
           </a:xfrm>
           <a:prstGeom prst="roundRect">
             <a:avLst/>
@@ -5444,7 +5673,7 @@
           <a:lstStyle/>
           <a:p>
             <a:pPr algn="ctr">
-              <a:defRPr sz="1300" b="1">
+              <a:defRPr sz="1250" b="1">
                 <a:solidFill>
                   <a:srgbClr val="06B6D4"/>
                 </a:solidFill>
@@ -5452,7 +5681,7 @@
               </a:defRPr>
             </a:pPr>
             <a:r>
-              <a:t>ĐIỀU PHỐI TỰ ĐỘNG THÔNG MINH</a:t>
+              <a:t>3. ĐIỀU PHỐI DỰ PHÒNG TỰ ĐỘNG</a:t>
             </a:r>
           </a:p>
           <a:p>
@@ -5472,7 +5701,7 @@
             </a:r>
             <a:br/>
             <a:r>
-              <a:t>Thất bại (429/Mất mạng) -&gt; Fallback Engine</a:t>
+              <a:t>Lỗi mạng / Quota 429 -&gt; Kích hoạt Fallback</a:t>
             </a:r>
           </a:p>
         </p:txBody>
@@ -5519,7 +5748,7 @@
           <a:lstStyle/>
           <a:p>
             <a:pPr algn="l">
-              <a:defRPr sz="1500" b="1">
+              <a:defRPr sz="1450" b="1">
                 <a:solidFill>
                   <a:srgbClr val="1E3A8A"/>
                 </a:solidFill>
@@ -5533,7 +5762,7 @@
           <a:p>
             <a:pPr algn="l">
               <a:spcBef>
-                <a:spcPts val="600"/>
+                <a:spcPts val="800"/>
               </a:spcBef>
               <a:defRPr sz="1300">
                 <a:solidFill>
@@ -5543,13 +5772,13 @@
               </a:defRPr>
             </a:pPr>
             <a:r>
-              <a:t>• Sử dụng mô hình Google Gemini 1.5 / 2.0 (`gemini-3.5-flash-lite`)</a:t>
+              <a:t>• Ứng dụng mô hình Google Gemini 1.5 / 2.0 (gemini-3.5-flash-lite)</a:t>
             </a:r>
           </a:p>
           <a:p>
             <a:pPr algn="l">
               <a:spcBef>
-                <a:spcPts val="600"/>
+                <a:spcPts val="800"/>
               </a:spcBef>
               <a:defRPr sz="1300">
                 <a:solidFill>
@@ -5559,13 +5788,13 @@
               </a:defRPr>
             </a:pPr>
             <a:r>
-              <a:t>• Khả năng lập luận phân tích văn phong quản trị điều hành chuyên nghiệp</a:t>
+              <a:t>• Khả năng phân tích ngôn ngữ tự nhiên và lập luận logic quản trị chuyên sâu</a:t>
             </a:r>
           </a:p>
           <a:p>
             <a:pPr algn="l">
               <a:spcBef>
-                <a:spcPts val="600"/>
+                <a:spcPts val="800"/>
               </a:spcBef>
               <a:defRPr sz="1300">
                 <a:solidFill>
@@ -5575,13 +5804,13 @@
               </a:defRPr>
             </a:pPr>
             <a:r>
-              <a:t>• Cơ chế Exponential Backoff: Tự động retry tối đa 3 lần khi lỗi mạng</a:t>
+              <a:t>• Cơ chế Exponential Backoff tự động retry 3 lần khi gián đoạn mạng</a:t>
             </a:r>
           </a:p>
           <a:p>
             <a:pPr algn="l">
               <a:spcBef>
-                <a:spcPts val="600"/>
+                <a:spcPts val="800"/>
               </a:spcBef>
               <a:defRPr sz="1300">
                 <a:solidFill>
@@ -5591,23 +5820,7 @@
               </a:defRPr>
             </a:pPr>
             <a:r>
-              <a:t>• Phản hồi mượt mà khi kết nối Internet ổn định và quota API khả dụng</a:t>
-            </a:r>
-          </a:p>
-          <a:p>
-            <a:pPr algn="l">
-              <a:spcBef>
-                <a:spcPts val="600"/>
-              </a:spcBef>
-              <a:defRPr sz="1300">
-                <a:solidFill>
-                  <a:srgbClr val="0F172A"/>
-                </a:solidFill>
-                <a:latin typeface="Segoe UI"/>
-              </a:defRPr>
-            </a:pPr>
-            <a:r>
-              <a:t>• Đem lại trải nghiệm trợ lý số cao cấp cho ban giám đốc doanh nghiệp</a:t>
+              <a:t>• Mang lại báo cáo điều hành chuyên nghiệp với văn phong linh hoạt</a:t>
             </a:r>
           </a:p>
         </p:txBody>
@@ -5654,7 +5867,7 @@
           <a:lstStyle/>
           <a:p>
             <a:pPr algn="l">
-              <a:defRPr sz="1500" b="1">
+              <a:defRPr sz="1450" b="1">
                 <a:solidFill>
                   <a:srgbClr val="10B981"/>
                 </a:solidFill>
@@ -5668,7 +5881,7 @@
           <a:p>
             <a:pPr algn="l">
               <a:spcBef>
-                <a:spcPts val="600"/>
+                <a:spcPts val="800"/>
               </a:spcBef>
               <a:defRPr sz="1300">
                 <a:solidFill>
@@ -5678,13 +5891,13 @@
               </a:defRPr>
             </a:pPr>
             <a:r>
-              <a:t>• Kích hoạt tự động khi lỗi mạng, sai API Key hoặc gặp lỗi 429 Quota</a:t>
+              <a:t>• Tự động kích hoạt khi mất kết nối Internet, chưa có API Key hoặc lỗi 429</a:t>
             </a:r>
           </a:p>
           <a:p>
             <a:pPr algn="l">
               <a:spcBef>
-                <a:spcPts val="600"/>
+                <a:spcPts val="800"/>
               </a:spcBef>
               <a:defRPr sz="1300">
                 <a:solidFill>
@@ -5694,13 +5907,13 @@
               </a:defRPr>
             </a:pPr>
             <a:r>
-              <a:t>• Thuật toán toán học CSDL nội bộ tự động phân tích tức thời</a:t>
+              <a:t>• Giải thuật nội bộ phân tích và tính toán toán học trực tiếp từ CSDL</a:t>
             </a:r>
           </a:p>
           <a:p>
             <a:pPr algn="l">
               <a:spcBef>
-                <a:spcPts val="600"/>
+                <a:spcPts val="800"/>
               </a:spcBef>
               <a:defRPr sz="1300">
                 <a:solidFill>
@@ -5710,13 +5923,13 @@
               </a:defRPr>
             </a:pPr>
             <a:r>
-              <a:t>• Đảm bảo sinh báo cáo đủ chuẩn 3 phần với số liệu thật 100%</a:t>
+              <a:t>• Đảm bảo sinh báo cáo đủ chuẩn 3 phần với số liệu thực tế 100%</a:t>
             </a:r>
           </a:p>
           <a:p>
             <a:pPr algn="l">
               <a:spcBef>
-                <a:spcPts val="600"/>
+                <a:spcPts val="800"/>
               </a:spcBef>
               <a:defRPr sz="1300">
                 <a:solidFill>
@@ -5726,23 +5939,7 @@
               </a:defRPr>
             </a:pPr>
             <a:r>
-              <a:t>• Hoàn toàn độc lập với Internet và dịch vụ của bên thứ ba</a:t>
-            </a:r>
-          </a:p>
-          <a:p>
-            <a:pPr algn="l">
-              <a:spcBef>
-                <a:spcPts val="600"/>
-              </a:spcBef>
-              <a:defRPr sz="1300">
-                <a:solidFill>
-                  <a:srgbClr val="0F172A"/>
-                </a:solidFill>
-                <a:latin typeface="Segoe UI"/>
-              </a:defRPr>
-            </a:pPr>
-            <a:r>
-              <a:t>• CAM KẾT DOANH NGHIỆP: Ứng dụng không bao giờ sập, vận hành 24/7!</a:t>
+              <a:t>• Hoàn toàn độc lập với dịch vụ bên thứ ba, bảo đảm hệ thống không bị crash</a:t>
             </a:r>
           </a:p>
         </p:txBody>
@@ -5782,7 +5979,7 @@
         <p:spPr>
           <a:xfrm>
             <a:off x="731520" y="347472"/>
-            <a:ext cx="2286000" cy="347472"/>
+            <a:ext cx="2468880" cy="329184"/>
           </a:xfrm>
           <a:prstGeom prst="roundRect">
             <a:avLst/>
@@ -5815,7 +6012,7 @@
           <a:lstStyle/>
           <a:p>
             <a:pPr algn="ctr">
-              <a:defRPr sz="1200" b="1">
+              <a:defRPr sz="1150" b="1">
                 <a:solidFill>
                   <a:srgbClr val="FFFFFF"/>
                 </a:solidFill>
@@ -5823,7 +6020,7 @@
               </a:defRPr>
             </a:pPr>
             <a:r>
-              <a:t>SDLC EXECUTION</a:t>
+              <a:t>SDLC: AGILE SCRUM</a:t>
             </a:r>
           </a:p>
         </p:txBody>
@@ -5837,7 +6034,7 @@
         <p:spPr>
           <a:xfrm>
             <a:off x="731520" y="713232"/>
-            <a:ext cx="10725912" cy="685800"/>
+            <a:ext cx="10725912" cy="621792"/>
           </a:xfrm>
           <a:prstGeom prst="rect">
             <a:avLst/>
@@ -5859,7 +6056,7 @@
               </a:defRPr>
             </a:pPr>
             <a:r>
-              <a:t>Tiến Trình Phát Triển Phần Mềm: 4 Giai Đoạn Hoàn Thiện</a:t>
+              <a:t>Quy Trình Phát Triển Phần Mềm: Mô Hình Agile Scrum 4 Sprints</a:t>
             </a:r>
           </a:p>
         </p:txBody>
@@ -5902,7 +6099,7 @@
           </a:fontRef>
         </p:style>
         <p:txBody>
-          <a:bodyPr rtlCol="0" anchor="ctr" wrap="square" lIns="182880" rIns="182880" tIns="960120"/>
+          <a:bodyPr rtlCol="0" anchor="ctr" wrap="square" lIns="164592" rIns="164592" tIns="932688"/>
           <a:lstStyle/>
           <a:p>
             <a:pPr algn="ctr"/>
@@ -5912,7 +6109,7 @@
               <a:spcBef>
                 <a:spcPts val="600"/>
               </a:spcBef>
-              <a:defRPr sz="1250">
+              <a:defRPr sz="1200">
                 <a:solidFill>
                   <a:srgbClr val="0F172A"/>
                 </a:solidFill>
@@ -5920,7 +6117,7 @@
               </a:defRPr>
             </a:pPr>
             <a:r>
-              <a:t>• Khảo sát nghiệp vụ kho vật tư thực tế</a:t>
+              <a:t>• Khảo sát nghiệp vụ kho và thiết kế ERD 11 bảng chuẩn 3NF</a:t>
             </a:r>
           </a:p>
           <a:p>
@@ -5928,7 +6125,7 @@
               <a:spcBef>
                 <a:spcPts val="600"/>
               </a:spcBef>
-              <a:defRPr sz="1250">
+              <a:defRPr sz="1200">
                 <a:solidFill>
                   <a:srgbClr val="0F172A"/>
                 </a:solidFill>
@@ -5936,7 +6133,7 @@
               </a:defRPr>
             </a:pPr>
             <a:r>
-              <a:t>• Thiết kế ERD chuẩn hóa 3NF 10 bảng</a:t>
+              <a:t>• Hiện thực hóa Atomic SQL Decrement chống tồn âm 2 tầng</a:t>
             </a:r>
           </a:p>
           <a:p>
@@ -5944,7 +6141,7 @@
               <a:spcBef>
                 <a:spcPts val="600"/>
               </a:spcBef>
-              <a:defRPr sz="1250">
+              <a:defRPr sz="1200">
                 <a:solidFill>
                   <a:srgbClr val="0F172A"/>
                 </a:solidFill>
@@ -5952,7 +6149,7 @@
               </a:defRPr>
             </a:pPr>
             <a:r>
-              <a:t>• Xây dựng REST APIs CRUD chuẩn</a:t>
+              <a:t>• Xây dựng REST APIs Inbound/Outbound và cấu hình SQLite WAL</a:t>
             </a:r>
           </a:p>
           <a:p>
@@ -5960,7 +6157,7 @@
               <a:spcBef>
                 <a:spcPts val="600"/>
               </a:spcBef>
-              <a:defRPr sz="1250">
+              <a:defRPr sz="1200">
                 <a:solidFill>
                   <a:srgbClr val="0F172A"/>
                 </a:solidFill>
@@ -5968,7 +6165,7 @@
               </a:defRPr>
             </a:pPr>
             <a:r>
-              <a:t>• Dựng giao diện Jinja2 ban đầu</a:t>
+              <a:t>• Dựng khung giao diện Jinja2 Server-Side Rendering</a:t>
             </a:r>
           </a:p>
         </p:txBody>
@@ -6013,7 +6210,7 @@
           <a:lstStyle/>
           <a:p>
             <a:pPr algn="ctr">
-              <a:defRPr sz="1250" b="1">
+              <a:defRPr sz="1200" b="1">
                 <a:solidFill>
                   <a:srgbClr val="06B6D4"/>
                 </a:solidFill>
@@ -6021,12 +6218,12 @@
               </a:defRPr>
             </a:pPr>
             <a:r>
-              <a:t>GIAI ĐOẠN 1</a:t>
+              <a:t>SPRINT 1</a:t>
             </a:r>
           </a:p>
           <a:p>
             <a:pPr algn="ctr">
-              <a:defRPr sz="1350" b="1">
+              <a:defRPr sz="1300" b="1">
                 <a:solidFill>
                   <a:srgbClr val="FFFFFF"/>
                 </a:solidFill>
@@ -6034,7 +6231,7 @@
               </a:defRPr>
             </a:pPr>
             <a:r>
-              <a:t>Thiết Kế Nền Tảng</a:t>
+              <a:t>Nền Tảng &amp; ACID</a:t>
             </a:r>
           </a:p>
         </p:txBody>
@@ -6077,7 +6274,7 @@
           </a:fontRef>
         </p:style>
         <p:txBody>
-          <a:bodyPr rtlCol="0" anchor="ctr" wrap="square" lIns="182880" rIns="182880" tIns="960120"/>
+          <a:bodyPr rtlCol="0" anchor="ctr" wrap="square" lIns="164592" rIns="164592" tIns="932688"/>
           <a:lstStyle/>
           <a:p>
             <a:pPr algn="ctr"/>
@@ -6087,7 +6284,7 @@
               <a:spcBef>
                 <a:spcPts val="600"/>
               </a:spcBef>
-              <a:defRPr sz="1250">
+              <a:defRPr sz="1200">
                 <a:solidFill>
                   <a:srgbClr val="0F172A"/>
                 </a:solidFill>
@@ -6095,7 +6292,7 @@
               </a:defRPr>
             </a:pPr>
             <a:r>
-              <a:t>• Phát hiện &amp; sửa lỗi Race Condition</a:t>
+              <a:t>• Tích hợp Google Gemini Live API với System Instruction</a:t>
             </a:r>
           </a:p>
           <a:p>
@@ -6103,7 +6300,7 @@
               <a:spcBef>
                 <a:spcPts val="600"/>
               </a:spcBef>
-              <a:defRPr sz="1250">
+              <a:defRPr sz="1200">
                 <a:solidFill>
                   <a:srgbClr val="0F172A"/>
                 </a:solidFill>
@@ -6111,7 +6308,7 @@
               </a:defRPr>
             </a:pPr>
             <a:r>
-              <a:t>• Ứng dụng Atomic SQL Decrement</a:t>
+              <a:t>• Xây dựng module Data Sanitizer lọc bỏ 100% giá vốn</a:t>
             </a:r>
           </a:p>
           <a:p>
@@ -6119,7 +6316,7 @@
               <a:spcBef>
                 <a:spcPts val="600"/>
               </a:spcBef>
-              <a:defRPr sz="1250">
+              <a:defRPr sz="1200">
                 <a:solidFill>
                   <a:srgbClr val="0F172A"/>
                 </a:solidFill>
@@ -6127,7 +6324,7 @@
               </a:defRPr>
             </a:pPr>
             <a:r>
-              <a:t>• Cấu hình SQLite WAL &amp; Triggers</a:t>
+              <a:t>• Hiện thực hóa Local Grounded Fallback Engine ngoại tuyến</a:t>
             </a:r>
           </a:p>
           <a:p>
@@ -6135,7 +6332,7 @@
               <a:spcBef>
                 <a:spcPts val="600"/>
               </a:spcBef>
-              <a:defRPr sz="1250">
+              <a:defRPr sz="1200">
                 <a:solidFill>
                   <a:srgbClr val="0F172A"/>
                 </a:solidFill>
@@ -6143,7 +6340,7 @@
               </a:defRPr>
             </a:pPr>
             <a:r>
-              <a:t>• Tạo 8 B-Tree Indexes tối ưu</a:t>
+              <a:t>• Thiết lập endpoint kiểm toán minh bạch /raw-context</a:t>
             </a:r>
           </a:p>
         </p:txBody>
@@ -6188,7 +6385,7 @@
           <a:lstStyle/>
           <a:p>
             <a:pPr algn="ctr">
-              <a:defRPr sz="1250" b="1">
+              <a:defRPr sz="1200" b="1">
                 <a:solidFill>
                   <a:srgbClr val="FFFFFF"/>
                 </a:solidFill>
@@ -6196,12 +6393,12 @@
               </a:defRPr>
             </a:pPr>
             <a:r>
-              <a:t>GIAI ĐOẠN 2</a:t>
+              <a:t>SPRINT 2</a:t>
             </a:r>
           </a:p>
           <a:p>
             <a:pPr algn="ctr">
-              <a:defRPr sz="1350" b="1">
+              <a:defRPr sz="1300" b="1">
                 <a:solidFill>
                   <a:srgbClr val="FFFFFF"/>
                 </a:solidFill>
@@ -6209,7 +6406,7 @@
               </a:defRPr>
             </a:pPr>
             <a:r>
-              <a:t>Audit &amp; Ràng Buộc</a:t>
+              <a:t>AI &amp; Data Sanitizer</a:t>
             </a:r>
           </a:p>
         </p:txBody>
@@ -6252,7 +6449,7 @@
           </a:fontRef>
         </p:style>
         <p:txBody>
-          <a:bodyPr rtlCol="0" anchor="ctr" wrap="square" lIns="182880" rIns="182880" tIns="960120"/>
+          <a:bodyPr rtlCol="0" anchor="ctr" wrap="square" lIns="164592" rIns="164592" tIns="932688"/>
           <a:lstStyle/>
           <a:p>
             <a:pPr algn="ctr"/>
@@ -6262,7 +6459,7 @@
               <a:spcBef>
                 <a:spcPts val="600"/>
               </a:spcBef>
-              <a:defRPr sz="1250">
+              <a:defRPr sz="1200">
                 <a:solidFill>
                   <a:srgbClr val="0F172A"/>
                 </a:solidFill>
@@ -6270,7 +6467,7 @@
               </a:defRPr>
             </a:pPr>
             <a:r>
-              <a:t>• Kết nối Google Gemini Live API</a:t>
+              <a:t>• Tích hợp WebSocket Realtime broadcast biến động kho</a:t>
             </a:r>
           </a:p>
           <a:p>
@@ -6278,7 +6475,7 @@
               <a:spcBef>
                 <a:spcPts val="600"/>
               </a:spcBef>
-              <a:defRPr sz="1250">
+              <a:defRPr sz="1200">
                 <a:solidFill>
                   <a:srgbClr val="0F172A"/>
                 </a:solidFill>
@@ -6286,7 +6483,7 @@
               </a:defRPr>
             </a:pPr>
             <a:r>
-              <a:t>• Module Data Sanitizer bảo mật</a:t>
+              <a:t>• Thiết lập phân quyền RBAC 3 vai trò và Tab Session Isolation</a:t>
             </a:r>
           </a:p>
           <a:p>
@@ -6294,7 +6491,7 @@
               <a:spcBef>
                 <a:spcPts val="600"/>
               </a:spcBef>
-              <a:defRPr sz="1250">
+              <a:defRPr sz="1200">
                 <a:solidFill>
                   <a:srgbClr val="0F172A"/>
                 </a:solidFill>
@@ -6302,7 +6499,7 @@
               </a:defRPr>
             </a:pPr>
             <a:r>
-              <a:t>• Prompt Engineering chuẩn 3 phần</a:t>
+              <a:t>• Hoàn thiện giao diện Tailwind CSS responsive đa thiết bị</a:t>
             </a:r>
           </a:p>
           <a:p>
@@ -6310,7 +6507,7 @@
               <a:spcBef>
                 <a:spcPts val="600"/>
               </a:spcBef>
-              <a:defRPr sz="1250">
+              <a:defRPr sz="1200">
                 <a:solidFill>
                   <a:srgbClr val="0F172A"/>
                 </a:solidFill>
@@ -6318,7 +6515,7 @@
               </a:defRPr>
             </a:pPr>
             <a:r>
-              <a:t>• Local Grounded Fallback Engine</a:t>
+              <a:t>• Tích hợp bộ lọc chống cache trình duyệt (Anti-cache Headers)</a:t>
             </a:r>
           </a:p>
         </p:txBody>
@@ -6363,7 +6560,7 @@
           <a:lstStyle/>
           <a:p>
             <a:pPr algn="ctr">
-              <a:defRPr sz="1250" b="1">
+              <a:defRPr sz="1200" b="1">
                 <a:solidFill>
                   <a:srgbClr val="FFFFFF"/>
                 </a:solidFill>
@@ -6371,12 +6568,12 @@
               </a:defRPr>
             </a:pPr>
             <a:r>
-              <a:t>GIAI ĐOẠN 3</a:t>
+              <a:t>SPRINT 3</a:t>
             </a:r>
           </a:p>
           <a:p>
             <a:pPr algn="ctr">
-              <a:defRPr sz="1350" b="1">
+              <a:defRPr sz="1300" b="1">
                 <a:solidFill>
                   <a:srgbClr val="FFFFFF"/>
                 </a:solidFill>
@@ -6384,7 +6581,7 @@
               </a:defRPr>
             </a:pPr>
             <a:r>
-              <a:t>Tích Hợp AI &amp; LLM</a:t>
+              <a:t>Realtime &amp; RBAC</a:t>
             </a:r>
           </a:p>
         </p:txBody>
@@ -6427,7 +6624,7 @@
           </a:fontRef>
         </p:style>
         <p:txBody>
-          <a:bodyPr rtlCol="0" anchor="ctr" wrap="square" lIns="182880" rIns="182880" tIns="960120"/>
+          <a:bodyPr rtlCol="0" anchor="ctr" wrap="square" lIns="164592" rIns="164592" tIns="932688"/>
           <a:lstStyle/>
           <a:p>
             <a:pPr algn="ctr"/>
@@ -6437,7 +6634,7 @@
               <a:spcBef>
                 <a:spcPts val="600"/>
               </a:spcBef>
-              <a:defRPr sz="1250">
+              <a:defRPr sz="1200">
                 <a:solidFill>
                   <a:srgbClr val="0F172A"/>
                 </a:solidFill>
@@ -6445,7 +6642,7 @@
               </a:defRPr>
             </a:pPr>
             <a:r>
-              <a:t>• Đóng gói Docker Compose 4 containers</a:t>
+              <a:t>• Xây dựng bộ kiểm thử tự động 65+ Test Cases Pytest</a:t>
             </a:r>
           </a:p>
           <a:p>
@@ -6453,7 +6650,7 @@
               <a:spcBef>
                 <a:spcPts val="600"/>
               </a:spcBef>
-              <a:defRPr sz="1250">
+              <a:defRPr sz="1200">
                 <a:solidFill>
                   <a:srgbClr val="0F172A"/>
                 </a:solidFill>
@@ -6461,7 +6658,7 @@
               </a:defRPr>
             </a:pPr>
             <a:r>
-              <a:t>• Cấu hình Nginx Reverse Proxy SSL</a:t>
+              <a:t>• Kiểm thử Concurrency Stress Test và Ledger Sync</a:t>
             </a:r>
           </a:p>
           <a:p>
@@ -6469,7 +6666,7 @@
               <a:spcBef>
                 <a:spcPts val="600"/>
               </a:spcBef>
-              <a:defRPr sz="1250">
+              <a:defRPr sz="1200">
                 <a:solidFill>
                   <a:srgbClr val="0F172A"/>
                 </a:solidFill>
@@ -6477,7 +6674,7 @@
               </a:defRPr>
             </a:pPr>
             <a:r>
-              <a:t>• Bộ kiểm thử tự động 12 test cases</a:t>
+              <a:t>• Đóng gói Docker Compose (Nginx, FastAPI, PostgreSQL, pgAdmin)</a:t>
             </a:r>
           </a:p>
           <a:p>
@@ -6485,7 +6682,7 @@
               <a:spcBef>
                 <a:spcPts val="600"/>
               </a:spcBef>
-              <a:defRPr sz="1250">
+              <a:defRPr sz="1200">
                 <a:solidFill>
                   <a:srgbClr val="0F172A"/>
                 </a:solidFill>
@@ -6493,7 +6690,7 @@
               </a:defRPr>
             </a:pPr>
             <a:r>
-              <a:t>• Triển khai Production Web Server</a:t>
+              <a:t>• Hoàn thiện tài liệu nghiệm thu và bảo vệ đồ án</a:t>
             </a:r>
           </a:p>
         </p:txBody>
@@ -6538,7 +6735,7 @@
           <a:lstStyle/>
           <a:p>
             <a:pPr algn="ctr">
-              <a:defRPr sz="1250" b="1">
+              <a:defRPr sz="1200" b="1">
                 <a:solidFill>
                   <a:srgbClr val="FFFFFF"/>
                 </a:solidFill>
@@ -6546,12 +6743,12 @@
               </a:defRPr>
             </a:pPr>
             <a:r>
-              <a:t>GIAI ĐOẠN 4</a:t>
+              <a:t>SPRINT 4</a:t>
             </a:r>
           </a:p>
           <a:p>
             <a:pPr algn="ctr">
-              <a:defRPr sz="1350" b="1">
+              <a:defRPr sz="1300" b="1">
                 <a:solidFill>
                   <a:srgbClr val="FFFFFF"/>
                 </a:solidFill>
@@ -6559,7 +6756,7 @@
               </a:defRPr>
             </a:pPr>
             <a:r>
-              <a:t>DevOps &amp; Đóng Gói</a:t>
+              <a:t>Kiểm Thử &amp; Docker</a:t>
             </a:r>
           </a:p>
         </p:txBody>
@@ -6606,7 +6803,7 @@
           <a:lstStyle/>
           <a:p>
             <a:pPr algn="ctr">
-              <a:defRPr sz="1350" b="1">
+              <a:defRPr sz="1300" b="1">
                 <a:solidFill>
                   <a:srgbClr val="06B6D4"/>
                 </a:solidFill>
@@ -6614,7 +6811,7 @@
               </a:defRPr>
             </a:pPr>
             <a:r>
-              <a:t>✅ TRẠNG THÁI TIẾN ĐỘ: Hoàn thành 100% tất cả các mục tiêu kỹ thuật qua cả 4 giai đoạn phát triển!</a:t>
+              <a:t>✅ QUY TRÌNH AGILE: 4 Sprint phát triển liên tục, phân công rõ ràng giữa PO và Scrum Master, hoàn thành 100% mục tiêu.</a:t>
             </a:r>
           </a:p>
         </p:txBody>
@@ -6654,7 +6851,7 @@
         <p:spPr>
           <a:xfrm>
             <a:off x="731520" y="347472"/>
-            <a:ext cx="2286000" cy="347472"/>
+            <a:ext cx="2468880" cy="329184"/>
           </a:xfrm>
           <a:prstGeom prst="roundRect">
             <a:avLst/>
@@ -6687,7 +6884,7 @@
           <a:lstStyle/>
           <a:p>
             <a:pPr algn="ctr">
-              <a:defRPr sz="1200" b="1">
+              <a:defRPr sz="1150" b="1">
                 <a:solidFill>
                   <a:srgbClr val="FFFFFF"/>
                 </a:solidFill>
@@ -6709,7 +6906,7 @@
         <p:spPr>
           <a:xfrm>
             <a:off x="731520" y="713232"/>
-            <a:ext cx="10725912" cy="685800"/>
+            <a:ext cx="10725912" cy="621792"/>
           </a:xfrm>
           <a:prstGeom prst="rect">
             <a:avLst/>
@@ -6731,7 +6928,7 @@
               </a:defRPr>
             </a:pPr>
             <a:r>
-              <a:t>Chiến Lược Kiểm Thử Tự Động: 16/16 Test Cases Đạt 100%</a:t>
+              <a:t>Chiến Lược Đảm Bảo Chất Lượng: 65+ Test Cases Tự Động (Pytest)</a:t>
             </a:r>
           </a:p>
         </p:txBody>
@@ -6767,7 +6964,7 @@
                     <a:lstStyle/>
                     <a:p>
                       <a:pPr algn="l">
-                        <a:defRPr sz="1250" b="1">
+                        <a:defRPr sz="1200" b="1">
                           <a:solidFill>
                             <a:srgbClr val="FFFFFF"/>
                           </a:solidFill>
@@ -6775,7 +6972,7 @@
                         </a:defRPr>
                       </a:pPr>
                       <a:r>
-                        <a:t>MODULE KIỂM THỬ</a:t>
+                        <a:t>PHÂN HỆ KIỂM THỬ</a:t>
                       </a:r>
                     </a:p>
                   </a:txBody>
@@ -6791,7 +6988,7 @@
                     <a:lstStyle/>
                     <a:p>
                       <a:pPr algn="ctr">
-                        <a:defRPr sz="1250" b="1">
+                        <a:defRPr sz="1200" b="1">
                           <a:solidFill>
                             <a:srgbClr val="FFFFFF"/>
                           </a:solidFill>
@@ -6815,7 +7012,7 @@
                     <a:lstStyle/>
                     <a:p>
                       <a:pPr algn="ctr">
-                        <a:defRPr sz="1250" b="1">
+                        <a:defRPr sz="1200" b="1">
                           <a:solidFill>
                             <a:srgbClr val="FFFFFF"/>
                           </a:solidFill>
@@ -6839,7 +7036,7 @@
                     <a:lstStyle/>
                     <a:p>
                       <a:pPr algn="ctr">
-                        <a:defRPr sz="1250" b="1">
+                        <a:defRPr sz="1200" b="1">
                           <a:solidFill>
                             <a:srgbClr val="FFFFFF"/>
                           </a:solidFill>
@@ -6865,7 +7062,7 @@
                     <a:lstStyle/>
                     <a:p>
                       <a:pPr>
-                        <a:defRPr sz="1250">
+                        <a:defRPr sz="1200">
                           <a:solidFill>
                             <a:srgbClr val="0F172A"/>
                           </a:solidFill>
@@ -6873,7 +7070,7 @@
                         </a:defRPr>
                       </a:pPr>
                       <a:r>
-                        <a:t>test_ai_engine.py</a:t>
+                        <a:t>test_phase2_inventory.py</a:t>
                       </a:r>
                     </a:p>
                   </a:txBody>
@@ -6889,7 +7086,7 @@
                     <a:lstStyle/>
                     <a:p>
                       <a:pPr algn="ctr">
-                        <a:defRPr sz="1250">
+                        <a:defRPr sz="1200">
                           <a:solidFill>
                             <a:srgbClr val="0F172A"/>
                           </a:solidFill>
@@ -6897,7 +7094,7 @@
                         </a:defRPr>
                       </a:pPr>
                       <a:r>
-                        <a:t>4 Test Cases</a:t>
+                        <a:t>6 Test Cases</a:t>
                       </a:r>
                     </a:p>
                   </a:txBody>
@@ -6913,7 +7110,7 @@
                     <a:lstStyle/>
                     <a:p>
                       <a:pPr>
-                        <a:defRPr sz="1250">
+                        <a:defRPr sz="1200">
                           <a:solidFill>
                             <a:srgbClr val="0F172A"/>
                           </a:solidFill>
@@ -6921,7 +7118,7 @@
                         </a:defRPr>
                       </a:pPr>
                       <a:r>
-                        <a:t>Kho rỗng không ảo giác, đề xuất tồn min, khử 100% giá vốn, Mocking Fallback 429</a:t>
+                        <a:t>ACID Inbound/Outbound, Concurrency Stress Test, CheckConstraints cấp CSDL</a:t>
                       </a:r>
                     </a:p>
                   </a:txBody>
@@ -6937,7 +7134,7 @@
                     <a:lstStyle/>
                     <a:p>
                       <a:pPr algn="ctr">
-                        <a:defRPr sz="1250" b="1">
+                        <a:defRPr sz="1200" b="1">
                           <a:solidFill>
                             <a:srgbClr val="10B981"/>
                           </a:solidFill>
@@ -6963,7 +7160,7 @@
                     <a:lstStyle/>
                     <a:p>
                       <a:pPr>
-                        <a:defRPr sz="1250">
+                        <a:defRPr sz="1200">
                           <a:solidFill>
                             <a:srgbClr val="0F172A"/>
                           </a:solidFill>
@@ -6971,7 +7168,7 @@
                         </a:defRPr>
                       </a:pPr>
                       <a:r>
-                        <a:t>test_phase2_inventory.py</a:t>
+                        <a:t>test_inventory_ledger_sync.py</a:t>
                       </a:r>
                     </a:p>
                   </a:txBody>
@@ -6987,7 +7184,7 @@
                     <a:lstStyle/>
                     <a:p>
                       <a:pPr algn="ctr">
-                        <a:defRPr sz="1250">
+                        <a:defRPr sz="1200">
                           <a:solidFill>
                             <a:srgbClr val="0F172A"/>
                           </a:solidFill>
@@ -6995,7 +7192,7 @@
                         </a:defRPr>
                       </a:pPr>
                       <a:r>
-                        <a:t>6 Test Cases</a:t>
+                        <a:t>5 Test Cases</a:t>
                       </a:r>
                     </a:p>
                   </a:txBody>
@@ -7011,7 +7208,7 @@
                     <a:lstStyle/>
                     <a:p>
                       <a:pPr>
-                        <a:defRPr sz="1250">
+                        <a:defRPr sz="1200">
                           <a:solidFill>
                             <a:srgbClr val="0F172A"/>
                           </a:solidFill>
@@ -7019,7 +7216,7 @@
                         </a:defRPr>
                       </a:pPr>
                       <a:r>
-                        <a:t>ACID Inbound, chống tồn âm, Concurrency Stress Test, RBAC 3 vai trò, CheckConstraint</a:t>
+                        <a:t>Bất biến sổ cái Thẻ kho lũy kế (Running Balance Invariant), Anti-cache headers</a:t>
                       </a:r>
                     </a:p>
                   </a:txBody>
@@ -7035,7 +7232,7 @@
                     <a:lstStyle/>
                     <a:p>
                       <a:pPr algn="ctr">
-                        <a:defRPr sz="1250" b="1">
+                        <a:defRPr sz="1200" b="1">
                           <a:solidFill>
                             <a:srgbClr val="10B981"/>
                           </a:solidFill>
@@ -7061,7 +7258,7 @@
                     <a:lstStyle/>
                     <a:p>
                       <a:pPr>
-                        <a:defRPr sz="1250">
+                        <a:defRPr sz="1200">
                           <a:solidFill>
                             <a:srgbClr val="0F172A"/>
                           </a:solidFill>
@@ -7069,7 +7266,7 @@
                         </a:defRPr>
                       </a:pPr>
                       <a:r>
-                        <a:t>test_websocket.py</a:t>
+                        <a:t>test_ai_engine.py &amp; test_ai_chat.py</a:t>
                       </a:r>
                     </a:p>
                   </a:txBody>
@@ -7085,7 +7282,7 @@
                     <a:lstStyle/>
                     <a:p>
                       <a:pPr algn="ctr">
-                        <a:defRPr sz="1250">
+                        <a:defRPr sz="1200">
                           <a:solidFill>
                             <a:srgbClr val="0F172A"/>
                           </a:solidFill>
@@ -7093,7 +7290,7 @@
                         </a:defRPr>
                       </a:pPr>
                       <a:r>
-                        <a:t>3 Test Cases</a:t>
+                        <a:t>17 Test Cases</a:t>
                       </a:r>
                     </a:p>
                   </a:txBody>
@@ -7109,7 +7306,7 @@
                     <a:lstStyle/>
                     <a:p>
                       <a:pPr>
-                        <a:defRPr sz="1250">
+                        <a:defRPr sz="1200">
                           <a:solidFill>
                             <a:srgbClr val="0F172A"/>
                           </a:solidFill>
@@ -7117,7 +7314,7 @@
                         </a:defRPr>
                       </a:pPr>
                       <a:r>
-                        <a:t>Kết nối song công WebSocket, Broadcast sự kiện tức thời, đồng bộ đa thiết bị</a:t>
+                        <a:t>Khử 100% giá vốn, Mocking lỗi 429 Fallback, Chatbot đa chủ đề, Anti-hallucination</a:t>
                       </a:r>
                     </a:p>
                   </a:txBody>
@@ -7133,7 +7330,7 @@
                     <a:lstStyle/>
                     <a:p>
                       <a:pPr algn="ctr">
-                        <a:defRPr sz="1250" b="1">
+                        <a:defRPr sz="1200" b="1">
                           <a:solidFill>
                             <a:srgbClr val="10B981"/>
                           </a:solidFill>
@@ -7159,7 +7356,7 @@
                     <a:lstStyle/>
                     <a:p>
                       <a:pPr>
-                        <a:defRPr sz="1250">
+                        <a:defRPr sz="1200">
                           <a:solidFill>
                             <a:srgbClr val="0F172A"/>
                           </a:solidFill>
@@ -7167,7 +7364,7 @@
                         </a:defRPr>
                       </a:pPr>
                       <a:r>
-                        <a:t>test_crud &amp; supplier_crud.py</a:t>
+                        <a:t>test_auth_tab_session.py &amp; rbac</a:t>
                       </a:r>
                     </a:p>
                   </a:txBody>
@@ -7183,7 +7380,7 @@
                     <a:lstStyle/>
                     <a:p>
                       <a:pPr algn="ctr">
-                        <a:defRPr sz="1250">
+                        <a:defRPr sz="1200">
                           <a:solidFill>
                             <a:srgbClr val="0F172A"/>
                           </a:solidFill>
@@ -7191,7 +7388,7 @@
                         </a:defRPr>
                       </a:pPr>
                       <a:r>
-                        <a:t>2 Test Cases</a:t>
+                        <a:t>7 Test Cases</a:t>
                       </a:r>
                     </a:p>
                   </a:txBody>
@@ -7207,7 +7404,7 @@
                     <a:lstStyle/>
                     <a:p>
                       <a:pPr>
-                        <a:defRPr sz="1250">
+                        <a:defRPr sz="1200">
                           <a:solidFill>
                             <a:srgbClr val="0F172A"/>
                           </a:solidFill>
@@ -7215,7 +7412,7 @@
                         </a:defRPr>
                       </a:pPr>
                       <a:r>
-                        <a:t>Vòng đời CRUD SKU vật tư &amp; Nhà cung cấp, kiểm tra toàn vẹn quan hệ khóa ngoại</a:t>
+                        <a:t>JWT Cookie HTTPOnly, Header X-Session-User cô lập phiên đa tab, chặn RBAC 403</a:t>
                       </a:r>
                     </a:p>
                   </a:txBody>
@@ -7231,7 +7428,7 @@
                     <a:lstStyle/>
                     <a:p>
                       <a:pPr algn="ctr">
-                        <a:defRPr sz="1250" b="1">
+                        <a:defRPr sz="1200" b="1">
                           <a:solidFill>
                             <a:srgbClr val="10B981"/>
                           </a:solidFill>
@@ -7257,7 +7454,7 @@
                     <a:lstStyle/>
                     <a:p>
                       <a:pPr>
-                        <a:defRPr sz="1250">
+                        <a:defRPr sz="1200">
                           <a:solidFill>
                             <a:srgbClr val="0F172A"/>
                           </a:solidFill>
@@ -7265,7 +7462,7 @@
                         </a:defRPr>
                       </a:pPr>
                       <a:r>
-                        <a:t>test_endpoints.py</a:t>
+                        <a:t>test_websocket, exceptions, crud</a:t>
                       </a:r>
                     </a:p>
                   </a:txBody>
@@ -7281,7 +7478,7 @@
                     <a:lstStyle/>
                     <a:p>
                       <a:pPr algn="ctr">
-                        <a:defRPr sz="1250">
+                        <a:defRPr sz="1200">
                           <a:solidFill>
                             <a:srgbClr val="0F172A"/>
                           </a:solidFill>
@@ -7289,7 +7486,7 @@
                         </a:defRPr>
                       </a:pPr>
                       <a:r>
-                        <a:t>1 Test Suite</a:t>
+                        <a:t>31+ Test Cases</a:t>
                       </a:r>
                     </a:p>
                   </a:txBody>
@@ -7305,7 +7502,7 @@
                     <a:lstStyle/>
                     <a:p>
                       <a:pPr>
-                        <a:defRPr sz="1250">
+                        <a:defRPr sz="1200">
                           <a:solidFill>
                             <a:srgbClr val="0F172A"/>
                           </a:solidFill>
@@ -7313,7 +7510,7 @@
                         </a:defRPr>
                       </a:pPr>
                       <a:r>
-                        <a:t>Kiểm thử Endpoints Dashboard, Master Data, Sổ Thẻ kho &amp; Xuất báo cáo Excel</a:t>
+                        <a:t>WebSocket Broadcast tức thời, Idempotency Token, Xử lý ngoại lệ, CRUD Master Data</a:t>
                       </a:r>
                     </a:p>
                   </a:txBody>
@@ -7329,7 +7526,7 @@
                     <a:lstStyle/>
                     <a:p>
                       <a:pPr algn="ctr">
-                        <a:defRPr sz="1250" b="1">
+                        <a:defRPr sz="1200" b="1">
                           <a:solidFill>
                             <a:srgbClr val="10B981"/>
                           </a:solidFill>
@@ -7394,7 +7591,7 @@
           <a:lstStyle/>
           <a:p>
             <a:pPr algn="ctr">
-              <a:defRPr sz="1350" b="1">
+              <a:defRPr sz="1300" b="1">
                 <a:solidFill>
                   <a:srgbClr val="06B6D4"/>
                 </a:solidFill>
@@ -7402,7 +7599,7 @@
               </a:defRPr>
             </a:pPr>
             <a:r>
-              <a:t>🏆 TỔNG NGHIỆM THU: 16/16 TEST CASES PASSED HOÀN TOÀN (100%) TRONG ~40 GIÂY THỰC THI PYTEST!</a:t>
+              <a:t>🏆 TỔNG KẾT KIỂM THỬ: 66/66 TEST CASES TỰ ĐỘNG (100% PASSED) TRONG ~40 GIÂY THỰC THI PYTEST!</a:t>
             </a:r>
           </a:p>
         </p:txBody>
@@ -7442,7 +7639,7 @@
         <p:spPr>
           <a:xfrm>
             <a:off x="731520" y="347472"/>
-            <a:ext cx="2286000" cy="347472"/>
+            <a:ext cx="2468880" cy="329184"/>
           </a:xfrm>
           <a:prstGeom prst="roundRect">
             <a:avLst/>
@@ -7475,7 +7672,7 @@
           <a:lstStyle/>
           <a:p>
             <a:pPr algn="ctr">
-              <a:defRPr sz="1200" b="1">
+              <a:defRPr sz="1150" b="1">
                 <a:solidFill>
                   <a:srgbClr val="FFFFFF"/>
                 </a:solidFill>
@@ -7483,7 +7680,7 @@
               </a:defRPr>
             </a:pPr>
             <a:r>
-              <a:t>PRODUCTION DEPLOYMENT</a:t>
+              <a:t>DEPLOYMENT &amp; REALTIME</a:t>
             </a:r>
           </a:p>
         </p:txBody>
@@ -7497,7 +7694,7 @@
         <p:spPr>
           <a:xfrm>
             <a:off x="731520" y="713232"/>
-            <a:ext cx="10725912" cy="685800"/>
+            <a:ext cx="10725912" cy="621792"/>
           </a:xfrm>
           <a:prstGeom prst="rect">
             <a:avLst/>
@@ -7519,7 +7716,7 @@
               </a:defRPr>
             </a:pPr>
             <a:r>
-              <a:t>Đóng Gói Triển Khai Docker &amp; Hỗ Trợ Truy Cập Đa Thiết Bị</a:t>
+              <a:t>Đóng Gói Triển Khai Docker &amp; Đồng Bộ Thời Gian Thực Đa Thiết Bị</a:t>
             </a:r>
           </a:p>
         </p:txBody>
@@ -7533,7 +7730,7 @@
         <p:spPr>
           <a:xfrm>
             <a:off x="731520" y="1417320"/>
-            <a:ext cx="2468880" cy="2103120"/>
+            <a:ext cx="2468880" cy="2057400"/>
           </a:xfrm>
           <a:prstGeom prst="roundRect">
             <a:avLst/>
@@ -7562,11 +7759,11 @@
           </a:fontRef>
         </p:style>
         <p:txBody>
-          <a:bodyPr rtlCol="0" anchor="ctr" wrap="square" lIns="182880" rIns="182880" tIns="128016"/>
-          <a:lstStyle/>
-          <a:p>
-            <a:pPr algn="l">
-              <a:defRPr sz="1300" b="1">
+          <a:bodyPr rtlCol="0" anchor="ctr" wrap="square" lIns="164592" rIns="164592" tIns="128016"/>
+          <a:lstStyle/>
+          <a:p>
+            <a:pPr algn="l">
+              <a:defRPr sz="1250" b="1">
                 <a:solidFill>
                   <a:srgbClr val="1E3A8A"/>
                 </a:solidFill>
@@ -7582,7 +7779,7 @@
               <a:spcBef>
                 <a:spcPts val="300"/>
               </a:spcBef>
-              <a:defRPr sz="1200" b="1">
+              <a:defRPr sz="1150" b="1">
                 <a:solidFill>
                   <a:srgbClr val="0F172A"/>
                 </a:solidFill>
@@ -7596,9 +7793,9 @@
           <a:p>
             <a:pPr algn="l">
               <a:spcBef>
-                <a:spcPts val="400"/>
+                <a:spcPts val="300"/>
               </a:spcBef>
-              <a:defRPr sz="1150">
+              <a:defRPr sz="1100">
                 <a:solidFill>
                   <a:srgbClr val="334155"/>
                 </a:solidFill>
@@ -7606,7 +7803,7 @@
               </a:defRPr>
             </a:pPr>
             <a:r>
-              <a:t>Lắng nghe Port 80 &amp; 443, cân bằng tải, định tuyến Web &amp; WebSocket</a:t>
+              <a:t>Lắng nghe Port 80 &amp; 443 SSL, cân bằng tải, định tuyến Web &amp; WebSocket</a:t>
             </a:r>
           </a:p>
         </p:txBody>
@@ -7620,7 +7817,7 @@
         <p:spPr>
           <a:xfrm>
             <a:off x="3483864" y="1417320"/>
-            <a:ext cx="2468880" cy="2103120"/>
+            <a:ext cx="2468880" cy="2057400"/>
           </a:xfrm>
           <a:prstGeom prst="roundRect">
             <a:avLst/>
@@ -7649,11 +7846,11 @@
           </a:fontRef>
         </p:style>
         <p:txBody>
-          <a:bodyPr rtlCol="0" anchor="ctr" wrap="square" lIns="182880" rIns="182880" tIns="128016"/>
-          <a:lstStyle/>
-          <a:p>
-            <a:pPr algn="l">
-              <a:defRPr sz="1300" b="1">
+          <a:bodyPr rtlCol="0" anchor="ctr" wrap="square" lIns="164592" rIns="164592" tIns="128016"/>
+          <a:lstStyle/>
+          <a:p>
+            <a:pPr algn="l">
+              <a:defRPr sz="1250" b="1">
                 <a:solidFill>
                   <a:srgbClr val="2563EB"/>
                 </a:solidFill>
@@ -7669,7 +7866,7 @@
               <a:spcBef>
                 <a:spcPts val="300"/>
               </a:spcBef>
-              <a:defRPr sz="1200" b="1">
+              <a:defRPr sz="1150" b="1">
                 <a:solidFill>
                   <a:srgbClr val="0F172A"/>
                 </a:solidFill>
@@ -7683,9 +7880,9 @@
           <a:p>
             <a:pPr algn="l">
               <a:spcBef>
-                <a:spcPts val="400"/>
+                <a:spcPts val="300"/>
               </a:spcBef>
-              <a:defRPr sz="1150">
+              <a:defRPr sz="1100">
                 <a:solidFill>
                   <a:srgbClr val="334155"/>
                 </a:solidFill>
@@ -7707,7 +7904,7 @@
         <p:spPr>
           <a:xfrm>
             <a:off x="6236208" y="1417320"/>
-            <a:ext cx="2468880" cy="2103120"/>
+            <a:ext cx="2468880" cy="2057400"/>
           </a:xfrm>
           <a:prstGeom prst="roundRect">
             <a:avLst/>
@@ -7736,11 +7933,11 @@
           </a:fontRef>
         </p:style>
         <p:txBody>
-          <a:bodyPr rtlCol="0" anchor="ctr" wrap="square" lIns="182880" rIns="182880" tIns="128016"/>
-          <a:lstStyle/>
-          <a:p>
-            <a:pPr algn="l">
-              <a:defRPr sz="1300" b="1">
+          <a:bodyPr rtlCol="0" anchor="ctr" wrap="square" lIns="164592" rIns="164592" tIns="128016"/>
+          <a:lstStyle/>
+          <a:p>
+            <a:pPr algn="l">
+              <a:defRPr sz="1250" b="1">
                 <a:solidFill>
                   <a:srgbClr val="0F2341"/>
                 </a:solidFill>
@@ -7756,7 +7953,7 @@
               <a:spcBef>
                 <a:spcPts val="300"/>
               </a:spcBef>
-              <a:defRPr sz="1200" b="1">
+              <a:defRPr sz="1150" b="1">
                 <a:solidFill>
                   <a:srgbClr val="0F172A"/>
                 </a:solidFill>
@@ -7764,15 +7961,15 @@
               </a:defRPr>
             </a:pPr>
             <a:r>
-              <a:t>Cơ Sở Dữ Liệu Tập Trung</a:t>
+              <a:t>CSDL Quan Hệ Tập Trung</a:t>
             </a:r>
           </a:p>
           <a:p>
             <a:pPr algn="l">
               <a:spcBef>
-                <a:spcPts val="400"/>
+                <a:spcPts val="300"/>
               </a:spcBef>
-              <a:defRPr sz="1150">
+              <a:defRPr sz="1100">
                 <a:solidFill>
                   <a:srgbClr val="334155"/>
                 </a:solidFill>
@@ -7780,7 +7977,7 @@
               </a:defRPr>
             </a:pPr>
             <a:r>
-              <a:t>PostgreSQL 15, lưu trữ volume bền bỉ postgres_data, ACID chuẩn</a:t>
+              <a:t>PostgreSQL 15, volume lưu trữ dữ liệu bền bỉ postgres_data</a:t>
             </a:r>
           </a:p>
         </p:txBody>
@@ -7794,7 +7991,7 @@
         <p:spPr>
           <a:xfrm>
             <a:off x="8988552" y="1417320"/>
-            <a:ext cx="2468880" cy="2103120"/>
+            <a:ext cx="2468880" cy="2057400"/>
           </a:xfrm>
           <a:prstGeom prst="roundRect">
             <a:avLst/>
@@ -7823,11 +8020,11 @@
           </a:fontRef>
         </p:style>
         <p:txBody>
-          <a:bodyPr rtlCol="0" anchor="ctr" wrap="square" lIns="182880" rIns="182880" tIns="128016"/>
-          <a:lstStyle/>
-          <a:p>
-            <a:pPr algn="l">
-              <a:defRPr sz="1300" b="1">
+          <a:bodyPr rtlCol="0" anchor="ctr" wrap="square" lIns="164592" rIns="164592" tIns="128016"/>
+          <a:lstStyle/>
+          <a:p>
+            <a:pPr algn="l">
+              <a:defRPr sz="1250" b="1">
                 <a:solidFill>
                   <a:srgbClr val="06B6D4"/>
                 </a:solidFill>
@@ -7843,7 +8040,7 @@
               <a:spcBef>
                 <a:spcPts val="300"/>
               </a:spcBef>
-              <a:defRPr sz="1200" b="1">
+              <a:defRPr sz="1150" b="1">
                 <a:solidFill>
                   <a:srgbClr val="0F172A"/>
                 </a:solidFill>
@@ -7857,9 +8054,9 @@
           <a:p>
             <a:pPr algn="l">
               <a:spcBef>
-                <a:spcPts val="400"/>
+                <a:spcPts val="300"/>
               </a:spcBef>
-              <a:defRPr sz="1150">
+              <a:defRPr sz="1100">
                 <a:solidFill>
                   <a:srgbClr val="334155"/>
                 </a:solidFill>
@@ -7867,7 +8064,7 @@
               </a:defRPr>
             </a:pPr>
             <a:r>
-              <a:t>pgAdmin 4 tại cổng 5050 giúp quản trị viên tra cứu DB trực tiếp</a:t>
+              <a:t>pgAdmin 4 tại cổng 5050 hỗ trợ quản trị viên giám sát CSDL</a:t>
             </a:r>
           </a:p>
         </p:txBody>
@@ -7880,8 +8077,8 @@
         </p:nvSpPr>
         <p:spPr>
           <a:xfrm>
-            <a:off x="731520" y="3749039"/>
-            <a:ext cx="10725912" cy="2606040"/>
+            <a:off x="731520" y="3703320"/>
+            <a:ext cx="10725912" cy="2651760"/>
           </a:xfrm>
           <a:prstGeom prst="roundRect">
             <a:avLst/>
@@ -7910,11 +8107,11 @@
           </a:fontRef>
         </p:style>
         <p:txBody>
-          <a:bodyPr rtlCol="0" anchor="ctr" wrap="square" lIns="365760" rIns="365760" tIns="201168"/>
-          <a:lstStyle/>
-          <a:p>
-            <a:pPr algn="l">
-              <a:defRPr sz="1500" b="1">
+          <a:bodyPr rtlCol="0" anchor="ctr" wrap="square" lIns="320040" rIns="320040" tIns="182880"/>
+          <a:lstStyle/>
+          <a:p>
+            <a:pPr algn="l">
+              <a:defRPr sz="1400" b="1">
                 <a:solidFill>
                   <a:srgbClr val="06B6D4"/>
                 </a:solidFill>
@@ -7922,7 +8119,7 @@
               </a:defRPr>
             </a:pPr>
             <a:r>
-              <a:t>🌐 HƯỚNG DẪN TRUY CẬP ĐA THIẾT BỊ TRONG MÔI TRƯỜNG DOANH NGHIỆP</a:t>
+              <a:t>🌐 KHẢ NĂNG TRUY CẬP ĐA THIẾT BỊ &amp; ĐỒNG BỘ REALTIME TRONG MẠNG LAN DOANH NGHIỆP</a:t>
             </a:r>
           </a:p>
           <a:p>
@@ -7930,7 +8127,7 @@
               <a:spcBef>
                 <a:spcPts val="500"/>
               </a:spcBef>
-              <a:defRPr sz="1300">
+              <a:defRPr sz="1250">
                 <a:solidFill>
                   <a:srgbClr val="FFFFFF"/>
                 </a:solidFill>
@@ -7938,7 +8135,7 @@
               </a:defRPr>
             </a:pPr>
             <a:r>
-              <a:t>1. Truy cập từ Máy chủ (Localhost): http://localhost  |  HTTPS SSL: https://localhost</a:t>
+              <a:t>1. Truy cập Máy chủ Cục bộ (Localhost): http://localhost  |  HTTPS SSL: https://localhost</a:t>
             </a:r>
           </a:p>
           <a:p>
@@ -7946,7 +8143,7 @@
               <a:spcBef>
                 <a:spcPts val="500"/>
               </a:spcBef>
-              <a:defRPr sz="1300">
+              <a:defRPr sz="1250">
                 <a:solidFill>
                   <a:srgbClr val="FFFFFF"/>
                 </a:solidFill>
@@ -7954,7 +8151,7 @@
               </a:defRPr>
             </a:pPr>
             <a:r>
-              <a:t>2. Truy cập qua Tên miền Sản xuất: http://smartlogis-ai.com  |  HTTPS: https://smartlogis-ai.com</a:t>
+              <a:t>2. Truy cập Tên miền Nội bộ: http://smartlogis-ai.com qua DNS / file hosts nội bộ</a:t>
             </a:r>
           </a:p>
           <a:p>
@@ -7962,7 +8159,7 @@
               <a:spcBef>
                 <a:spcPts val="500"/>
               </a:spcBef>
-              <a:defRPr sz="1300">
+              <a:defRPr sz="1250">
                 <a:solidFill>
                   <a:srgbClr val="FFFFFF"/>
                 </a:solidFill>
@@ -7970,7 +8167,7 @@
               </a:defRPr>
             </a:pPr>
             <a:r>
-              <a:t>3. Truy cập từ Thiết bị Di động (Mobile / Tablet cùng Wi-Fi): http://192.168.x.x (Thủ kho thao tác tại bãi)</a:t>
+              <a:t>3. Truy cập Thiết bị Di động (Mobile / Tablet cùng Wi-Fi): http://192.168.x.x (Thủ kho kiểm đếm tại bãi)</a:t>
             </a:r>
           </a:p>
           <a:p>
@@ -7978,7 +8175,7 @@
               <a:spcBef>
                 <a:spcPts val="500"/>
               </a:spcBef>
-              <a:defRPr sz="1300">
+              <a:defRPr sz="1250">
                 <a:solidFill>
                   <a:srgbClr val="FFFFFF"/>
                 </a:solidFill>
@@ -7986,7 +8183,7 @@
               </a:defRPr>
             </a:pPr>
             <a:r>
-              <a:t>4. Công cụ Quản trị CSDL &amp; API Docs: http://localhost:5050 (pgAdmin 4)  |  http://localhost/docs (Swagger UI)</a:t>
+              <a:t>4. Đồng bộ Thời gian thực (Realtime WebSocket): Biến động kho broadcast tức thời tới mọi thiết bị kết nối</a:t>
             </a:r>
           </a:p>
           <a:p>
@@ -7994,7 +8191,7 @@
               <a:spcBef>
                 <a:spcPts val="500"/>
               </a:spcBef>
-              <a:defRPr sz="1300">
+              <a:defRPr sz="1250">
                 <a:solidFill>
                   <a:srgbClr val="FFFFFF"/>
                 </a:solidFill>
@@ -8002,7 +8199,7 @@
               </a:defRPr>
             </a:pPr>
             <a:r>
-              <a:t>🚀 Khởi chạy tự động 1-Click: Chạy file `run_server.bat` (Windows) hoặc `start.sh` (Linux) tự cấu hình từ A-Z!</a:t>
+              <a:t>5. Khởi chạy 1-Click tự động: Tệp script run_app.bat (Windows) hoặc Docker Compose sẵn sàng vận hành</a:t>
             </a:r>
           </a:p>
         </p:txBody>
@@ -8042,7 +8239,7 @@
         <p:spPr>
           <a:xfrm>
             <a:off x="731520" y="347472"/>
-            <a:ext cx="2286000" cy="347472"/>
+            <a:ext cx="2468880" cy="329184"/>
           </a:xfrm>
           <a:prstGeom prst="roundRect">
             <a:avLst/>
@@ -8075,7 +8272,7 @@
           <a:lstStyle/>
           <a:p>
             <a:pPr algn="ctr">
-              <a:defRPr sz="1200" b="1">
+              <a:defRPr sz="1150" b="1">
                 <a:solidFill>
                   <a:srgbClr val="FFFFFF"/>
                 </a:solidFill>
@@ -8097,7 +8294,7 @@
         <p:spPr>
           <a:xfrm>
             <a:off x="731520" y="713232"/>
-            <a:ext cx="10725912" cy="685800"/>
+            <a:ext cx="10725912" cy="621792"/>
           </a:xfrm>
           <a:prstGeom prst="rect">
             <a:avLst/>
@@ -8119,7 +8316,7 @@
               </a:defRPr>
             </a:pPr>
             <a:r>
-              <a:t>Kịch Bản Live Demo Thực Chiến 5 Phút Thuyết Phục Hội Đồng</a:t>
+              <a:t>Kịch Bản Thực Nghiệm Demo Hệ Thống (Lộ Trình 5 Phút Mạch Lạc)</a:t>
             </a:r>
           </a:p>
         </p:txBody>
@@ -8143,9 +8340,9 @@
                 <a:tableStyleId>{5C22544A-7EE6-4342-B048-85BDC9FD1C3A}</a:tableStyleId>
               </a:tblPr>
               <a:tblGrid>
-                <a:gridCol w="1828800"/>
-                <a:gridCol w="4114800"/>
-                <a:gridCol w="4782312"/>
+                <a:gridCol w="1645920"/>
+                <a:gridCol w="4206240"/>
+                <a:gridCol w="4873752"/>
               </a:tblGrid>
               <a:tr h="822960">
                 <a:tc>
@@ -8154,7 +8351,7 @@
                     <a:lstStyle/>
                     <a:p>
                       <a:pPr algn="ctr">
-                        <a:defRPr sz="1300" b="1">
+                        <a:defRPr sz="1250" b="1">
                           <a:solidFill>
                             <a:srgbClr val="FFFFFF"/>
                           </a:solidFill>
@@ -8178,7 +8375,7 @@
                     <a:lstStyle/>
                     <a:p>
                       <a:pPr algn="l">
-                        <a:defRPr sz="1300" b="1">
+                        <a:defRPr sz="1250" b="1">
                           <a:solidFill>
                             <a:srgbClr val="FFFFFF"/>
                           </a:solidFill>
@@ -8202,7 +8399,7 @@
                     <a:lstStyle/>
                     <a:p>
                       <a:pPr algn="l">
-                        <a:defRPr sz="1300" b="1">
+                        <a:defRPr sz="1250" b="1">
                           <a:solidFill>
                             <a:srgbClr val="FFFFFF"/>
                           </a:solidFill>
@@ -8228,7 +8425,7 @@
                     <a:lstStyle/>
                     <a:p>
                       <a:pPr algn="ctr">
-                        <a:defRPr sz="1300" b="1">
+                        <a:defRPr sz="1250" b="1">
                           <a:solidFill>
                             <a:srgbClr val="2563EB"/>
                           </a:solidFill>
@@ -8252,7 +8449,7 @@
                     <a:lstStyle/>
                     <a:p>
                       <a:pPr>
-                        <a:defRPr sz="1300">
+                        <a:defRPr sz="1250">
                           <a:solidFill>
                             <a:srgbClr val="0F172A"/>
                           </a:solidFill>
@@ -8260,7 +8457,7 @@
                         </a:defRPr>
                       </a:pPr>
                       <a:r>
-                        <a:t>Đăng nhập Thủ kho (`thukho`) &amp; Nhân viên (`nhanvien`)</a:t>
+                        <a:t>Đăng nhập Thủ kho (thukho) và Nhân viên (nhanvien)</a:t>
                       </a:r>
                     </a:p>
                   </a:txBody>
@@ -8276,7 +8473,7 @@
                     <a:lstStyle/>
                     <a:p>
                       <a:pPr>
-                        <a:defRPr sz="1300">
+                        <a:defRPr sz="1250">
                           <a:solidFill>
                             <a:srgbClr val="0F172A"/>
                           </a:solidFill>
@@ -8284,7 +8481,7 @@
                         </a:defRPr>
                       </a:pPr>
                       <a:r>
-                        <a:t>So sánh giao diện RBAC: Thủ kho có nút Lập phiếu/Báo cáo; Nhân viên chỉ xem tra cứu</a:t>
+                        <a:t>Kiểm chứng phân quyền RBAC: Thủ kho có nút Lập phiếu; Nhân viên ở chế độ chỉ đọc</a:t>
                       </a:r>
                     </a:p>
                   </a:txBody>
@@ -8302,7 +8499,7 @@
                     <a:lstStyle/>
                     <a:p>
                       <a:pPr algn="ctr">
-                        <a:defRPr sz="1300" b="1">
+                        <a:defRPr sz="1250" b="1">
                           <a:solidFill>
                             <a:srgbClr val="2563EB"/>
                           </a:solidFill>
@@ -8326,7 +8523,7 @@
                     <a:lstStyle/>
                     <a:p>
                       <a:pPr>
-                        <a:defRPr sz="1300">
+                        <a:defRPr sz="1250">
                           <a:solidFill>
                             <a:srgbClr val="0F172A"/>
                           </a:solidFill>
@@ -8334,7 +8531,7 @@
                         </a:defRPr>
                       </a:pPr>
                       <a:r>
-                        <a:t>Bấm nút 'Báo Cáo 3 Phần' trên AI Widget</a:t>
+                        <a:t>Bấm 'Báo Cáo 3 Phần' trên AI Widget</a:t>
                       </a:r>
                     </a:p>
                   </a:txBody>
@@ -8350,7 +8547,7 @@
                     <a:lstStyle/>
                     <a:p>
                       <a:pPr>
-                        <a:defRPr sz="1300">
+                        <a:defRPr sz="1250">
                           <a:solidFill>
                             <a:srgbClr val="0F172A"/>
                           </a:solidFill>
@@ -8358,7 +8555,7 @@
                         </a:defRPr>
                       </a:pPr>
                       <a:r>
-                        <a:t>Google Gemini Live API phân tích Burn-rate, đề xuất nhập hàng và cảnh báo Dead stock</a:t>
+                        <a:t>Google Gemini tính toán Burn-rate, đề xuất nhập hàng và cảnh báo Dead Stock</a:t>
                       </a:r>
                     </a:p>
                   </a:txBody>
@@ -8376,7 +8573,7 @@
                     <a:lstStyle/>
                     <a:p>
                       <a:pPr algn="ctr">
-                        <a:defRPr sz="1300" b="1">
+                        <a:defRPr sz="1250" b="1">
                           <a:solidFill>
                             <a:srgbClr val="2563EB"/>
                           </a:solidFill>
@@ -8400,7 +8597,7 @@
                     <a:lstStyle/>
                     <a:p>
                       <a:pPr>
-                        <a:defRPr sz="1300">
+                        <a:defRPr sz="1250">
                           <a:solidFill>
                             <a:srgbClr val="0F172A"/>
                           </a:solidFill>
@@ -8408,7 +8605,7 @@
                         </a:defRPr>
                       </a:pPr>
                       <a:r>
-                        <a:t>Thử nghiệm xuất vượt tồn kho Thép D10</a:t>
+                        <a:t>Thử nghiệm xuất vượt số lượng tồn kho khả dụng</a:t>
                       </a:r>
                     </a:p>
                   </a:txBody>
@@ -8424,7 +8621,7 @@
                     <a:lstStyle/>
                     <a:p>
                       <a:pPr>
-                        <a:defRPr sz="1300">
+                        <a:defRPr sz="1250">
                           <a:solidFill>
                             <a:srgbClr val="0F172A"/>
                           </a:solidFill>
@@ -8432,7 +8629,7 @@
                         </a:defRPr>
                       </a:pPr>
                       <a:r>
-                        <a:t>Giao diện cảnh báo đỏ; Backend từ chối với mã lỗi 400 Bad Request chống tồn âm</a:t>
+                        <a:t>Giao diện cảnh báo; Backend từ chối ngay lập tức với mã lỗi HTTP 400 Bad Request</a:t>
                       </a:r>
                     </a:p>
                   </a:txBody>
@@ -8450,7 +8647,7 @@
                     <a:lstStyle/>
                     <a:p>
                       <a:pPr algn="ctr">
-                        <a:defRPr sz="1300" b="1">
+                        <a:defRPr sz="1250" b="1">
                           <a:solidFill>
                             <a:srgbClr val="2563EB"/>
                           </a:solidFill>
@@ -8474,7 +8671,7 @@
                     <a:lstStyle/>
                     <a:p>
                       <a:pPr>
-                        <a:defRPr sz="1300">
+                        <a:defRPr sz="1250">
                           <a:solidFill>
                             <a:srgbClr val="0F172A"/>
                           </a:solidFill>
@@ -8482,7 +8679,7 @@
                         </a:defRPr>
                       </a:pPr>
                       <a:r>
-                        <a:t>Lập phiếu nhập kho &amp; Tra cứu Thẻ kho</a:t>
+                        <a:t>Lập phiếu nhập kho &amp; Tra cứu sổ Thẻ kho</a:t>
                       </a:r>
                     </a:p>
                   </a:txBody>
@@ -8498,7 +8695,7 @@
                     <a:lstStyle/>
                     <a:p>
                       <a:pPr>
-                        <a:defRPr sz="1300">
+                        <a:defRPr sz="1250">
                           <a:solidFill>
                             <a:srgbClr val="0F172A"/>
                           </a:solidFill>
@@ -8524,7 +8721,7 @@
                     <a:lstStyle/>
                     <a:p>
                       <a:pPr algn="ctr">
-                        <a:defRPr sz="1300" b="1">
+                        <a:defRPr sz="1250" b="1">
                           <a:solidFill>
                             <a:srgbClr val="2563EB"/>
                           </a:solidFill>
@@ -8548,7 +8745,7 @@
                     <a:lstStyle/>
                     <a:p>
                       <a:pPr>
-                        <a:defRPr sz="1300">
+                        <a:defRPr sz="1250">
                           <a:solidFill>
                             <a:srgbClr val="0F172A"/>
                           </a:solidFill>
@@ -8556,7 +8753,7 @@
                         </a:defRPr>
                       </a:pPr>
                       <a:r>
-                        <a:t>Mở Swagger UI gọi API `/raw-context`</a:t>
+                        <a:t>Mở Swagger UI kiểm tra API /raw-context</a:t>
                       </a:r>
                     </a:p>
                   </a:txBody>
@@ -8572,7 +8769,7 @@
                     <a:lstStyle/>
                     <a:p>
                       <a:pPr>
-                        <a:defRPr sz="1300">
+                        <a:defRPr sz="1250">
                           <a:solidFill>
                             <a:srgbClr val="0F172A"/>
                           </a:solidFill>
@@ -8580,7 +8777,7 @@
                         </a:defRPr>
                       </a:pPr>
                       <a:r>
-                        <a:t>Thanh tra minh bạch: Chứng minh 100% dữ liệu nạp cho AI không chứa giá vốn</a:t>
+                        <a:t>Kiểm toán minh bạch: Chứng minh 100% dữ liệu nạp cho AI không chứa giá vốn</a:t>
                       </a:r>
                     </a:p>
                   </a:txBody>
@@ -8673,7 +8870,7 @@
         <p:spPr>
           <a:xfrm>
             <a:off x="731520" y="347472"/>
-            <a:ext cx="2286000" cy="347472"/>
+            <a:ext cx="2468880" cy="329184"/>
           </a:xfrm>
           <a:prstGeom prst="roundRect">
             <a:avLst/>
@@ -8706,7 +8903,7 @@
           <a:lstStyle/>
           <a:p>
             <a:pPr algn="ctr">
-              <a:defRPr sz="1200" b="1">
+              <a:defRPr sz="1150" b="1">
                 <a:solidFill>
                   <a:srgbClr val="FFFFFF"/>
                 </a:solidFill>
@@ -8728,7 +8925,7 @@
         <p:spPr>
           <a:xfrm>
             <a:off x="731520" y="713232"/>
-            <a:ext cx="10725912" cy="685800"/>
+            <a:ext cx="10725912" cy="621792"/>
           </a:xfrm>
           <a:prstGeom prst="rect">
             <a:avLst/>
@@ -8750,7 +8947,7 @@
               </a:defRPr>
             </a:pPr>
             <a:r>
-              <a:t>Kết Luận, Giá Trị Doanh Nghiệp &amp; Hướng Phát Triển</a:t>
+              <a:t>Tổng Kết Đề Tài &amp; Định Hướng Phát Triển Tương Lai</a:t>
             </a:r>
           </a:p>
         </p:txBody>
@@ -8797,7 +8994,7 @@
           <a:lstStyle/>
           <a:p>
             <a:pPr algn="l">
-              <a:defRPr sz="1550" b="1">
+              <a:defRPr sz="1500" b="1">
                 <a:solidFill>
                   <a:srgbClr val="06B6D4"/>
                 </a:solidFill>
@@ -8805,13 +9002,13 @@
               </a:defRPr>
             </a:pPr>
             <a:r>
-              <a:t>🏆 THÀNH TỰU NỔI BẬT ĐÃ ĐẠT ĐƯỢC</a:t>
+              <a:t>🏆 KẾT QUẢ &amp; THÀNH TỰU ĐẠT ĐƯỢC</a:t>
             </a:r>
           </a:p>
           <a:p>
             <a:pPr algn="l">
               <a:spcBef>
-                <a:spcPts val="700"/>
+                <a:spcPts val="800"/>
               </a:spcBef>
               <a:defRPr sz="1300">
                 <a:solidFill>
@@ -8821,13 +9018,13 @@
               </a:defRPr>
             </a:pPr>
             <a:r>
-              <a:t>• 100% Zero Negative Stock: Triệt tiêu hoàn toàn rủi ro tồn âm và Lost Update.</a:t>
+              <a:t>• Bảo toàn giao dịch ACID: Triệt tiêu hoàn toàn rủi ro tồn âm và Lost Update</a:t>
             </a:r>
           </a:p>
           <a:p>
             <a:pPr algn="l">
               <a:spcBef>
-                <a:spcPts val="700"/>
+                <a:spcPts val="800"/>
               </a:spcBef>
               <a:defRPr sz="1300">
                 <a:solidFill>
@@ -8837,13 +9034,13 @@
               </a:defRPr>
             </a:pPr>
             <a:r>
-              <a:t>• Trợ lý AI Gemini Thực Chiến: Cảnh báo Burn-rate &amp; đề xuất nhập kho thông minh.</a:t>
+              <a:t>• Trợ lý AI thực tiễn: Khử sạch 100% giá vốn nhạy cảm, cung cấp báo cáo 3 phần</a:t>
             </a:r>
           </a:p>
           <a:p>
             <a:pPr algn="l">
               <a:spcBef>
-                <a:spcPts val="700"/>
+                <a:spcPts val="800"/>
               </a:spcBef>
               <a:defRPr sz="1300">
                 <a:solidFill>
@@ -8853,13 +9050,13 @@
               </a:defRPr>
             </a:pPr>
             <a:r>
-              <a:t>• Bảo Mật Cấp Doanh Nghiệp: Khử 100% giá vốn nhạy cảm, phân quyền RBAC 3 vai trò.</a:t>
+              <a:t>• Kiến trúc mở &amp; tin cậy: Đồng bộ WebSocket đa thiết bị, phân quyền RBAC 3 vai trò</a:t>
             </a:r>
           </a:p>
           <a:p>
             <a:pPr algn="l">
               <a:spcBef>
-                <a:spcPts val="700"/>
+                <a:spcPts val="800"/>
               </a:spcBef>
               <a:defRPr sz="1300">
                 <a:solidFill>
@@ -8869,7 +9066,7 @@
               </a:defRPr>
             </a:pPr>
             <a:r>
-              <a:t>• Chất Lượng Xuất Xưởng: 16/16 Test Cases passed, CSDL MySQL 8.0 &amp; SQLite WAL sẵn sàng.</a:t>
+              <a:t>• Đảm bảo chất lượng: 66/66 Test Cases Pytest bao phủ toàn diện các phân hệ cốt lõi</a:t>
             </a:r>
           </a:p>
         </p:txBody>
@@ -8916,7 +9113,7 @@
           <a:lstStyle/>
           <a:p>
             <a:pPr algn="l">
-              <a:defRPr sz="1550" b="1">
+              <a:defRPr sz="1500" b="1">
                 <a:solidFill>
                   <a:srgbClr val="06B6D4"/>
                 </a:solidFill>
@@ -8930,7 +9127,7 @@
           <a:p>
             <a:pPr algn="l">
               <a:spcBef>
-                <a:spcPts val="700"/>
+                <a:spcPts val="800"/>
               </a:spcBef>
               <a:defRPr sz="1300">
                 <a:solidFill>
@@ -8940,13 +9137,13 @@
               </a:defRPr>
             </a:pPr>
             <a:r>
-              <a:t>• Dự Báo Nhu Cầu Nâng Cao: Tích hợp mô hình chuỗi thời gian ARIMA / Prophet.</a:t>
+              <a:t>• Dự báo nhu cầu nâng cao: Tích hợp mô hình chuỗi thời gian (ARIMA / ML)</a:t>
             </a:r>
           </a:p>
           <a:p>
             <a:pPr algn="l">
               <a:spcBef>
-                <a:spcPts val="700"/>
+                <a:spcPts val="800"/>
               </a:spcBef>
               <a:defRPr sz="1300">
                 <a:solidFill>
@@ -8956,13 +9153,13 @@
               </a:defRPr>
             </a:pPr>
             <a:r>
-              <a:t>• Smart Bin Location: Bản đồ kho 2D/3D tối ưu hóa đường đi lấy hàng cho xe nâng.</a:t>
+              <a:t>• Ứng dụng di động Native: Xây dựng App Flutter / React Native quét mã QR/RFID</a:t>
             </a:r>
           </a:p>
           <a:p>
             <a:pPr algn="l">
               <a:spcBef>
-                <a:spcPts val="700"/>
+                <a:spcPts val="800"/>
               </a:spcBef>
               <a:defRPr sz="1300">
                 <a:solidFill>
@@ -8972,13 +9169,13 @@
               </a:defRPr>
             </a:pPr>
             <a:r>
-              <a:t>• Mobile Barcode App: Ứng dụng di động quét mã QR kiểm hàng nhanh ngoài hiện trường.</a:t>
+              <a:t>• Bản đồ kho thông minh (Smart Bin Location): Tối ưu sơ đồ vị trí và đường đi lấy hàng</a:t>
             </a:r>
           </a:p>
           <a:p>
             <a:pPr algn="l">
               <a:spcBef>
-                <a:spcPts val="700"/>
+                <a:spcPts val="800"/>
               </a:spcBef>
               <a:defRPr sz="1300">
                 <a:solidFill>
@@ -8988,7 +9185,7 @@
               </a:defRPr>
             </a:pPr>
             <a:r>
-              <a:t>• Tích Hợp ERP Doanh Nghiệp: Kết nối API đồng bộ với SAP, Odoo, Fast Accounting.</a:t>
+              <a:t>• Tích hợp chuẩn ERP: Kết nối API trao đổi dữ liệu với Odoo, SAP, Fast Accounting</a:t>
             </a:r>
           </a:p>
         </p:txBody>
@@ -9035,7 +9232,7 @@
           <a:lstStyle/>
           <a:p>
             <a:pPr algn="ctr">
-              <a:defRPr sz="1500" b="1">
+              <a:defRPr sz="1450" b="1">
                 <a:solidFill>
                   <a:srgbClr val="FFFFFF"/>
                 </a:solidFill>
@@ -9051,7 +9248,7 @@
               <a:spcBef>
                 <a:spcPts val="400"/>
               </a:spcBef>
-              <a:defRPr sz="1300">
+              <a:defRPr sz="1250">
                 <a:solidFill>
                   <a:srgbClr val="06B6D4"/>
                 </a:solidFill>
@@ -9059,7 +9256,7 @@
               </a:defRPr>
             </a:pPr>
             <a:r>
-              <a:t>Nhóm nghiên cứu xin sẵn sàng tiếp thu ý kiến và trả lời các câu hỏi phản biện từ Hội đồng.</a:t>
+              <a:t>Nhóm sinh viên thực hiện xin sẵn sàng tiếp thu ý kiến đóng góp và trả lời các câu hỏi phản biện.</a:t>
             </a:r>
           </a:p>
         </p:txBody>
@@ -9099,7 +9296,7 @@
         <p:spPr>
           <a:xfrm>
             <a:off x="731520" y="347472"/>
-            <a:ext cx="2286000" cy="347472"/>
+            <a:ext cx="2468880" cy="329184"/>
           </a:xfrm>
           <a:prstGeom prst="roundRect">
             <a:avLst/>
@@ -9132,7 +9329,7 @@
           <a:lstStyle/>
           <a:p>
             <a:pPr algn="ctr">
-              <a:defRPr sz="1200" b="1">
+              <a:defRPr sz="1150" b="1">
                 <a:solidFill>
                   <a:srgbClr val="FFFFFF"/>
                 </a:solidFill>
@@ -9154,7 +9351,7 @@
         <p:spPr>
           <a:xfrm>
             <a:off x="731520" y="713232"/>
-            <a:ext cx="10725912" cy="685800"/>
+            <a:ext cx="10725912" cy="621792"/>
           </a:xfrm>
           <a:prstGeom prst="rect">
             <a:avLst/>
@@ -9176,7 +9373,7 @@
               </a:defRPr>
             </a:pPr>
             <a:r>
-              <a:t>Thực Trạng &amp; 4 Nỗi Đau Lớn Trong Quản Trị Kho Vật Tư</a:t>
+              <a:t>Bối Cảnh Thực Tế &amp; 4 Thách Thức Kỹ Thuật Quản Trị Kho</a:t>
             </a:r>
           </a:p>
         </p:txBody>
@@ -9231,7 +9428,7 @@
               </a:defRPr>
             </a:pPr>
             <a:r>
-              <a:t>⚠️ 1. TỒN KHO ÂM (NEGATIVE STOCK)</a:t>
+              <a:t>⚠️ 1. LỖI TỒN ÂM (NEGATIVE STOCK)</a:t>
             </a:r>
           </a:p>
           <a:p>
@@ -9247,7 +9444,7 @@
               </a:defRPr>
             </a:pPr>
             <a:r>
-              <a:t>Lỗi Race Condition &amp; Lost Update Khi Xuất Đồng Thời</a:t>
+              <a:t>Xung Đột Đồng Thời (Concurrency Race Condition)</a:t>
             </a:r>
           </a:p>
           <a:p>
@@ -9279,7 +9476,7 @@
               </a:defRPr>
             </a:pPr>
             <a:r>
-              <a:t>• Hệ thống không khóa dòng dẫn đến xuất vượt số lượng có thực</a:t>
+              <a:t>• Hiện tượng Lost Update do trừ tồn kho trong bộ nhớ ứng dụng</a:t>
             </a:r>
           </a:p>
           <a:p>
@@ -9295,7 +9492,7 @@
               </a:defRPr>
             </a:pPr>
             <a:r>
-              <a:t>• Sai lệch sổ sách nghiêm trọng giữa thủ kho và kế toán công ty</a:t>
+              <a:t>• Sai lệch nghiêm trọng giữa số liệu kế toán và kho thực tế</a:t>
             </a:r>
           </a:p>
         </p:txBody>
@@ -9393,7 +9590,7 @@
               </a:defRPr>
             </a:pPr>
             <a:r>
-              <a:t>⛓️ 2. ĐỨT GÃY CHUỖI CUNG ỨNG</a:t>
+              <a:t>⛓️ 2. ĐỨT GÃY NGUỒN CUNG VẬT TƯ</a:t>
             </a:r>
           </a:p>
           <a:p>
@@ -9409,7 +9606,7 @@
               </a:defRPr>
             </a:pPr>
             <a:r>
-              <a:t>Cạn Kiệt Vật Tư Do Thiếu Dự Báo Tốc Độ Tiêu Thụ</a:t>
+              <a:t>Thiếu Cơ Chế Dự Báo Tốc Độ Tiêu Thụ (Burn-Rate)</a:t>
             </a:r>
           </a:p>
           <a:p>
@@ -9425,7 +9622,7 @@
               </a:defRPr>
             </a:pPr>
             <a:r>
-              <a:t>• Không theo dõi tốc độ tiêu thụ hàng ngày (Burn-rate tiêu chuẩn)</a:t>
+              <a:t>• Không theo dõi định lượng tốc độ tiêu thụ bình quân hàng ngày</a:t>
             </a:r>
           </a:p>
           <a:p>
@@ -9441,7 +9638,7 @@
               </a:defRPr>
             </a:pPr>
             <a:r>
-              <a:t>• Hàng chạm ngưỡng cạn kiệt mới phát hiện để đặt nhà cung cấp</a:t>
+              <a:t>• Chậm trễ phát hiện khi vật tư chạm ngưỡng tồn tối thiểu</a:t>
             </a:r>
           </a:p>
           <a:p>
@@ -9457,7 +9654,7 @@
               </a:defRPr>
             </a:pPr>
             <a:r>
-              <a:t>• Gây chậm tiến độ thi công toàn bộ dây chuyền công trình xây dựng</a:t>
+              <a:t>• Gây đình trệ dây chuyền cung ứng và tiến độ thi công công trình</a:t>
             </a:r>
           </a:p>
         </p:txBody>
@@ -9555,7 +9752,7 @@
               </a:defRPr>
             </a:pPr>
             <a:r>
-              <a:t>📦 3. ĐỌNG VỐN (DEAD STOCK)</a:t>
+              <a:t>📦 3. HÀNG Ứ ĐỌNG (DEAD STOCK)</a:t>
             </a:r>
           </a:p>
           <a:p>
@@ -9571,7 +9768,7 @@
               </a:defRPr>
             </a:pPr>
             <a:r>
-              <a:t>Lãng Phí Hàng Chục Tỷ Đồng Lưu Kho Không Luân Chuyển</a:t>
+              <a:t>Khó Khăn Kiểm Soát Thủ Công Vật Tư Lưu Kho Lâu Ngày</a:t>
             </a:r>
           </a:p>
           <a:p>
@@ -9587,7 +9784,7 @@
               </a:defRPr>
             </a:pPr>
             <a:r>
-              <a:t>• Nhiều SKU vật tư giá trị cao nằm kho &gt; 60 ngày không ai hay biết</a:t>
+              <a:t>• Nhiều SKU giá trị cao nằm kho vượt 60 ngày không phát sinh xuất</a:t>
             </a:r>
           </a:p>
           <a:p>
@@ -9603,7 +9800,7 @@
               </a:defRPr>
             </a:pPr>
             <a:r>
-              <a:t>• Chiếm dụng diện tích mặt bằng và phát sinh chi phí lưu bãi lớn</a:t>
+              <a:t>• Chiếm dụng diện tích mặt bằng kho bãi và phát sinh chi phí lưu kho</a:t>
             </a:r>
           </a:p>
           <a:p>
@@ -9619,7 +9816,7 @@
               </a:defRPr>
             </a:pPr>
             <a:r>
-              <a:t>• Ban giám đốc thiếu công cụ tự động cảnh báo để giải phóng hàng</a:t>
+              <a:t>• Thiếu thuật toán tự động nhận diện và cảnh báo sớm cho quản lý</a:t>
             </a:r>
           </a:p>
         </p:txBody>
@@ -9717,7 +9914,7 @@
               </a:defRPr>
             </a:pPr>
             <a:r>
-              <a:t>🔒 4. RỦI RO LỘ BÍ MẬT GIÁ VỐN</a:t>
+              <a:t>🔒 4. NGUY CƠ LỘ GIÁ VỐN KHI DÙNG AI</a:t>
             </a:r>
           </a:p>
           <a:p>
@@ -9733,7 +9930,7 @@
               </a:defRPr>
             </a:pPr>
             <a:r>
-              <a:t>Rò Rỉ Dữ Liệu Tài Chính Khi Đưa Thẳng Lên Cloud AI</a:t>
+              <a:t>Rủi Ro Bảo Mật Dữ Liệu Khi Gửi Lên Public Cloud LLM</a:t>
             </a:r>
           </a:p>
           <a:p>
@@ -9749,7 +9946,7 @@
               </a:defRPr>
             </a:pPr>
             <a:r>
-              <a:t>• Đưa trực tiếp đơn giá nhập và thành tiền lên các LLM công cộng</a:t>
+              <a:t>• Gửi trực tiếp bảng dữ liệu thô chứa đơn giá và thành tiền sang AI</a:t>
             </a:r>
           </a:p>
           <a:p>
@@ -9765,7 +9962,7 @@
               </a:defRPr>
             </a:pPr>
             <a:r>
-              <a:t>• Nguy cơ lộ mức chiết khấu và chính sách giá mua nhà cung cấp</a:t>
+              <a:t>• Nguy cơ rò rỉ chính sách chiết khấu và giá mua từ nhà cung cấp</a:t>
             </a:r>
           </a:p>
           <a:p>
@@ -9781,7 +9978,7 @@
               </a:defRPr>
             </a:pPr>
             <a:r>
-              <a:t>• Mối đe dọa an toàn thông tin và uy tín cạnh tranh của doanh nghiệp</a:t>
+              <a:t>• Yêu cầu bắt buộc phải có cơ chế khử nhạy cảm trước khi gửi context</a:t>
             </a:r>
           </a:p>
         </p:txBody>
@@ -9864,7 +10061,7 @@
         <p:spPr>
           <a:xfrm>
             <a:off x="731520" y="347472"/>
-            <a:ext cx="2286000" cy="347472"/>
+            <a:ext cx="2468880" cy="329184"/>
           </a:xfrm>
           <a:prstGeom prst="roundRect">
             <a:avLst/>
@@ -9897,7 +10094,7 @@
           <a:lstStyle/>
           <a:p>
             <a:pPr algn="ctr">
-              <a:defRPr sz="1200" b="1">
+              <a:defRPr sz="1150" b="1">
                 <a:solidFill>
                   <a:srgbClr val="FFFFFF"/>
                 </a:solidFill>
@@ -9919,7 +10116,7 @@
         <p:spPr>
           <a:xfrm>
             <a:off x="731520" y="713232"/>
-            <a:ext cx="10725912" cy="685800"/>
+            <a:ext cx="10725912" cy="621792"/>
           </a:xfrm>
           <a:prstGeom prst="rect">
             <a:avLst/>
@@ -9941,7 +10138,7 @@
               </a:defRPr>
             </a:pPr>
             <a:r>
-              <a:t>Mục Tiêu Chiến Lược: 100% Zero Tồn Âm &amp; AI Cố Vấn Tự Động</a:t>
+              <a:t>Mục Tiêu Đề Tài &amp; 3 Trụ Cột Giải Pháp Kỹ Thuật</a:t>
             </a:r>
           </a:p>
         </p:txBody>
@@ -9996,7 +10193,7 @@
               </a:defRPr>
             </a:pPr>
             <a:r>
-              <a:t>Bảo Vệ Đồng Thời 2 Lớp</a:t>
+              <a:t>Kiểm Soát Tồn Kho Chống Âm 2 Tầng</a:t>
             </a:r>
           </a:p>
           <a:p>
@@ -10012,7 +10209,7 @@
               </a:defRPr>
             </a:pPr>
             <a:r>
-              <a:t>• Atomic SQL Decrement loại bỏ 100% Race Condition</a:t>
+              <a:t>• Atomic SQL Decrement triệt tiêu hoàn toàn Race Condition</a:t>
             </a:r>
           </a:p>
           <a:p>
@@ -10028,7 +10225,7 @@
               </a:defRPr>
             </a:pPr>
             <a:r>
-              <a:t>• Hardware CheckConstraint (Ton &gt;= 0) cấp CSDL</a:t>
+              <a:t>• Hardware CheckConstraint (SoLuongTon &gt;= 0) cấp CSDL</a:t>
             </a:r>
           </a:p>
           <a:p>
@@ -10044,7 +10241,7 @@
               </a:defRPr>
             </a:pPr>
             <a:r>
-              <a:t>• Tự động Rollback toàn bộ chứng từ nếu hàng thiếu</a:t>
+              <a:t>• Cơ chế Rollback tự động toàn bộ khi hàng không đủ số lượng</a:t>
             </a:r>
           </a:p>
           <a:p>
@@ -10060,7 +10257,7 @@
               </a:defRPr>
             </a:pPr>
             <a:r>
-              <a:t>• Cam kết an toàn số liệu kho tuyệt đối 24/7</a:t>
+              <a:t>• Bảo toàn tính bất biến của sổ Thẻ kho lũy kế (the_kho)</a:t>
             </a:r>
           </a:p>
         </p:txBody>
@@ -10105,7 +10302,7 @@
           <a:lstStyle/>
           <a:p>
             <a:pPr algn="ctr">
-              <a:defRPr sz="1500" b="1">
+              <a:defRPr sz="1450" b="1">
                 <a:solidFill>
                   <a:srgbClr val="FFFFFF"/>
                 </a:solidFill>
@@ -10113,7 +10310,7 @@
               </a:defRPr>
             </a:pPr>
             <a:r>
-              <a:t>🛡️ 100% ZERO TỒN ÂM</a:t>
+              <a:t>🛡️ 1. BẢO TOÀN GIAO DỊCH ACID</a:t>
             </a:r>
           </a:p>
         </p:txBody>
@@ -10168,7 +10365,7 @@
               </a:defRPr>
             </a:pPr>
             <a:r>
-              <a:t>Google Gemini Cố Vấn 24/7</a:t>
+              <a:t>Trợ Lý AI Phân Tích Chuyên Sâu</a:t>
             </a:r>
           </a:p>
           <a:p>
@@ -10184,7 +10381,7 @@
               </a:defRPr>
             </a:pPr>
             <a:r>
-              <a:t>• Tự động tính toán Burn-rate tiêu thụ thực tế 30 ngày</a:t>
+              <a:t>• Tích hợp Google Gemini LLM với System Prompt Logistics</a:t>
             </a:r>
           </a:p>
           <a:p>
@@ -10200,7 +10397,7 @@
               </a:defRPr>
             </a:pPr>
             <a:r>
-              <a:t>• Cảnh báo &amp; gợi ý khối lượng nhập hàng khẩn cấp</a:t>
+              <a:t>• Tự động tính toán tốc độ tiêu thụ Burn-rate 30 ngày gần nhất</a:t>
             </a:r>
           </a:p>
           <a:p>
@@ -10216,7 +10413,7 @@
               </a:defRPr>
             </a:pPr>
             <a:r>
-              <a:t>• Tự động chỉ điểm các SKU tồn đọng Dead Stock &gt; 60 ngày</a:t>
+              <a:t>• Báo cáo điều hành chuẩn hóa 3 phần phục vụ ra quyết định</a:t>
             </a:r>
           </a:p>
           <a:p>
@@ -10232,7 +10429,7 @@
               </a:defRPr>
             </a:pPr>
             <a:r>
-              <a:t>• Báo cáo điều hành chuẩn hóa 3 phần súc tích</a:t>
+              <a:t>• Tự động chỉ điểm danh mục Dead Stock cần ưu tiên giải phóng</a:t>
             </a:r>
           </a:p>
         </p:txBody>
@@ -10277,7 +10474,7 @@
           <a:lstStyle/>
           <a:p>
             <a:pPr algn="ctr">
-              <a:defRPr sz="1500" b="1">
+              <a:defRPr sz="1450" b="1">
                 <a:solidFill>
                   <a:srgbClr val="FFFFFF"/>
                 </a:solidFill>
@@ -10285,7 +10482,7 @@
               </a:defRPr>
             </a:pPr>
             <a:r>
-              <a:t>🧠 TRỢ LÝ AI ĐIỀU HÀNH</a:t>
+              <a:t>🧠 2. HỖ TRỢ ĐIỀU HÀNH THÔNG MINH</a:t>
             </a:r>
           </a:p>
         </p:txBody>
@@ -10340,7 +10537,7 @@
               </a:defRPr>
             </a:pPr>
             <a:r>
-              <a:t>Khử Nhạy Cảm Dữ Liệu 100%</a:t>
+              <a:t>Khử Trùng Dữ Liệu &amp; Fallback Ngoại Tuyến</a:t>
             </a:r>
           </a:p>
           <a:p>
@@ -10356,7 +10553,7 @@
               </a:defRPr>
             </a:pPr>
             <a:r>
-              <a:t>• Module Data Sanitizer độc quyền khử sạch đơn giá nhập</a:t>
+              <a:t>• Module Data Sanitizer lọc sạch 100% trường giá vốn nhạy cảm</a:t>
             </a:r>
           </a:p>
           <a:p>
@@ -10372,7 +10569,7 @@
               </a:defRPr>
             </a:pPr>
             <a:r>
-              <a:t>• Chỉ gửi context số lượng và phân loại hàng hóa cho LLM</a:t>
+              <a:t>• Endpoint audit dữ liệu minh bạch: GET /api/v1/ai/raw-context</a:t>
             </a:r>
           </a:p>
           <a:p>
@@ -10388,7 +10585,7 @@
               </a:defRPr>
             </a:pPr>
             <a:r>
-              <a:t>• Local Grounded Fallback Engine khi mất mạng/lỗi 429</a:t>
+              <a:t>• Local Grounded Fallback Engine chạy khi mất mạng hoặc lỗi 429</a:t>
             </a:r>
           </a:p>
           <a:p>
@@ -10404,7 +10601,7 @@
               </a:defRPr>
             </a:pPr>
             <a:r>
-              <a:t>• Thanh tra minh bạch qua API /raw-context bất kỳ lúc nào</a:t>
+              <a:t>• Phân quyền RBAC 3 vai trò và cô lập phiên Tab Session</a:t>
             </a:r>
           </a:p>
         </p:txBody>
@@ -10449,7 +10646,7 @@
           <a:lstStyle/>
           <a:p>
             <a:pPr algn="ctr">
-              <a:defRPr sz="1500" b="1">
+              <a:defRPr sz="1450" b="1">
                 <a:solidFill>
                   <a:srgbClr val="FFFFFF"/>
                 </a:solidFill>
@@ -10457,7 +10654,7 @@
               </a:defRPr>
             </a:pPr>
             <a:r>
-              <a:t>🔐 ZERO FINANCIAL LEAK</a:t>
+              <a:t>🔐 3. BẢO MẬT &amp; ĐỘ SẴN SÀNG CAO</a:t>
             </a:r>
           </a:p>
         </p:txBody>
@@ -10504,7 +10701,7 @@
           <a:lstStyle/>
           <a:p>
             <a:pPr algn="ctr">
-              <a:defRPr sz="1400" b="1">
+              <a:defRPr sz="1350" b="1">
                 <a:solidFill>
                   <a:srgbClr val="06B6D4"/>
                 </a:solidFill>
@@ -10512,7 +10709,7 @@
               </a:defRPr>
             </a:pPr>
             <a:r>
-              <a:t>🎯 CAM KẾT ĐẦU RA: Vận hành mượt mà, phân quyền RBAC 3 vai trò, đóng gói Docker 1-click hoàn chỉnh.</a:t>
+              <a:t>🎯 KẾT QUẢ ĐẦU RA: Hệ thống hoàn chỉnh đáp ứng ACID, bảo mật dữ liệu AI, phân quyền 3 vai trò và vận hành đa thiết bị.</a:t>
             </a:r>
           </a:p>
         </p:txBody>
@@ -10552,7 +10749,7 @@
         <p:spPr>
           <a:xfrm>
             <a:off x="731520" y="347472"/>
-            <a:ext cx="2286000" cy="347472"/>
+            <a:ext cx="2468880" cy="329184"/>
           </a:xfrm>
           <a:prstGeom prst="roundRect">
             <a:avLst/>
@@ -10585,7 +10782,7 @@
           <a:lstStyle/>
           <a:p>
             <a:pPr algn="ctr">
-              <a:defRPr sz="1200" b="1">
+              <a:defRPr sz="1150" b="1">
                 <a:solidFill>
                   <a:srgbClr val="FFFFFF"/>
                 </a:solidFill>
@@ -10607,7 +10804,7 @@
         <p:spPr>
           <a:xfrm>
             <a:off x="731520" y="713232"/>
-            <a:ext cx="10725912" cy="685800"/>
+            <a:ext cx="10725912" cy="621792"/>
           </a:xfrm>
           <a:prstGeom prst="rect">
             <a:avLst/>
@@ -10629,7 +10826,7 @@
               </a:defRPr>
             </a:pPr>
             <a:r>
-              <a:t>Kiến Trúc Phân Tầng Hệ Thống (Modular Clean Architecture)</a:t>
+              <a:t>Kiến Trúc Hệ Thống Phân Tầng (Layered Architecture)</a:t>
             </a:r>
           </a:p>
         </p:txBody>
@@ -10642,8 +10839,8 @@
         </p:nvSpPr>
         <p:spPr>
           <a:xfrm>
-            <a:off x="731520" y="1389888"/>
-            <a:ext cx="10725912" cy="1133856"/>
+            <a:off x="731520" y="1417320"/>
+            <a:ext cx="10725912" cy="1115568"/>
           </a:xfrm>
           <a:prstGeom prst="roundRect">
             <a:avLst/>
@@ -10676,7 +10873,7 @@
           <a:lstStyle/>
           <a:p>
             <a:pPr algn="l">
-              <a:defRPr sz="1550" b="1">
+              <a:defRPr sz="1500" b="1">
                 <a:solidFill>
                   <a:srgbClr val="2563EB"/>
                 </a:solidFill>
@@ -10684,7 +10881,7 @@
               </a:defRPr>
             </a:pPr>
             <a:r>
-              <a:t>1. PRESENTATION LAYER (TẦNG GIAO DIỆN NGƯỜI DÙNG)</a:t>
+              <a:t>1. PRESENTATION LAYER (TẦNG GIAO DIỆN &amp; TƯƠNG TÁC)</a:t>
             </a:r>
           </a:p>
           <a:p>
@@ -10692,7 +10889,7 @@
               <a:spcBef>
                 <a:spcPts val="300"/>
               </a:spcBef>
-              <a:defRPr sz="1350" b="1">
+              <a:defRPr sz="1300" b="1">
                 <a:solidFill>
                   <a:srgbClr val="2563EB"/>
                 </a:solidFill>
@@ -10700,7 +10897,7 @@
               </a:defRPr>
             </a:pPr>
             <a:r>
-              <a:t>Công nghệ cốt lõi: Jinja2 Server-Side Rendering • Tailwind CSS • Chart.js • WebSocket Stream</a:t>
+              <a:t>Công nghệ cốt lõi: Jinja2 Server-Side Rendering • Tailwind CSS • Chart.js • Native WebSocket Client</a:t>
             </a:r>
           </a:p>
           <a:p>
@@ -10716,7 +10913,7 @@
               </a:defRPr>
             </a:pPr>
             <a:r>
-              <a:t>Nhiệm vụ nghiệp vụ: Giao diện điều hành thời gian thực, hiển thị trực quan 4 thẻ KPIs kho vận, widget AI tương tác trực tiếp và tương thích 100% responsive đa thiết bị (PC, tablet, mobile).</a:t>
+              <a:t>Nhiệm vụ kiến trúc: Hiển thị Dashboard điều hành thời gian thực, trực quan hóa KPI kho, tương tác trợ lý AI và hỗ trợ responsive trên PC, tablet, mobile.</a:t>
             </a:r>
           </a:p>
         </p:txBody>
@@ -10729,8 +10926,8 @@
         </p:nvSpPr>
         <p:spPr>
           <a:xfrm>
-            <a:off x="731520" y="1389888"/>
-            <a:ext cx="164592" cy="1133856"/>
+            <a:off x="731520" y="1417320"/>
+            <a:ext cx="164592" cy="1115568"/>
           </a:xfrm>
           <a:prstGeom prst="rect">
             <a:avLst/>
@@ -10772,8 +10969,8 @@
         </p:nvSpPr>
         <p:spPr>
           <a:xfrm>
-            <a:off x="731520" y="2670048"/>
-            <a:ext cx="10725912" cy="1133856"/>
+            <a:off x="731520" y="2679192"/>
+            <a:ext cx="10725912" cy="1115568"/>
           </a:xfrm>
           <a:prstGeom prst="roundRect">
             <a:avLst/>
@@ -10806,7 +11003,7 @@
           <a:lstStyle/>
           <a:p>
             <a:pPr algn="l">
-              <a:defRPr sz="1550" b="1">
+              <a:defRPr sz="1500" b="1">
                 <a:solidFill>
                   <a:srgbClr val="1E3A8A"/>
                 </a:solidFill>
@@ -10814,7 +11011,7 @@
               </a:defRPr>
             </a:pPr>
             <a:r>
-              <a:t>2. SECURITY &amp; RBAC LAYER (TẦNG BẢO MẬT &amp; PHÂN QUYỀN)</a:t>
+              <a:t>2. SECURITY &amp; AUTH LAYER (TẦNG BẢO MẬT &amp; PHIÊN LÀM VIỆC)</a:t>
             </a:r>
           </a:p>
           <a:p>
@@ -10822,7 +11019,7 @@
               <a:spcBef>
                 <a:spcPts val="300"/>
               </a:spcBef>
-              <a:defRPr sz="1350" b="1">
+              <a:defRPr sz="1300" b="1">
                 <a:solidFill>
                   <a:srgbClr val="2563EB"/>
                 </a:solidFill>
@@ -10830,7 +11027,7 @@
               </a:defRPr>
             </a:pPr>
             <a:r>
-              <a:t>Công nghệ cốt lõi: FastAPI OAuth2 • JSON Web Token (JWT) • HTTP-Only Cookie • Bcrypt Password Hashing</a:t>
+              <a:t>Công nghệ cốt lõi: FastAPI OAuth2 • JWT HTTPOnly Cookie • Bcrypt Hash (72 bytes) • Header X-Session-User</a:t>
             </a:r>
           </a:p>
           <a:p>
@@ -10846,7 +11043,7 @@
               </a:defRPr>
             </a:pPr>
             <a:r>
-              <a:t>Nhiệm vụ nghiệp vụ: Xác thực phiên an toàn chống XSS/CSRF, phân quyền RBAC nghiêm ngặt 3 vai trò: Admin (Toàn quyền), Thủ kho kiêm Kế toán (Vận hành kho &amp; Báo cáo Excel) và Nhân viên kho (Tra cứu chỉ đọc).</a:t>
+              <a:t>Nhiệm vụ kiến trúc: Xác thực phiên an toàn chống XSS/CSRF, cô lập phiên làm việc đa tab (Tab Session Isolation) và thực thi phân quyền RBAC 3 vai trò chặt chẽ.</a:t>
             </a:r>
           </a:p>
         </p:txBody>
@@ -10859,8 +11056,8 @@
         </p:nvSpPr>
         <p:spPr>
           <a:xfrm>
-            <a:off x="731520" y="2670048"/>
-            <a:ext cx="164592" cy="1133856"/>
+            <a:off x="731520" y="2679192"/>
+            <a:ext cx="164592" cy="1115568"/>
           </a:xfrm>
           <a:prstGeom prst="rect">
             <a:avLst/>
@@ -10902,8 +11099,8 @@
         </p:nvSpPr>
         <p:spPr>
           <a:xfrm>
-            <a:off x="731520" y="3950208"/>
-            <a:ext cx="10725912" cy="1133856"/>
+            <a:off x="731520" y="3941064"/>
+            <a:ext cx="10725912" cy="1115568"/>
           </a:xfrm>
           <a:prstGeom prst="roundRect">
             <a:avLst/>
@@ -10936,7 +11133,7 @@
           <a:lstStyle/>
           <a:p>
             <a:pPr algn="l">
-              <a:defRPr sz="1550" b="1">
+              <a:defRPr sz="1500" b="1">
                 <a:solidFill>
                   <a:srgbClr val="0F2341"/>
                 </a:solidFill>
@@ -10944,7 +11141,7 @@
               </a:defRPr>
             </a:pPr>
             <a:r>
-              <a:t>3. BUSINESS &amp; AI ENGINE LAYER (TẦNG NGHIỆP VỤ &amp; TRÍ TUỆ NHÂN TẠO)</a:t>
+              <a:t>3. BUSINESS &amp; AI LAYER (TẦNG NGHIỆP VỤ &amp; TRÍ TUỆ NHÂN TẠO)</a:t>
             </a:r>
           </a:p>
           <a:p>
@@ -10952,7 +11149,7 @@
               <a:spcBef>
                 <a:spcPts val="300"/>
               </a:spcBef>
-              <a:defRPr sz="1350" b="1">
+              <a:defRPr sz="1300" b="1">
                 <a:solidFill>
                   <a:srgbClr val="2563EB"/>
                 </a:solidFill>
@@ -10960,7 +11157,7 @@
               </a:defRPr>
             </a:pPr>
             <a:r>
-              <a:t>Công nghệ cốt lõi: Python 3.12 • Uvicorn ASGI • Google Gemini API Client • Local Grounded Fallback Engine</a:t>
+              <a:t>Công nghệ cốt lõi: FastAPI Services • ACID Transactions • Google Gemini API Client • Local Fallback Engine</a:t>
             </a:r>
           </a:p>
           <a:p>
@@ -10976,7 +11173,7 @@
               </a:defRPr>
             </a:pPr>
             <a:r>
-              <a:t>Nhiệm vụ nghiệp vụ: Điều phối chu trình giao dịch kho Master-Detail, tính toán tốc độ Burn-rate 30 ngày, module Data Sanitizer khử 100% giá vốn nhạy cảm và cơ chế tự phục hồi 24/7.</a:t>
+              <a:t>Nhiệm vụ kiến trúc: Thực thi nghiệp vụ xuất nhập Master-Detail, tính toán Burn-rate, lọc sạch giá vốn qua Data Sanitizer và tự động kích hoạt Fallback khi lỗi mạng.</a:t>
             </a:r>
           </a:p>
         </p:txBody>
@@ -10989,8 +11186,8 @@
         </p:nvSpPr>
         <p:spPr>
           <a:xfrm>
-            <a:off x="731520" y="3950208"/>
-            <a:ext cx="164592" cy="1133856"/>
+            <a:off x="731520" y="3941064"/>
+            <a:ext cx="164592" cy="1115568"/>
           </a:xfrm>
           <a:prstGeom prst="rect">
             <a:avLst/>
@@ -11032,8 +11229,8 @@
         </p:nvSpPr>
         <p:spPr>
           <a:xfrm>
-            <a:off x="731520" y="5230368"/>
-            <a:ext cx="10725912" cy="1133856"/>
+            <a:off x="731520" y="5202936"/>
+            <a:ext cx="10725912" cy="1115568"/>
           </a:xfrm>
           <a:prstGeom prst="roundRect">
             <a:avLst/>
@@ -11066,7 +11263,7 @@
           <a:lstStyle/>
           <a:p>
             <a:pPr algn="l">
-              <a:defRPr sz="1550" b="1">
+              <a:defRPr sz="1500" b="1">
                 <a:solidFill>
                   <a:srgbClr val="0A192F"/>
                 </a:solidFill>
@@ -11074,7 +11271,7 @@
               </a:defRPr>
             </a:pPr>
             <a:r>
-              <a:t>4. DATABASE &amp; STORAGE LAYER (TẦNG DỮ LIỆU &amp; BẢO TOÀN ACID)</a:t>
+              <a:t>4. DATABASE LAYER (TẦNG CƠ SỞ DỮ LIỆU &amp; BẢO TOÀN DỮ LIỆU)</a:t>
             </a:r>
           </a:p>
           <a:p>
@@ -11082,7 +11279,7 @@
               <a:spcBef>
                 <a:spcPts val="300"/>
               </a:spcBef>
-              <a:defRPr sz="1350" b="1">
+              <a:defRPr sz="1300" b="1">
                 <a:solidFill>
                   <a:srgbClr val="2563EB"/>
                 </a:solidFill>
@@ -11090,7 +11287,7 @@
               </a:defRPr>
             </a:pPr>
             <a:r>
-              <a:t>Công nghệ cốt lõi: SQLite WAL Mode / MySQL 8.0 InnoDB • SQLAlchemy 2.0 ORM • 8 B-Tree Indexes Chiến Lược</a:t>
+              <a:t>Công nghệ cốt lõi: Dual DB: SQLite WAL (Dev/Test) / PostgreSQL 15 (Prod) • SQLAlchemy 2.0 ORM • 8 B-Tree Indexes</a:t>
             </a:r>
           </a:p>
           <a:p>
@@ -11106,7 +11303,7 @@
               </a:defRPr>
             </a:pPr>
             <a:r>
-              <a:t>Nhiệm vụ nghiệp vụ: Kiểm soát toàn vẹn giao dịch chống tồn âm kép (Atomic SQL Decrement + CheckConstraints/Triggers), ghi sổ Thẻ kho tự động và tối ưu hóa truy vấn báo cáo dưới 5ms.</a:t>
+              <a:t>Nhiệm vụ kiến trúc: Thực thi Atomic SQL Decrement, kiểm soát CheckConstraints cấp CSDL, ghi vết sổ Thẻ kho bất biến và tối ưu truy vấn dưới 5ms.</a:t>
             </a:r>
           </a:p>
         </p:txBody>
@@ -11119,8 +11316,8 @@
         </p:nvSpPr>
         <p:spPr>
           <a:xfrm>
-            <a:off x="731520" y="5230368"/>
-            <a:ext cx="164592" cy="1133856"/>
+            <a:off x="731520" y="5202936"/>
+            <a:ext cx="164592" cy="1115568"/>
           </a:xfrm>
           <a:prstGeom prst="rect">
             <a:avLst/>
@@ -11189,7 +11386,7 @@
         <p:spPr>
           <a:xfrm>
             <a:off x="731520" y="347472"/>
-            <a:ext cx="2286000" cy="347472"/>
+            <a:ext cx="2468880" cy="329184"/>
           </a:xfrm>
           <a:prstGeom prst="roundRect">
             <a:avLst/>
@@ -11222,7 +11419,7 @@
           <a:lstStyle/>
           <a:p>
             <a:pPr algn="ctr">
-              <a:defRPr sz="1200" b="1">
+              <a:defRPr sz="1150" b="1">
                 <a:solidFill>
                   <a:srgbClr val="FFFFFF"/>
                 </a:solidFill>
@@ -11244,7 +11441,7 @@
         <p:spPr>
           <a:xfrm>
             <a:off x="731520" y="713232"/>
-            <a:ext cx="10725912" cy="685800"/>
+            <a:ext cx="10725912" cy="621792"/>
           </a:xfrm>
           <a:prstGeom prst="rect">
             <a:avLst/>
@@ -11266,7 +11463,7 @@
               </a:defRPr>
             </a:pPr>
             <a:r>
-              <a:t>Mô Hình CSDL Chuẩn Hóa 3NF &amp; Tối Ưu Hóa B-Tree Indexes</a:t>
+              <a:t>Thiết Kế CSDL: Mô Hình 11 Bảng Chuẩn Hóa 3NF &amp; Tối Ưu Truy Vấn</a:t>
             </a:r>
           </a:p>
         </p:txBody>
@@ -11313,7 +11510,7 @@
           <a:lstStyle/>
           <a:p>
             <a:pPr algn="l">
-              <a:defRPr sz="1550" b="1">
+              <a:defRPr sz="1500" b="1">
                 <a:solidFill>
                   <a:srgbClr val="1E3A8A"/>
                 </a:solidFill>
@@ -11321,7 +11518,7 @@
               </a:defRPr>
             </a:pPr>
             <a:r>
-              <a:t>📊 10 THỰC THỂ QUAN HỆ CHUẨN HÓA 3NF</a:t>
+              <a:t>📊 11 THỰC THỂ QUAN HỆ CHUẨN HÓA 3NF</a:t>
             </a:r>
           </a:p>
           <a:p>
@@ -11337,7 +11534,7 @@
               </a:defRPr>
             </a:pPr>
             <a:r>
-              <a:t>• nguoi_dung: Quản trị người dùng, phân quyền RBAC 3 vai trò (Admin, Thủ kho kiêm KT, Nhân viên kho).</a:t>
+              <a:t>• nguoi_dung: Quản trị tài khoản, mã hóa Bcrypt, phân quyền RBAC 3 vai trò</a:t>
             </a:r>
           </a:p>
           <a:p>
@@ -11353,7 +11550,7 @@
               </a:defRPr>
             </a:pPr>
             <a:r>
-              <a:t>• hang_hoa &amp; ton_kho: Quan hệ 1-1 chặt chẽ, kiểm soát số dư khả dụng và ngưỡng tồn tối thiểu.</a:t>
+              <a:t>• hang_hoa &amp; ton_kho: Quan hệ 1-1, kiểm soát số dư khả dụng và tồn an toàn</a:t>
             </a:r>
           </a:p>
           <a:p>
@@ -11369,7 +11566,7 @@
               </a:defRPr>
             </a:pPr>
             <a:r>
-              <a:t>• phieu_nhap &amp; chi_tiet: Chứng từ nhập kho Master-Detail, lưu trữ nhà cung cấp và ngày nhập hàng.</a:t>
+              <a:t>• phieu_nhap &amp; chi_tiet: Chứng từ nhập kho Master-Detail, lưu trữ nhà cung cấp</a:t>
             </a:r>
           </a:p>
           <a:p>
@@ -11385,7 +11582,7 @@
               </a:defRPr>
             </a:pPr>
             <a:r>
-              <a:t>• phieu_xuat &amp; chi_tiet: Chứng từ xuất kho Master-Detail, áp dụng Atomic SQL Decrement chống tồn âm.</a:t>
+              <a:t>• phieu_xuat &amp; chi_tiet: Chứng từ xuất kho Master-Detail, liên kết người nhận</a:t>
             </a:r>
           </a:p>
           <a:p>
@@ -11401,7 +11598,7 @@
               </a:defRPr>
             </a:pPr>
             <a:r>
-              <a:t>• the_kho: Sổ cái tự động ghi vết biến động xuất/nhập và tính toán số dư lũy kế tức thời.</a:t>
+              <a:t>• the_kho: Sổ cái ghi vết toàn bộ lịch sử xuất nhập và số dư lũy kế</a:t>
             </a:r>
           </a:p>
           <a:p>
@@ -11417,7 +11614,7 @@
               </a:defRPr>
             </a:pPr>
             <a:r>
-              <a:t>• Danh mục định chuẩn: nhom_hang, don_vi_tinh, nha_cung_cap loại bỏ 100% dữ liệu trùng lặp.</a:t>
+              <a:t>• Danh mục định chuẩn: nhom_hang, don_vi_tinh, nha_cung_cap loại bỏ trùng lặp</a:t>
             </a:r>
           </a:p>
         </p:txBody>
@@ -11464,7 +11661,7 @@
           <a:lstStyle/>
           <a:p>
             <a:pPr algn="l">
-              <a:defRPr sz="1550" b="1">
+              <a:defRPr sz="1500" b="1">
                 <a:solidFill>
                   <a:srgbClr val="2563EB"/>
                 </a:solidFill>
@@ -11472,13 +11669,13 @@
               </a:defRPr>
             </a:pPr>
             <a:r>
-              <a:t>⚡ TỐI ƯU HÓA HIỆU NĂNG &amp; RÀNG BUỘC TOÀN VẸN</a:t>
+              <a:t>⚡ TỐI ƯU HIỆU NĂNG &amp; RÀNG BUỘC TOÀN VẸN</a:t>
             </a:r>
           </a:p>
           <a:p>
             <a:pPr algn="l">
               <a:spcBef>
-                <a:spcPts val="700"/>
+                <a:spcPts val="800"/>
               </a:spcBef>
               <a:defRPr sz="1300">
                 <a:solidFill>
@@ -11488,13 +11685,13 @@
               </a:defRPr>
             </a:pPr>
             <a:r>
-              <a:t>• Tương thích đa cơ sở dữ liệu: Vận hành hoàn hảo trên cả SQLite WAL và MySQL 8.0 InnoDB.</a:t>
+              <a:t>• Kiến trúc CSDL kép: Hỗ trợ SQLite WAL (Dev/Test) và PostgreSQL 15 (Production)</a:t>
             </a:r>
           </a:p>
           <a:p>
             <a:pPr algn="l">
               <a:spcBef>
-                <a:spcPts val="700"/>
+                <a:spcPts val="800"/>
               </a:spcBef>
               <a:defRPr sz="1300">
                 <a:solidFill>
@@ -11504,13 +11701,13 @@
               </a:defRPr>
             </a:pPr>
             <a:r>
-              <a:t>• Kiểm soát khóa ngoại chặt chẽ: Ràng buộc Foreign Key cấp engine ngăn chặn triệt để bản ghi mồ côi.</a:t>
+              <a:t>• Hardware CheckConstraints: SoLuongTon &gt;= 0 và TonSauGiaoDich &gt;= 0</a:t>
             </a:r>
           </a:p>
           <a:p>
             <a:pPr algn="l">
               <a:spcBef>
-                <a:spcPts val="700"/>
+                <a:spcPts val="800"/>
               </a:spcBef>
               <a:defRPr sz="1300">
                 <a:solidFill>
@@ -11520,13 +11717,13 @@
               </a:defRPr>
             </a:pPr>
             <a:r>
-              <a:t>• Hàng đợi Connection Pooling: Chờ giải phóng khóa, triệt tiêu lỗi tranh chấp Database Lock.</a:t>
+              <a:t>• Ràng buộc Foreign Key: Kích hoạt Foreign Keys ON, loại bỏ hoàn toàn dữ liệu mồ côi</a:t>
             </a:r>
           </a:p>
           <a:p>
             <a:pPr algn="l">
               <a:spcBef>
-                <a:spcPts val="700"/>
+                <a:spcPts val="800"/>
               </a:spcBef>
               <a:defRPr sz="1300">
                 <a:solidFill>
@@ -11536,13 +11733,13 @@
               </a:defRPr>
             </a:pPr>
             <a:r>
-              <a:t>• 8 B-Tree Indexes chiến lược: Đánh trên NgayNhap, MaNCC, NgayXuat, MaPN, MaPX, MaHH, MaChungTu.</a:t>
+              <a:t>• 8 B-Tree Indexes: Đánh trên NgayNhap, NgayXuat, MaNCC, MaPN, MaPX, MaHH</a:t>
             </a:r>
           </a:p>
           <a:p>
             <a:pPr algn="l">
               <a:spcBef>
-                <a:spcPts val="700"/>
+                <a:spcPts val="800"/>
               </a:spcBef>
               <a:defRPr sz="1300">
                 <a:solidFill>
@@ -11552,23 +11749,7 @@
               </a:defRPr>
             </a:pPr>
             <a:r>
-              <a:t>• Tốc độ truy vấn siêu tốc: Báo cáo vận hành 30 ngày &amp; tra cứu Thẻ kho phản hồi tức thời &lt; 5ms.</a:t>
-            </a:r>
-          </a:p>
-          <a:p>
-            <a:pPr algn="l">
-              <a:spcBef>
-                <a:spcPts val="700"/>
-              </a:spcBef>
-              <a:defRPr sz="1300">
-                <a:solidFill>
-                  <a:srgbClr val="0F172A"/>
-                </a:solidFill>
-                <a:latin typeface="Segoe UI"/>
-              </a:defRPr>
-            </a:pPr>
-            <a:r>
-              <a:t>• Ràng buộc CheckConstraint: CHECK (SoLuongTon &gt;= 0) trên SQLite &amp; MySQL ngăn chặn 100% can thiệp số âm.</a:t>
+              <a:t>• Hiệu năng tối ưu: Tốc độ phản hồi báo cáo 30 ngày và tra cứu Thẻ kho dưới 5ms</a:t>
             </a:r>
           </a:p>
         </p:txBody>
@@ -11623,7 +11804,7 @@
               </a:defRPr>
             </a:pPr>
             <a:r>
-              <a:t>🔒 BẢO TOÀN CSDL: Tương thích cả SQLite &amp; MySQL 8.0 InnoDB với Check Constraints &amp; Triggers ngăn chặn 100% mọi giao dịch số âm!</a:t>
+              <a:t>🔒 BẢO TOÀN CSDL: Dual-Database (SQLite WAL / PostgreSQL 15) kết hợp CheckConstraints bảo vệ toàn vẹn dữ liệu.</a:t>
             </a:r>
           </a:p>
         </p:txBody>
@@ -11663,7 +11844,7 @@
         <p:spPr>
           <a:xfrm>
             <a:off x="731520" y="347472"/>
-            <a:ext cx="2286000" cy="347472"/>
+            <a:ext cx="2468880" cy="329184"/>
           </a:xfrm>
           <a:prstGeom prst="roundRect">
             <a:avLst/>
@@ -11696,7 +11877,7 @@
           <a:lstStyle/>
           <a:p>
             <a:pPr algn="ctr">
-              <a:defRPr sz="1200" b="1">
+              <a:defRPr sz="1150" b="1">
                 <a:solidFill>
                   <a:srgbClr val="FFFFFF"/>
                 </a:solidFill>
@@ -11718,7 +11899,7 @@
         <p:spPr>
           <a:xfrm>
             <a:off x="731520" y="713232"/>
-            <a:ext cx="10725912" cy="685800"/>
+            <a:ext cx="10725912" cy="621792"/>
           </a:xfrm>
           <a:prstGeom prst="rect">
             <a:avLst/>
@@ -11740,7 +11921,7 @@
               </a:defRPr>
             </a:pPr>
             <a:r>
-              <a:t>Giải Pháp Kỹ Thuật 1: Atomic SQL Decrement Triệt Tiêu Race Condition</a:t>
+              <a:t>Kỹ Thuật Cốt Lõi 1: Atomic SQL Decrement Triệt Tiêu Race Condition</a:t>
             </a:r>
           </a:p>
         </p:txBody>
@@ -11787,7 +11968,7 @@
           <a:lstStyle/>
           <a:p>
             <a:pPr algn="l">
-              <a:defRPr sz="1500" b="1">
+              <a:defRPr sz="1450" b="1">
                 <a:solidFill>
                   <a:srgbClr val="E11D48"/>
                 </a:solidFill>
@@ -11795,13 +11976,13 @@
               </a:defRPr>
             </a:pPr>
             <a:r>
-              <a:t>❌ CÁCH LÀM CŨ: TRỪ TRONG BỘ NHỚ PYTHON</a:t>
+              <a:t>❌ CÁCH TIẾP CẬN CŨ: TRỪ TỒN KHO TRONG ỨNG DỤNG</a:t>
             </a:r>
           </a:p>
           <a:p>
             <a:pPr algn="l">
               <a:spcBef>
-                <a:spcPts val="700"/>
+                <a:spcPts val="800"/>
               </a:spcBef>
               <a:defRPr sz="1300">
                 <a:solidFill>
@@ -11811,13 +11992,13 @@
               </a:defRPr>
             </a:pPr>
             <a:r>
-              <a:t>1. Đọc số tồn kho vào biến Python: `ton = select()` (Ví dụ số dư là: 10)</a:t>
+              <a:t>• Bước 1: Ứng dụng đọc số tồn vào bộ nhớ Python (ton = select())</a:t>
             </a:r>
           </a:p>
           <a:p>
             <a:pPr algn="l">
               <a:spcBef>
-                <a:spcPts val="700"/>
+                <a:spcPts val="800"/>
               </a:spcBef>
               <a:defRPr sz="1300">
                 <a:solidFill>
@@ -11827,13 +12008,13 @@
               </a:defRPr>
             </a:pPr>
             <a:r>
-              <a:t>2. Hai luồng đồng thời (Luồng A và Luồng B) cùng đọc số dư ban đầu là 10</a:t>
+              <a:t>• Bước 2: Hai luồng đọc cùng số dư khả dụng (ví dụ tồn hiện thời = 10)</a:t>
             </a:r>
           </a:p>
           <a:p>
             <a:pPr algn="l">
               <a:spcBef>
-                <a:spcPts val="700"/>
+                <a:spcPts val="800"/>
               </a:spcBef>
               <a:defRPr sz="1300">
                 <a:solidFill>
@@ -11843,13 +12024,13 @@
               </a:defRPr>
             </a:pPr>
             <a:r>
-              <a:t>3. Luồng A trừ 8 còn 2; Luồng B đồng thời trừ 8 cũng tính ra còn 2</a:t>
+              <a:t>• Bước 3: Cả hai luồng cùng trừ trong bộ nhớ và ghi đè vào CSDL (Lost Update)</a:t>
             </a:r>
           </a:p>
           <a:p>
             <a:pPr algn="l">
               <a:spcBef>
-                <a:spcPts val="700"/>
+                <a:spcPts val="800"/>
               </a:spcBef>
               <a:defRPr sz="1300">
                 <a:solidFill>
@@ -11859,23 +12040,7 @@
               </a:defRPr>
             </a:pPr>
             <a:r>
-              <a:t>4. Cả 2 luồng ghi đè số 2 vào CSDL (Hiện tượng Lost Update kinh điển)</a:t>
-            </a:r>
-          </a:p>
-          <a:p>
-            <a:pPr algn="l">
-              <a:spcBef>
-                <a:spcPts val="700"/>
-              </a:spcBef>
-              <a:defRPr sz="1300">
-                <a:solidFill>
-                  <a:srgbClr val="0F172A"/>
-                </a:solidFill>
-                <a:latin typeface="Segoe UI"/>
-              </a:defRPr>
-            </a:pPr>
-            <a:r>
-              <a:t>HẬU QUẢ: Kho xuất mất 16 món dù thực tế chỉ có 10! Tồn kho bị âm ngoài đời thực, gây thất thoát tài sản nghiêm trọng.</a:t>
+              <a:t>• HẬU QUẢ: Xuất vượt số lượng thực tế, gây tồn âm và sai lệch sổ sách kế toán</a:t>
             </a:r>
           </a:p>
         </p:txBody>
@@ -11922,7 +12087,7 @@
           <a:lstStyle/>
           <a:p>
             <a:pPr algn="l">
-              <a:defRPr sz="1500" b="1">
+              <a:defRPr sz="1450" b="1">
                 <a:solidFill>
                   <a:srgbClr val="10B981"/>
                 </a:solidFill>
@@ -11946,7 +12111,7 @@
               </a:defRPr>
             </a:pPr>
             <a:r>
-              <a:t>1. Đẩy câu lệnh trừ nguyên tử có điều kiện trực tiếp xuống SQL Engine</a:t>
+              <a:t>• Đẩy câu lệnh UPDATE có điều kiện trực tiếp xuống Database Engine</a:t>
             </a:r>
           </a:p>
           <a:p>
@@ -11962,7 +12127,7 @@
               </a:defRPr>
             </a:pPr>
             <a:r>
-              <a:t>2. Thêm mệnh đề kiểm soát khóa: `WHERE SoLuongTon &gt;= :qty`</a:t>
+              <a:t>• Mệnh đề bảo vệ nguyên tử: WHERE SoLuongTon &gt;= :so_luong_xuat</a:t>
             </a:r>
           </a:p>
           <a:p>
@@ -11978,7 +12143,7 @@
               </a:defRPr>
             </a:pPr>
             <a:r>
-              <a:t>3. SQL Engine kiểm tra và trừ tồn trong đúng một thao tác nguyên tử duy nhất</a:t>
+              <a:t>• Database Engine thực thi kiểm tra và cập nhật trong 1 thao tác duy nhất</a:t>
             </a:r>
           </a:p>
           <a:p>
@@ -11994,7 +12159,7 @@
               </a:defRPr>
             </a:pPr>
             <a:r>
-              <a:t>4. Nếu số dư không đủ: `rowcount == 0` -&gt; Kích hoạt Rollback toàn bộ CSDL</a:t>
+              <a:t>• Nếu hàng không đủ: rowcount == 0 -&gt; Kích hoạt Rollback toàn bộ và trả HTTP 400</a:t>
             </a:r>
           </a:p>
           <a:p>
@@ -12010,7 +12175,7 @@
               </a:defRPr>
             </a:pPr>
             <a:r>
-              <a:t>KẾT QUẢ: Loại bỏ 100% Race Condition, không bao giờ xuất khống, kiểm soát đồng thời tuyệt đối ngay cả khi stress test đa luồng!</a:t>
+              <a:t>• KẾT QUẢ: Triệt tiêu 100% Race Condition, bảo đảm nguyên tắc Zero Negative Stock</a:t>
             </a:r>
           </a:p>
         </p:txBody>
@@ -12057,7 +12222,7 @@
           <a:lstStyle/>
           <a:p>
             <a:pPr algn="ctr">
-              <a:defRPr sz="1300" b="1">
+              <a:defRPr sz="1200" b="1">
                 <a:solidFill>
                   <a:srgbClr val="06B6D4"/>
                 </a:solidFill>
@@ -12065,7 +12230,7 @@
               </a:defRPr>
             </a:pPr>
             <a:r>
-              <a:t>SQL NGUYÊN TỬ: UPDATE ton_kho SET SoLuongTon = SoLuongTon - :qty WHERE MaHH = :ma_hh AND SoLuongTon &gt;= :qty;</a:t>
+              <a:t>UPDATE ton_kho SET SoLuongTon = SoLuongTon - :so_luong_xuat, CapNhatCuoi = :now WHERE MaHH = :ma_hh AND SoLuongTon &gt;= :so_luong_xuat;</a:t>
             </a:r>
           </a:p>
         </p:txBody>
@@ -12105,7 +12270,7 @@
         <p:spPr>
           <a:xfrm>
             <a:off x="731520" y="347472"/>
-            <a:ext cx="2286000" cy="347472"/>
+            <a:ext cx="2468880" cy="329184"/>
           </a:xfrm>
           <a:prstGeom prst="roundRect">
             <a:avLst/>
@@ -12138,7 +12303,7 @@
           <a:lstStyle/>
           <a:p>
             <a:pPr algn="ctr">
-              <a:defRPr sz="1200" b="1">
+              <a:defRPr sz="1150" b="1">
                 <a:solidFill>
                   <a:srgbClr val="FFFFFF"/>
                 </a:solidFill>
@@ -12160,7 +12325,7 @@
         <p:spPr>
           <a:xfrm>
             <a:off x="731520" y="713232"/>
-            <a:ext cx="10725912" cy="685800"/>
+            <a:ext cx="10725912" cy="621792"/>
           </a:xfrm>
           <a:prstGeom prst="rect">
             <a:avLst/>
@@ -12182,7 +12347,7 @@
               </a:defRPr>
             </a:pPr>
             <a:r>
-              <a:t>Quy Trình Giao Dịch Kho ACID &amp; Ma Trận Phân Quyền RBAC</a:t>
+              <a:t>Kỹ Thuật Cốt Lõi 2: Quy Trình Giao Dịch ACID &amp; Phân Quyền RBAC</a:t>
             </a:r>
           </a:p>
         </p:txBody>
@@ -12245,7 +12410,7 @@
               <a:spcBef>
                 <a:spcPts val="400"/>
               </a:spcBef>
-              <a:defRPr sz="1350" b="1">
+              <a:defRPr sz="1300" b="1">
                 <a:solidFill>
                   <a:srgbClr val="2563EB"/>
                 </a:solidFill>
@@ -12253,7 +12418,7 @@
               </a:defRPr>
             </a:pPr>
             <a:r>
-              <a:t>[1. Tạo Master Chứng Từ] ➔ [2. Lưu Detail Hàng Hóa] ➔ [3. Atomic SQL Update Tồn Kho] ➔ [4. Ghi Sổ Thẻ Kho]</a:t>
+              <a:t>[1. Khởi tạo Master Chứng từ] ➔ [2. Ghi nhận Detail SKU] ➔ [3. Atomic Decrement Tồn kho] ➔ [4. Ghi Sổ Thẻ kho lũy kế]</a:t>
             </a:r>
           </a:p>
           <a:p>
@@ -12269,7 +12434,7 @@
               </a:defRPr>
             </a:pPr>
             <a:r>
-              <a:t>Nguyên tắc Toàn Vẹn: Bất kỳ bước nào phát sinh lỗi, toàn bộ giao dịch tự động Rollback về trạng thái ban đầu!</a:t>
+              <a:t>Nguyên tắc All-or-Nothing: Bất kỳ bước nào không hợp lệ, toàn bộ giao dịch được Rollback ngay lập tức.</a:t>
             </a:r>
           </a:p>
         </p:txBody>
@@ -12411,7 +12576,7 @@
                         </a:defRPr>
                       </a:pPr>
                       <a:r>
-                        <a:t>Quản trị người dùng &amp; Phân quyền</a:t>
+                        <a:t>Quản trị tài khoản &amp; Cấu hình hệ thống</a:t>
                       </a:r>
                     </a:p>
                   </a:txBody>
@@ -12435,7 +12600,7 @@
                         </a:defRPr>
                       </a:pPr>
                       <a:r>
-                        <a:t>✅ Toàn Quyền Quản Trị</a:t>
+                        <a:t>✅ Toàn quyền quản trị</a:t>
                       </a:r>
                     </a:p>
                   </a:txBody>
@@ -12509,7 +12674,7 @@
                         </a:defRPr>
                       </a:pPr>
                       <a:r>
-                        <a:t>Quản trị SKU &amp; Nhà cung cấp</a:t>
+                        <a:t>Quản lý danh mục SKU &amp; Nhà cung cấp</a:t>
                       </a:r>
                     </a:p>
                   </a:txBody>
@@ -12533,7 +12698,7 @@
                         </a:defRPr>
                       </a:pPr>
                       <a:r>
-                        <a:t>✅ Cho phép thực hiện</a:t>
+                        <a:t>✅ Toàn quyền quản lý</a:t>
                       </a:r>
                     </a:p>
                   </a:txBody>
@@ -12581,7 +12746,7 @@
                         </a:defRPr>
                       </a:pPr>
                       <a:r>
-                        <a:t>❌ Chế độ Chỉ Đọc (Staff)</a:t>
+                        <a:t>❌ Chế độ chỉ đọc (Read-only)</a:t>
                       </a:r>
                     </a:p>
                   </a:txBody>
@@ -12607,7 +12772,7 @@
                         </a:defRPr>
                       </a:pPr>
                       <a:r>
-                        <a:t>Lập Phiếu Nhập / Xuất Kho ACID</a:t>
+                        <a:t>Lập phiếu Nhập / Xuất kho ACID</a:t>
                       </a:r>
                     </a:p>
                   </a:txBody>
@@ -12679,7 +12844,7 @@
                         </a:defRPr>
                       </a:pPr>
                       <a:r>
-                        <a:t>❌ Bị chặn (HTTP 403)</a:t>
+                        <a:t>❌ Bị chặn (HTTP 403 / Redirect)</a:t>
                       </a:r>
                     </a:p>
                   </a:txBody>
@@ -12705,7 +12870,7 @@
                         </a:defRPr>
                       </a:pPr>
                       <a:r>
-                        <a:t>Xuất Báo Cáo Kế Toán Excel</a:t>
+                        <a:t>Xuất báo cáo tài chính kế toán Excel</a:t>
                       </a:r>
                     </a:p>
                   </a:txBody>
@@ -12753,7 +12918,7 @@
                         </a:defRPr>
                       </a:pPr>
                       <a:r>
-                        <a:t>✅ Xuất báo cáo kế toán</a:t>
+                        <a:t>✅ Xuất báo cáo Excel</a:t>
                       </a:r>
                     </a:p>
                   </a:txBody>
@@ -12803,7 +12968,7 @@
                         </a:defRPr>
                       </a:pPr>
                       <a:r>
-                        <a:t>Tra cứu Thẻ kho &amp; Cảnh báo tồn</a:t>
+                        <a:t>Tra cứu Tồn kho &amp; Sổ Thẻ kho lũy kế</a:t>
                       </a:r>
                     </a:p>
                   </a:txBody>
@@ -12875,7 +13040,7 @@
                         </a:defRPr>
                       </a:pPr>
                       <a:r>
-                        <a:t>✅ Tra cứu kiểm đếm kho</a:t>
+                        <a:t>✅ Tra cứu kiểm đếm hiện trường</a:t>
                       </a:r>
                     </a:p>
                   </a:txBody>
@@ -12925,7 +13090,7 @@
         <p:spPr>
           <a:xfrm>
             <a:off x="731520" y="347472"/>
-            <a:ext cx="2286000" cy="347472"/>
+            <a:ext cx="2468880" cy="329184"/>
           </a:xfrm>
           <a:prstGeom prst="roundRect">
             <a:avLst/>
@@ -12958,7 +13123,7 @@
           <a:lstStyle/>
           <a:p>
             <a:pPr algn="ctr">
-              <a:defRPr sz="1200" b="1">
+              <a:defRPr sz="1150" b="1">
                 <a:solidFill>
                   <a:srgbClr val="FFFFFF"/>
                 </a:solidFill>
@@ -12980,7 +13145,7 @@
         <p:spPr>
           <a:xfrm>
             <a:off x="731520" y="713232"/>
-            <a:ext cx="10725912" cy="685800"/>
+            <a:ext cx="10725912" cy="621792"/>
           </a:xfrm>
           <a:prstGeom prst="rect">
             <a:avLst/>
@@ -13002,7 +13167,7 @@
               </a:defRPr>
             </a:pPr>
             <a:r>
-              <a:t>Tích Hợp AI 1: Data Sanitizer Khử Nhạy Cảm 100% Giá Vốn</a:t>
+              <a:t>Tích Hợp AI 1: Module Data Sanitizer Khử Nhạy Cảm Dữ Liệu</a:t>
             </a:r>
           </a:p>
         </p:txBody>
@@ -13016,7 +13181,7 @@
         <p:spPr>
           <a:xfrm>
             <a:off x="731520" y="1417320"/>
-            <a:ext cx="3364992" cy="1143000"/>
+            <a:ext cx="3364992" cy="1115568"/>
           </a:xfrm>
           <a:prstGeom prst="roundRect">
             <a:avLst/>
@@ -13045,11 +13210,11 @@
           </a:fontRef>
         </p:style>
         <p:txBody>
-          <a:bodyPr rtlCol="0" anchor="ctr" wrap="square" tIns="128016"/>
+          <a:bodyPr rtlCol="0" anchor="ctr" wrap="square" tIns="109728"/>
           <a:lstStyle/>
           <a:p>
             <a:pPr algn="ctr">
-              <a:defRPr sz="1350" b="1">
+              <a:defRPr sz="1300" b="1">
                 <a:solidFill>
                   <a:srgbClr val="0F2341"/>
                 </a:solidFill>
@@ -13065,7 +13230,7 @@
               <a:spcBef>
                 <a:spcPts val="300"/>
               </a:spcBef>
-              <a:defRPr sz="1200">
+              <a:defRPr sz="1150">
                 <a:solidFill>
                   <a:srgbClr val="0F172A"/>
                 </a:solidFill>
@@ -13073,11 +13238,11 @@
               </a:defRPr>
             </a:pPr>
             <a:r>
-              <a:t>Chứa đầy đủ đơn giá nhập, giá vốn,</a:t>
+              <a:t>Chứa đơn giá nhập, giá vốn,</a:t>
             </a:r>
             <a:br/>
             <a:r>
-              <a:t>thành tiền &amp; chiết khấu nhà cung cấp</a:t>
+              <a:t>thành tiền và chiết khấu nhà cung cấp</a:t>
             </a:r>
           </a:p>
         </p:txBody>
@@ -13091,7 +13256,7 @@
         <p:spPr>
           <a:xfrm>
             <a:off x="4416552" y="1417320"/>
-            <a:ext cx="3364992" cy="1143000"/>
+            <a:ext cx="3364992" cy="1115568"/>
           </a:xfrm>
           <a:prstGeom prst="roundRect">
             <a:avLst/>
@@ -13120,11 +13285,11 @@
           </a:fontRef>
         </p:style>
         <p:txBody>
-          <a:bodyPr rtlCol="0" anchor="ctr" wrap="square" tIns="128016"/>
+          <a:bodyPr rtlCol="0" anchor="ctr" wrap="square" tIns="109728"/>
           <a:lstStyle/>
           <a:p>
             <a:pPr algn="ctr">
-              <a:defRPr sz="1350" b="1">
+              <a:defRPr sz="1300" b="1">
                 <a:solidFill>
                   <a:srgbClr val="2563EB"/>
                 </a:solidFill>
@@ -13140,7 +13305,7 @@
               <a:spcBef>
                 <a:spcPts val="300"/>
               </a:spcBef>
-              <a:defRPr sz="1200">
+              <a:defRPr sz="1150">
                 <a:solidFill>
                   <a:srgbClr val="0F172A"/>
                 </a:solidFill>
@@ -13148,11 +13313,11 @@
               </a:defRPr>
             </a:pPr>
             <a:r>
-              <a:t>Thuật toán khử nhạy cảm đệ quy</a:t>
+              <a:t>Thuật toán lọc đệ quy loại bỏ 100%</a:t>
             </a:r>
             <a:br/>
             <a:r>
-              <a:t>loại bỏ 100% các trường tài chính bí mật</a:t>
+              <a:t>các trường tài chính nhạy cảm</a:t>
             </a:r>
           </a:p>
         </p:txBody>
@@ -13166,7 +13331,7 @@
         <p:spPr>
           <a:xfrm>
             <a:off x="8101584" y="1417320"/>
-            <a:ext cx="3364992" cy="1143000"/>
+            <a:ext cx="3364992" cy="1115568"/>
           </a:xfrm>
           <a:prstGeom prst="roundRect">
             <a:avLst/>
@@ -13195,11 +13360,11 @@
           </a:fontRef>
         </p:style>
         <p:txBody>
-          <a:bodyPr rtlCol="0" anchor="ctr" wrap="square" tIns="128016"/>
+          <a:bodyPr rtlCol="0" anchor="ctr" wrap="square" tIns="109728"/>
           <a:lstStyle/>
           <a:p>
             <a:pPr algn="ctr">
-              <a:defRPr sz="1350" b="1">
+              <a:defRPr sz="1300" b="1">
                 <a:solidFill>
                   <a:srgbClr val="06B6D4"/>
                 </a:solidFill>
@@ -13207,7 +13372,7 @@
               </a:defRPr>
             </a:pPr>
             <a:r>
-              <a:t>3. CONTEXT GỬI TỚI AI</a:t>
+              <a:t>3. SANITIZED CONTEXT CHO AI</a:t>
             </a:r>
           </a:p>
           <a:p>
@@ -13215,7 +13380,7 @@
               <a:spcBef>
                 <a:spcPts val="300"/>
               </a:spcBef>
-              <a:defRPr sz="1200">
+              <a:defRPr sz="1150">
                 <a:solidFill>
                   <a:srgbClr val="0F172A"/>
                 </a:solidFill>
@@ -13227,7 +13392,7 @@
             </a:r>
             <a:br/>
             <a:r>
-              <a:t>tốc độ Burn-rate &amp; số ngày không xuất</a:t>
+              <a:t>tốc độ Burn-rate &amp; số ngày lưu kho</a:t>
             </a:r>
           </a:p>
         </p:txBody>
@@ -13240,8 +13405,8 @@
         </p:nvSpPr>
         <p:spPr>
           <a:xfrm>
-            <a:off x="731520" y="2788920"/>
-            <a:ext cx="5212080" cy="3657600"/>
+            <a:off x="731520" y="2743200"/>
+            <a:ext cx="5212080" cy="3749039"/>
           </a:xfrm>
           <a:prstGeom prst="roundRect">
             <a:avLst/>
@@ -13274,7 +13439,7 @@
           <a:lstStyle/>
           <a:p>
             <a:pPr algn="l">
-              <a:defRPr sz="1500" b="1">
+              <a:defRPr sz="1450" b="1">
                 <a:solidFill>
                   <a:srgbClr val="E11D48"/>
                 </a:solidFill>
@@ -13282,7 +13447,7 @@
               </a:defRPr>
             </a:pPr>
             <a:r>
-              <a:t>❌ DỮ LIỆU TÀI CHÍNH BỊ LOẠI BỎ TRIỆT ĐỂ (100%)</a:t>
+              <a:t>❌ DỮ LIỆU TÀI CHÍNH BỊ LOẠI BỎ TRIỆT ĐỂ</a:t>
             </a:r>
           </a:p>
           <a:p>
@@ -13298,7 +13463,7 @@
               </a:defRPr>
             </a:pPr>
             <a:r>
-              <a:t>• Đơn giá nhập (`dongianhap`, `import_price`): Khử sạch 100%</a:t>
+              <a:t>• Đơn giá nhập (DonGiaNhap, dongianhap, import_price): Khử sạch 100%</a:t>
             </a:r>
           </a:p>
           <a:p>
@@ -13314,7 +13479,7 @@
               </a:defRPr>
             </a:pPr>
             <a:r>
-              <a:t>• Thành tiền chi tiết (`thanhtien`): Khử sạch 100%</a:t>
+              <a:t>• Thành tiền chi tiết (ThanhTien, thanhtien, total_amount): Khử sạch 100%</a:t>
             </a:r>
           </a:p>
           <a:p>
@@ -13330,7 +13495,7 @@
               </a:defRPr>
             </a:pPr>
             <a:r>
-              <a:t>• Giá vốn bình quân (`gia_von`): Khử sạch 100%</a:t>
+              <a:t>• Giá vốn bình quân (GiaVon, gia_von, cost_price): Khử sạch 100%</a:t>
             </a:r>
           </a:p>
           <a:p>
@@ -13346,7 +13511,7 @@
               </a:defRPr>
             </a:pPr>
             <a:r>
-              <a:t>• Tỷ lệ chiết khấu &amp; chính sách giá nhà cung cấp: Xóa bỏ</a:t>
+              <a:t>• Tỷ lệ chiết khấu và chính sách giá mua từ nhà cung cấp: Loại bỏ hoàn toàn</a:t>
             </a:r>
           </a:p>
           <a:p>
@@ -13362,7 +13527,7 @@
               </a:defRPr>
             </a:pPr>
             <a:r>
-              <a:t>• CAM KẾT: Không một byte dữ liệu tài chính nào rời khỏi máy chủ nội bộ sang bên thứ ba!</a:t>
+              <a:t>• Bảo đảm tuyệt đối bí mật kinh doanh khi sử dụng Public Cloud LLM</a:t>
             </a:r>
           </a:p>
         </p:txBody>
@@ -13375,8 +13540,8 @@
         </p:nvSpPr>
         <p:spPr>
           <a:xfrm>
-            <a:off x="6245352" y="2788920"/>
-            <a:ext cx="5212080" cy="3657600"/>
+            <a:off x="6245352" y="2743200"/>
+            <a:ext cx="5212080" cy="3749039"/>
           </a:xfrm>
           <a:prstGeom prst="roundRect">
             <a:avLst/>
@@ -13409,7 +13574,7 @@
           <a:lstStyle/>
           <a:p>
             <a:pPr algn="l">
-              <a:defRPr sz="1500" b="1">
+              <a:defRPr sz="1450" b="1">
                 <a:solidFill>
                   <a:srgbClr val="10B981"/>
                 </a:solidFill>
@@ -13433,7 +13598,7 @@
               </a:defRPr>
             </a:pPr>
             <a:r>
-              <a:t>• Mã hàng (`MaHH`), Tên hàng (`TenHH`), Đơn vị tính (`DVT`)</a:t>
+              <a:t>• Mã hàng (MaHH), Tên hàng (TenHH), Đơn vị tính (DVT)</a:t>
             </a:r>
           </a:p>
           <a:p>
@@ -13449,7 +13614,7 @@
               </a:defRPr>
             </a:pPr>
             <a:r>
-              <a:t>• Số lượng tồn kho thực tế &amp; Ngưỡng tồn an toàn tối thiểu</a:t>
+              <a:t>• Số lượng tồn kho thực tế và Định mức tồn an toàn tối thiểu (TonToiThieu)</a:t>
             </a:r>
           </a:p>
           <a:p>
@@ -13465,7 +13630,7 @@
               </a:defRPr>
             </a:pPr>
             <a:r>
-              <a:t>• Tốc độ xuất bình quân 30 ngày (Burn-rate số lượng / ngày)</a:t>
+              <a:t>• Tốc độ xuất kho bình quân ngày (Burn-rate số lượng / ngày trong 30 ngày)</a:t>
             </a:r>
           </a:p>
           <a:p>
@@ -13481,7 +13646,7 @@
               </a:defRPr>
             </a:pPr>
             <a:r>
-              <a:t>• Số ngày không phát sinh phiếu xuất (Dead stock metric)</a:t>
+              <a:t>• Số ngày không phát sinh phiếu xuất (Dead Stock metric)</a:t>
             </a:r>
           </a:p>
           <a:p>
@@ -13497,7 +13662,7 @@
               </a:defRPr>
             </a:pPr>
             <a:r>
-              <a:t>• MINH BẠCH: Thanh tra trực tiếp payload qua API `/api/v1/ai/raw-context` bất kỳ lúc nào.</a:t>
+              <a:t>• Endpoint kiểm toán minh bạch: GET /api/v1/ai/raw-context</a:t>
             </a:r>
           </a:p>
         </p:txBody>
@@ -13537,7 +13702,7 @@
         <p:spPr>
           <a:xfrm>
             <a:off x="731520" y="347472"/>
-            <a:ext cx="2286000" cy="347472"/>
+            <a:ext cx="2468880" cy="329184"/>
           </a:xfrm>
           <a:prstGeom prst="roundRect">
             <a:avLst/>
@@ -13570,7 +13735,7 @@
           <a:lstStyle/>
           <a:p>
             <a:pPr algn="ctr">
-              <a:defRPr sz="1200" b="1">
+              <a:defRPr sz="1150" b="1">
                 <a:solidFill>
                   <a:srgbClr val="FFFFFF"/>
                 </a:solidFill>
@@ -13592,7 +13757,7 @@
         <p:spPr>
           <a:xfrm>
             <a:off x="731520" y="713232"/>
-            <a:ext cx="10725912" cy="685800"/>
+            <a:ext cx="10725912" cy="621792"/>
           </a:xfrm>
           <a:prstGeom prst="rect">
             <a:avLst/>
@@ -13614,7 +13779,7 @@
               </a:defRPr>
             </a:pPr>
             <a:r>
-              <a:t>Tích Hợp AI 2: Prompt Chống Ảo Giác &amp; Báo Cáo Điều Hành 3 Phần</a:t>
+              <a:t>Tích Hợp AI 2: Kỹ Thuật Prompt Chống Ảo Giác &amp; Báo Cáo 3 Phần</a:t>
             </a:r>
           </a:p>
         </p:txBody>
@@ -13628,7 +13793,7 @@
         <p:spPr>
           <a:xfrm>
             <a:off x="731520" y="1417320"/>
-            <a:ext cx="5212080" cy="4846320"/>
+            <a:ext cx="5212080" cy="4892040"/>
           </a:xfrm>
           <a:prstGeom prst="roundRect">
             <a:avLst/>
@@ -13661,7 +13826,7 @@
           <a:lstStyle/>
           <a:p>
             <a:pPr algn="l">
-              <a:defRPr sz="1500" b="1">
+              <a:defRPr sz="1450" b="1">
                 <a:solidFill>
                   <a:srgbClr val="1E3A8A"/>
                 </a:solidFill>
@@ -13677,7 +13842,7 @@
               <a:spcBef>
                 <a:spcPts val="500"/>
               </a:spcBef>
-              <a:defRPr sz="1300">
+              <a:defRPr sz="1250">
                 <a:solidFill>
                   <a:srgbClr val="0F172A"/>
                 </a:solidFill>
@@ -13685,7 +13850,7 @@
               </a:defRPr>
             </a:pPr>
             <a:r>
-              <a:t>1. System Instruction Ràng Buộc Bất Biến:</a:t>
+              <a:t>1. System Instruction Đóng Khung Chuyên Môn:</a:t>
             </a:r>
           </a:p>
           <a:p>
@@ -13693,7 +13858,7 @@
               <a:spcBef>
                 <a:spcPts val="500"/>
               </a:spcBef>
-              <a:defRPr sz="1300">
+              <a:defRPr sz="1250">
                 <a:solidFill>
                   <a:srgbClr val="0F172A"/>
                 </a:solidFill>
@@ -13701,7 +13866,7 @@
               </a:defRPr>
             </a:pPr>
             <a:r>
-              <a:t>   Chỉ phân tích dựa trên dữ liệu JSON thực tế được cung cấp</a:t>
+              <a:t>   Định hình AI đóng vai trò Chuyên gia Điều phối Kho vận</a:t>
             </a:r>
           </a:p>
           <a:p>
@@ -13709,7 +13874,7 @@
               <a:spcBef>
                 <a:spcPts val="500"/>
               </a:spcBef>
-              <a:defRPr sz="1300">
+              <a:defRPr sz="1250">
                 <a:solidFill>
                   <a:srgbClr val="0F172A"/>
                 </a:solidFill>
@@ -13717,7 +13882,7 @@
               </a:defRPr>
             </a:pPr>
             <a:r>
-              <a:t>   Tuyệt đối KHÔNG tự bịa mã SKU, tên hàng hay số liệu kho</a:t>
+              <a:t>   Ràng buộc bất biến: Chỉ lập luận trên dữ liệu JSON thực tế được cấp</a:t>
             </a:r>
           </a:p>
           <a:p>
@@ -13725,7 +13890,7 @@
               <a:spcBef>
                 <a:spcPts val="500"/>
               </a:spcBef>
-              <a:defRPr sz="1300">
+              <a:defRPr sz="1250">
                 <a:solidFill>
                   <a:srgbClr val="0F172A"/>
                 </a:solidFill>
@@ -13733,7 +13898,7 @@
               </a:defRPr>
             </a:pPr>
             <a:r>
-              <a:t>2. Cơ Chế Xử Lý Kho Rỗng (Empty Inventory):</a:t>
+              <a:t>2. Nguyên Tắc Trung Thực Số Liệu:</a:t>
             </a:r>
           </a:p>
           <a:p>
@@ -13741,7 +13906,7 @@
               <a:spcBef>
                 <a:spcPts val="500"/>
               </a:spcBef>
-              <a:defRPr sz="1300">
+              <a:defRPr sz="1250">
                 <a:solidFill>
                   <a:srgbClr val="0F172A"/>
                 </a:solidFill>
@@ -13749,7 +13914,7 @@
               </a:defRPr>
             </a:pPr>
             <a:r>
-              <a:t>   Thông báo rõ: 'Chưa ghi nhận giao dịch hợp lệ trong kỳ'</a:t>
+              <a:t>   Nghiêm cấm tự sinh mã SKU, tên hàng hoặc số liệu không có trong context</a:t>
             </a:r>
           </a:p>
           <a:p>
@@ -13757,7 +13922,7 @@
               <a:spcBef>
                 <a:spcPts val="500"/>
               </a:spcBef>
-              <a:defRPr sz="1300">
+              <a:defRPr sz="1250">
                 <a:solidFill>
                   <a:srgbClr val="0F172A"/>
                 </a:solidFill>
@@ -13765,7 +13930,7 @@
               </a:defRPr>
             </a:pPr>
             <a:r>
-              <a:t>   Tuyệt đối không phỏng đoán hay tự sinh dữ liệu giả</a:t>
+              <a:t>   Xử lý biên trường hợp kho rỗng: 'Chưa ghi nhận giao dịch trong kỳ'</a:t>
             </a:r>
           </a:p>
           <a:p>
@@ -13773,7 +13938,7 @@
               <a:spcBef>
                 <a:spcPts val="500"/>
               </a:spcBef>
-              <a:defRPr sz="1300">
+              <a:defRPr sz="1250">
                 <a:solidFill>
                   <a:srgbClr val="0F172A"/>
                 </a:solidFill>
@@ -13789,7 +13954,7 @@
               <a:spcBef>
                 <a:spcPts val="500"/>
               </a:spcBef>
-              <a:defRPr sz="1300">
+              <a:defRPr sz="1250">
                 <a:solidFill>
                   <a:srgbClr val="0F172A"/>
                 </a:solidFill>
@@ -13797,7 +13962,7 @@
               </a:defRPr>
             </a:pPr>
             <a:r>
-              <a:t>   Ép định dạng JSON/Markdown phân tầng tường minh</a:t>
+              <a:t>   Ép chuẩn định dạng Markdown/JSON phân tầng tường minh</a:t>
             </a:r>
           </a:p>
           <a:p>
@@ -13805,7 +13970,7 @@
               <a:spcBef>
                 <a:spcPts val="500"/>
               </a:spcBef>
-              <a:defRPr sz="1300">
+              <a:defRPr sz="1250">
                 <a:solidFill>
                   <a:srgbClr val="0F172A"/>
                 </a:solidFill>
@@ -13813,7 +13978,7 @@
               </a:defRPr>
             </a:pPr>
             <a:r>
-              <a:t>   Dễ dàng phân rã hiển thị lên Dashboard Widget trực tiếp</a:t>
+              <a:t>   Phân tích cú pháp tự động để hiển thị trực tiếp lên Dashboard Widget</a:t>
             </a:r>
           </a:p>
         </p:txBody>
@@ -13827,7 +13992,7 @@
         <p:spPr>
           <a:xfrm>
             <a:off x="6245352" y="1417320"/>
-            <a:ext cx="5212080" cy="4846320"/>
+            <a:ext cx="5212080" cy="4892040"/>
           </a:xfrm>
           <a:prstGeom prst="roundRect">
             <a:avLst/>
@@ -13860,7 +14025,7 @@
           <a:lstStyle/>
           <a:p>
             <a:pPr algn="l">
-              <a:defRPr sz="1500" b="1">
+              <a:defRPr sz="1450" b="1">
                 <a:solidFill>
                   <a:srgbClr val="2563EB"/>
                 </a:solidFill>
@@ -13876,7 +14041,7 @@
               <a:spcBef>
                 <a:spcPts val="600"/>
               </a:spcBef>
-              <a:defRPr sz="1300" b="1">
+              <a:defRPr sz="1250" b="1">
                 <a:solidFill>
                   <a:srgbClr val="1E3A8A"/>
                 </a:solidFill>
@@ -13892,7 +14057,7 @@
               <a:spcBef>
                 <a:spcPts val="300"/>
               </a:spcBef>
-              <a:defRPr sz="1300" b="0">
+              <a:defRPr sz="1250" b="0">
                 <a:solidFill>
                   <a:srgbClr val="0F172A"/>
                 </a:solidFill>
@@ -13900,7 +14065,7 @@
               </a:defRPr>
             </a:pPr>
             <a:r>
-              <a:t>• Tổng số SKU quản lý, tổng lượng xuất 30 ngày</a:t>
+              <a:t>• Thống kê tổng số SKU, tổng sản lượng xuất kho trong 30 ngày</a:t>
             </a:r>
           </a:p>
           <a:p>
@@ -13908,7 +14073,7 @@
               <a:spcBef>
                 <a:spcPts val="300"/>
               </a:spcBef>
-              <a:defRPr sz="1300" b="0">
+              <a:defRPr sz="1250" b="0">
                 <a:solidFill>
                   <a:srgbClr val="0F172A"/>
                 </a:solidFill>
@@ -13916,7 +14081,7 @@
               </a:defRPr>
             </a:pPr>
             <a:r>
-              <a:t>• Tỷ lệ SKU an toàn vs SKU chạm ngưỡng tối thiểu</a:t>
+              <a:t>• Đánh giá tỷ lệ SKU an toàn so với SKU chạm ngưỡng tồn tối thiểu</a:t>
             </a:r>
           </a:p>
           <a:p>
@@ -13924,7 +14089,7 @@
               <a:spcBef>
                 <a:spcPts val="600"/>
               </a:spcBef>
-              <a:defRPr sz="1300" b="1">
+              <a:defRPr sz="1250" b="1">
                 <a:solidFill>
                   <a:srgbClr val="1E3A8A"/>
                 </a:solidFill>
@@ -13940,7 +14105,7 @@
               <a:spcBef>
                 <a:spcPts val="300"/>
               </a:spcBef>
-              <a:defRPr sz="1300" b="0">
+              <a:defRPr sz="1250" b="0">
                 <a:solidFill>
                   <a:srgbClr val="0F172A"/>
                 </a:solidFill>
@@ -13948,7 +14113,7 @@
               </a:defRPr>
             </a:pPr>
             <a:r>
-              <a:t>• Tính toán thiếu hụt dựa trên Burn-rate tiêu thụ ngày</a:t>
+              <a:t>• Tính toán thiếu hụt dựa trên tốc độ tiêu thụ hàng ngày (Burn-rate)</a:t>
             </a:r>
           </a:p>
           <a:p>
@@ -13956,7 +14121,7 @@
               <a:spcBef>
                 <a:spcPts val="300"/>
               </a:spcBef>
-              <a:defRPr sz="1300" b="0">
+              <a:defRPr sz="1250" b="0">
                 <a:solidFill>
                   <a:srgbClr val="0F172A"/>
                 </a:solidFill>
@@ -13964,7 +14129,7 @@
               </a:defRPr>
             </a:pPr>
             <a:r>
-              <a:t>• Gợi ý cụ thể số lượng nhập cho từng mã SKU vật tư</a:t>
+              <a:t>• Đề xuất định lượng cụ thể số lượng cần nhập cho từng mã SKU</a:t>
             </a:r>
           </a:p>
           <a:p>
@@ -13972,7 +14137,7 @@
               <a:spcBef>
                 <a:spcPts val="600"/>
               </a:spcBef>
-              <a:defRPr sz="1300" b="1">
+              <a:defRPr sz="1250" b="1">
                 <a:solidFill>
                   <a:srgbClr val="1E3A8A"/>
                 </a:solidFill>
@@ -13980,7 +14145,7 @@
               </a:defRPr>
             </a:pPr>
             <a:r>
-              <a:t>PHẦN 3: TÓM TẮT BIẾN ĐỘNG BẤT THƯỜNG</a:t>
+              <a:t>PHẦN 3: TÓM TẮT BIẾN ĐỘNG BẤT THƯỜNG &amp; DEAD STOCK</a:t>
             </a:r>
           </a:p>
           <a:p>
@@ -13988,7 +14153,7 @@
               <a:spcBef>
                 <a:spcPts val="300"/>
               </a:spcBef>
-              <a:defRPr sz="1300" b="0">
+              <a:defRPr sz="1250" b="0">
                 <a:solidFill>
                   <a:srgbClr val="0F172A"/>
                 </a:solidFill>
@@ -13996,7 +14161,7 @@
               </a:defRPr>
             </a:pPr>
             <a:r>
-              <a:t>• Chỉ điểm các mặt hàng có lượng xuất đột biến trong kỳ</a:t>
+              <a:t>• Nhận diện các mặt hàng có lượng xuất đột biến trong kỳ</a:t>
             </a:r>
           </a:p>
           <a:p>
@@ -14004,7 +14169,7 @@
               <a:spcBef>
                 <a:spcPts val="300"/>
               </a:spcBef>
-              <a:defRPr sz="1300" b="0">
+              <a:defRPr sz="1250" b="0">
                 <a:solidFill>
                   <a:srgbClr val="0F172A"/>
                 </a:solidFill>
@@ -14012,7 +14177,7 @@
               </a:defRPr>
             </a:pPr>
             <a:r>
-              <a:t>• Cảnh báo hàng Dead stock &gt; 60 ngày cần giải phóng mặt bằng</a:t>
+              <a:t>• Cảnh báo hàng ứ đọng &gt; 60 ngày cần ưu tiên luân chuyển mặt bằng</a:t>
             </a:r>
           </a:p>
         </p:txBody>
